--- a/deck/Raksha_Hackathon2026_Simplified.pptx
+++ b/deck/Raksha_Hackathon2026_Simplified.pptx
@@ -5335,7 +5335,7 @@
                 <a:cs typeface="Calibri"/>
                 <a:sym typeface="Calibri"/>
               </a:rPr>
-              <a:t>IDEA TITLE</a:t>
+              <a:t>THE PROBLEM</a:t>
             </a:r>
           </a:p>
         </p:txBody>
@@ -5360,9 +5360,7 @@
           </a:ln>
         </p:spPr>
         <p:txBody>
-          <a:bodyPr wrap="square" lIns="0" tIns="0" rIns="0" bIns="0" anchor="t" rtlCol="0">
-            <a:noAutofit/>
-          </a:bodyPr>
+          <a:bodyPr wrap="square" lIns="45720" tIns="18288" rIns="45720" bIns="18288" anchor="ctr" rtlCol="0"/>
           <a:lstStyle/>
           <a:p>
             <a:pPr algn="l">
@@ -5377,54 +5375,25 @@
               </a:spcAft>
             </a:pPr>
             <a:r>
-              <a:rPr lang="en-US" sz="3400" b="1" i="0" dirty="0">
+              <a:rPr sz="3200" b="1" i="0">
                 <a:solidFill>
                   <a:srgbClr val="1E2761"/>
                 </a:solidFill>
                 <a:latin typeface="Calibri"/>
-                <a:cs typeface="Calibri"/>
-              </a:rPr>
-              <a:t>Know the crowd. Catch the bottleneck. Stop the surge.</a:t>
-            </a:r>
-          </a:p>
-          <a:p>
-            <a:pPr algn="l">
-              <a:spcBef>
-                <a:spcPts val="0"/>
-              </a:spcBef>
-              <a:spcAft>
-                <a:spcPts val="600"/>
-              </a:spcAft>
-            </a:pPr>
-            <a:r>
-              <a:rPr lang="en-US" sz="2200" b="0" i="0" dirty="0">
+              </a:rPr>
+              <a:t>Guards watch screens. Danger builds unseen.</a:t>
+            </a:r>
+          </a:p>
+          <a:p>
+            <a:pPr algn="l"/>
+            <a:r>
+              <a:rPr sz="2000" b="0" i="0">
                 <a:solidFill>
                   <a:srgbClr val="111111"/>
                 </a:solidFill>
                 <a:latin typeface="Calibri"/>
-                <a:cs typeface="Calibri"/>
-              </a:rPr>
-              <a:t>Cameras measure how dense each zone is, and how fast it moves.</a:t>
-            </a:r>
-          </a:p>
-          <a:p>
-            <a:pPr algn="l">
-              <a:spcBef>
-                <a:spcPts val="0"/>
-              </a:spcBef>
-              <a:spcAft>
-                <a:spcPts val="0"/>
-              </a:spcAft>
-            </a:pPr>
-            <a:r>
-              <a:rPr lang="en-US" sz="2200" b="0" i="0" dirty="0">
-                <a:solidFill>
-                  <a:srgbClr val="111111"/>
-                </a:solidFill>
-                <a:latin typeface="Calibri"/>
-                <a:cs typeface="Calibri"/>
-              </a:rPr>
-              <a:t>It warns guards before a crush builds.</a:t>
+              </a:rPr>
+              <a:t>A control room watches dozens of flat camera feeds. A guard spots trouble only after the crowd stops moving. By then, crushing pressure is already passing body to body. Stillness is not the warning. It is the accident.</a:t>
             </a:r>
           </a:p>
         </p:txBody>
@@ -5460,12 +5429,10 @@
           </a:effectLst>
         </p:spPr>
         <p:txBody>
-          <a:bodyPr wrap="square" lIns="91440" tIns="91440" rIns="91440" bIns="91440" anchor="ctr" rtlCol="0">
-            <a:noAutofit/>
-          </a:bodyPr>
-          <a:lstStyle/>
-          <a:p>
-            <a:pPr algn="ctr">
+          <a:bodyPr wrap="square" lIns="45720" tIns="18288" rIns="45720" bIns="18288" anchor="ctr" rtlCol="0"/>
+          <a:lstStyle/>
+          <a:p>
+            <a:pPr algn="l">
               <a:spcBef>
                 <a:spcPts val="0"/>
               </a:spcBef>
@@ -5474,34 +5441,25 @@
               </a:spcAft>
             </a:pPr>
             <a:r>
-              <a:rPr lang="en-US" sz="4800" b="1" i="0" dirty="0">
+              <a:rPr sz="2000" b="1" i="0">
                 <a:solidFill>
                   <a:srgbClr val="1E2761"/>
                 </a:solidFill>
                 <a:latin typeface="Calibri"/>
-                <a:cs typeface="Calibri"/>
-              </a:rPr>
-              <a:t>18</a:t>
-            </a:r>
-          </a:p>
-          <a:p>
-            <a:pPr algn="ctr">
-              <a:spcBef>
-                <a:spcPts val="0"/>
-              </a:spcBef>
-              <a:spcAft>
-                <a:spcPts val="0"/>
-              </a:spcAft>
-            </a:pPr>
-            <a:r>
-              <a:rPr lang="en-US" sz="1700" b="0" i="0" dirty="0">
-                <a:solidFill>
-                  <a:srgbClr val="5A5A5A"/>
-                </a:solidFill>
-                <a:latin typeface="Calibri"/>
-                <a:cs typeface="Calibri"/>
-              </a:rPr>
-              <a:t>tracked at once</a:t>
+              </a:rPr>
+              <a:t>Kumbh 2025</a:t>
+            </a:r>
+          </a:p>
+          <a:p>
+            <a:pPr algn="l"/>
+            <a:r>
+              <a:rPr sz="1500" b="0" i="0">
+                <a:solidFill>
+                  <a:srgbClr val="111111"/>
+                </a:solidFill>
+                <a:latin typeface="Calibri"/>
+              </a:rPr>
+              <a:t>2,751 cameras and AI alerts were live. The crush still killed 30.</a:t>
             </a:r>
           </a:p>
         </p:txBody>
@@ -5537,12 +5495,10 @@
           </a:effectLst>
         </p:spPr>
         <p:txBody>
-          <a:bodyPr wrap="square" lIns="91440" tIns="91440" rIns="91440" bIns="91440" anchor="ctr" rtlCol="0">
-            <a:noAutofit/>
-          </a:bodyPr>
-          <a:lstStyle/>
-          <a:p>
-            <a:pPr algn="ctr">
+          <a:bodyPr wrap="square" lIns="45720" tIns="18288" rIns="45720" bIns="18288" anchor="ctr" rtlCol="0"/>
+          <a:lstStyle/>
+          <a:p>
+            <a:pPr algn="l">
               <a:spcBef>
                 <a:spcPts val="0"/>
               </a:spcBef>
@@ -5551,34 +5507,25 @@
               </a:spcAft>
             </a:pPr>
             <a:r>
-              <a:rPr lang="en-US" sz="4800" b="1" i="0" dirty="0">
+              <a:rPr sz="2000" b="1" i="0">
                 <a:solidFill>
                   <a:srgbClr val="1E2761"/>
                 </a:solidFill>
                 <a:latin typeface="Calibri"/>
-                <a:cs typeface="Calibri"/>
-              </a:rPr>
-              <a:t>&lt;1s</a:t>
-            </a:r>
-          </a:p>
-          <a:p>
-            <a:pPr algn="ctr">
-              <a:spcBef>
-                <a:spcPts val="0"/>
-              </a:spcBef>
-              <a:spcAft>
-                <a:spcPts val="0"/>
-              </a:spcAft>
-            </a:pPr>
-            <a:r>
-              <a:rPr lang="en-US" sz="1700" b="0" i="0" dirty="0">
-                <a:solidFill>
-                  <a:srgbClr val="5A5A5A"/>
-                </a:solidFill>
-                <a:latin typeface="Calibri"/>
-                <a:cs typeface="Calibri"/>
-              </a:rPr>
-              <a:t>guard warned</a:t>
+              </a:rPr>
+              <a:t>Itaewon 2022</a:t>
+            </a:r>
+          </a:p>
+          <a:p>
+            <a:pPr algn="l"/>
+            <a:r>
+              <a:rPr sz="1500" b="0" i="0">
+                <a:solidFill>
+                  <a:srgbClr val="111111"/>
+                </a:solidFill>
+                <a:latin typeface="Calibri"/>
+              </a:rPr>
+              <a:t>159 dead in a 3.2 metre alley. 11 calls ignored. No machine spoke up.</a:t>
             </a:r>
           </a:p>
         </p:txBody>
@@ -5614,12 +5561,10 @@
           </a:effectLst>
         </p:spPr>
         <p:txBody>
-          <a:bodyPr wrap="square" lIns="91440" tIns="91440" rIns="91440" bIns="91440" anchor="ctr" rtlCol="0">
-            <a:noAutofit/>
-          </a:bodyPr>
-          <a:lstStyle/>
-          <a:p>
-            <a:pPr algn="ctr">
+          <a:bodyPr wrap="square" lIns="45720" tIns="18288" rIns="45720" bIns="18288" anchor="ctr" rtlCol="0"/>
+          <a:lstStyle/>
+          <a:p>
+            <a:pPr algn="l">
               <a:spcBef>
                 <a:spcPts val="0"/>
               </a:spcBef>
@@ -5628,48 +5573,39 @@
               </a:spcAft>
             </a:pPr>
             <a:r>
-              <a:rPr lang="en-US" sz="4800" b="1" i="0" dirty="0">
+              <a:rPr sz="2000" b="1" i="0">
                 <a:solidFill>
                   <a:srgbClr val="1E2761"/>
                 </a:solidFill>
                 <a:latin typeface="Calibri"/>
-                <a:cs typeface="Calibri"/>
-              </a:rPr>
-              <a:t>15</a:t>
-            </a:r>
-          </a:p>
-          <a:p>
-            <a:pPr algn="ctr">
-              <a:spcBef>
-                <a:spcPts val="0"/>
-              </a:spcBef>
-              <a:spcAft>
-                <a:spcPts val="0"/>
-              </a:spcAft>
-            </a:pPr>
-            <a:r>
-              <a:rPr lang="en-US" sz="1700" b="0" i="0" dirty="0">
-                <a:solidFill>
-                  <a:srgbClr val="5A5A5A"/>
-                </a:solidFill>
-                <a:latin typeface="Calibri"/>
-                <a:cs typeface="Calibri"/>
-              </a:rPr>
-              <a:t>video checks every second</a:t>
-            </a:r>
-          </a:p>
-        </p:txBody>
-      </p:sp>
-      <p:sp>
-        <p:nvSpPr>
-          <p:cNvPr id="105" name="TextBox 105"/>
+              </a:rPr>
+              <a:t>7 per m2</a:t>
+            </a:r>
+          </a:p>
+          <a:p>
+            <a:pPr algn="l"/>
+            <a:r>
+              <a:rPr sz="1500" b="0" i="0">
+                <a:solidFill>
+                  <a:srgbClr val="111111"/>
+                </a:solidFill>
+                <a:latin typeface="Calibri"/>
+              </a:rPr>
+              <a:t>A crowd turns fluid. Shockwaves throw people metres. (Fruin)</a:t>
+            </a:r>
+          </a:p>
+        </p:txBody>
+      </p:sp>
+      <p:sp>
+        <p:nvSpPr>
+          <p:cNvPr id="113" name="TextBox 113"/>
           <p:cNvSpPr txBox="1"/>
           <p:nvPr/>
         </p:nvSpPr>
         <p:spPr>
           <a:xfrm>
-            <a:off x="731520" y="6949440"/>
-            <a:ext cx="7863840" cy="457200"/>
+            <a:off x="8961120" y="7269480"/>
+            <a:ext cx="8595360" cy="365760"/>
           </a:xfrm>
           <a:prstGeom prst="rect">
             <a:avLst/>
@@ -5680,9 +5616,7 @@
           </a:ln>
         </p:spPr>
         <p:txBody>
-          <a:bodyPr wrap="square" lIns="0" tIns="0" rIns="0" bIns="0" anchor="ctr" rtlCol="0">
-            <a:noAutofit/>
-          </a:bodyPr>
+          <a:bodyPr wrap="square" lIns="45720" tIns="18288" rIns="45720" bIns="18288" anchor="ctr" rtlCol="0"/>
           <a:lstStyle/>
           <a:p>
             <a:pPr algn="l">
@@ -5694,787 +5628,13 @@
               </a:spcAft>
             </a:pPr>
             <a:r>
-              <a:rPr lang="en-US" sz="2400" b="1" i="0" dirty="0">
-                <a:solidFill>
-                  <a:srgbClr val="1E2761"/>
-                </a:solidFill>
-                <a:latin typeface="Calibri"/>
-                <a:cs typeface="Calibri"/>
-              </a:rPr>
-              <a:t>Watch it work</a:t>
-            </a:r>
-          </a:p>
-        </p:txBody>
-      </p:sp>
-      <p:sp>
-        <p:nvSpPr>
-          <p:cNvPr id="106" name="Num 106"/>
-          <p:cNvSpPr/>
-          <p:nvPr/>
-        </p:nvSpPr>
-        <p:spPr>
-          <a:xfrm>
-            <a:off x="731520" y="7589520"/>
-            <a:ext cx="475488" cy="475488"/>
-          </a:xfrm>
-          <a:prstGeom prst="ellipse">
-            <a:avLst/>
-          </a:prstGeom>
-          <a:solidFill>
-            <a:srgbClr val="D9A441"/>
-          </a:solidFill>
-          <a:ln>
-            <a:noFill/>
-          </a:ln>
-        </p:spPr>
-        <p:txBody>
-          <a:bodyPr wrap="square" lIns="0" tIns="0" rIns="0" bIns="0" anchor="ctr" rtlCol="0">
-            <a:noAutofit/>
-          </a:bodyPr>
-          <a:lstStyle/>
-          <a:p>
-            <a:pPr algn="ctr">
-              <a:spcBef>
-                <a:spcPts val="0"/>
-              </a:spcBef>
-              <a:spcAft>
-                <a:spcPts val="0"/>
-              </a:spcAft>
-            </a:pPr>
-            <a:r>
-              <a:rPr lang="en-US" sz="2000" b="1" i="0" dirty="0">
-                <a:solidFill>
-                  <a:srgbClr val="FFFFFF"/>
-                </a:solidFill>
-                <a:latin typeface="Calibri"/>
-                <a:cs typeface="Calibri"/>
-              </a:rPr>
-              <a:t>1</a:t>
-            </a:r>
-          </a:p>
-        </p:txBody>
-      </p:sp>
-      <p:sp>
-        <p:nvSpPr>
-          <p:cNvPr id="107" name="TextBox 107"/>
-          <p:cNvSpPr txBox="1"/>
-          <p:nvPr/>
-        </p:nvSpPr>
-        <p:spPr>
-          <a:xfrm>
-            <a:off x="1417320" y="7552944"/>
-            <a:ext cx="7223760" cy="548640"/>
-          </a:xfrm>
-          <a:prstGeom prst="rect">
-            <a:avLst/>
-          </a:prstGeom>
-          <a:noFill/>
-          <a:ln>
-            <a:noFill/>
-          </a:ln>
-        </p:spPr>
-        <p:txBody>
-          <a:bodyPr wrap="square" lIns="0" tIns="0" rIns="0" bIns="0" anchor="ctr" rtlCol="0">
-            <a:noAutofit/>
-          </a:bodyPr>
-          <a:lstStyle/>
-          <a:p>
-            <a:pPr algn="l">
-              <a:spcBef>
-                <a:spcPts val="0"/>
-              </a:spcBef>
-              <a:spcAft>
-                <a:spcPts val="0"/>
-              </a:spcAft>
-            </a:pPr>
-            <a:r>
-              <a:rPr lang="en-US" sz="2000" b="0" i="0" dirty="0">
-                <a:solidFill>
-                  <a:srgbClr val="111111"/>
-                </a:solidFill>
-                <a:latin typeface="Calibri"/>
-                <a:cs typeface="Calibri"/>
-              </a:rPr>
-              <a:t>Live feed: every person counted, zone density tracked.</a:t>
-            </a:r>
-          </a:p>
-        </p:txBody>
-      </p:sp>
-      <p:sp>
-        <p:nvSpPr>
-          <p:cNvPr id="108" name="Num 108"/>
-          <p:cNvSpPr/>
-          <p:nvPr/>
-        </p:nvSpPr>
-        <p:spPr>
-          <a:xfrm>
-            <a:off x="731520" y="8247888"/>
-            <a:ext cx="475488" cy="475488"/>
-          </a:xfrm>
-          <a:prstGeom prst="ellipse">
-            <a:avLst/>
-          </a:prstGeom>
-          <a:solidFill>
-            <a:srgbClr val="D9A441"/>
-          </a:solidFill>
-          <a:ln>
-            <a:noFill/>
-          </a:ln>
-        </p:spPr>
-        <p:txBody>
-          <a:bodyPr wrap="square" lIns="0" tIns="0" rIns="0" bIns="0" anchor="ctr" rtlCol="0">
-            <a:noAutofit/>
-          </a:bodyPr>
-          <a:lstStyle/>
-          <a:p>
-            <a:pPr algn="ctr">
-              <a:spcBef>
-                <a:spcPts val="0"/>
-              </a:spcBef>
-              <a:spcAft>
-                <a:spcPts val="0"/>
-              </a:spcAft>
-            </a:pPr>
-            <a:r>
-              <a:rPr lang="en-US" sz="2000" b="1" i="0" dirty="0">
-                <a:solidFill>
-                  <a:srgbClr val="FFFFFF"/>
-                </a:solidFill>
-                <a:latin typeface="Calibri"/>
-                <a:cs typeface="Calibri"/>
-              </a:rPr>
-              <a:t>2</a:t>
-            </a:r>
-          </a:p>
-        </p:txBody>
-      </p:sp>
-      <p:sp>
-        <p:nvSpPr>
-          <p:cNvPr id="109" name="TextBox 109"/>
-          <p:cNvSpPr txBox="1"/>
-          <p:nvPr/>
-        </p:nvSpPr>
-        <p:spPr>
-          <a:xfrm>
-            <a:off x="1417320" y="8211312"/>
-            <a:ext cx="7223760" cy="548640"/>
-          </a:xfrm>
-          <a:prstGeom prst="rect">
-            <a:avLst/>
-          </a:prstGeom>
-          <a:noFill/>
-          <a:ln>
-            <a:noFill/>
-          </a:ln>
-        </p:spPr>
-        <p:txBody>
-          <a:bodyPr wrap="square" lIns="0" tIns="0" rIns="0" bIns="0" anchor="ctr" rtlCol="0">
-            <a:noAutofit/>
-          </a:bodyPr>
-          <a:lstStyle/>
-          <a:p>
-            <a:pPr algn="l">
-              <a:spcBef>
-                <a:spcPts val="0"/>
-              </a:spcBef>
-              <a:spcAft>
-                <a:spcPts val="0"/>
-              </a:spcAft>
-            </a:pPr>
-            <a:r>
-              <a:rPr lang="en-US" sz="2000" b="0" i="0" dirty="0">
-                <a:solidFill>
-                  <a:srgbClr val="111111"/>
-                </a:solidFill>
-                <a:latin typeface="Calibri"/>
-                <a:cs typeface="Calibri"/>
-              </a:rPr>
-              <a:t>A zone packs up and stops: bottleneck flagged.</a:t>
-            </a:r>
-          </a:p>
-        </p:txBody>
-      </p:sp>
-      <p:sp>
-        <p:nvSpPr>
-          <p:cNvPr id="110" name="Num 110"/>
-          <p:cNvSpPr/>
-          <p:nvPr/>
-        </p:nvSpPr>
-        <p:spPr>
-          <a:xfrm>
-            <a:off x="731520" y="8906256"/>
-            <a:ext cx="475488" cy="475488"/>
-          </a:xfrm>
-          <a:prstGeom prst="ellipse">
-            <a:avLst/>
-          </a:prstGeom>
-          <a:solidFill>
-            <a:srgbClr val="D9A441"/>
-          </a:solidFill>
-          <a:ln>
-            <a:noFill/>
-          </a:ln>
-        </p:spPr>
-        <p:txBody>
-          <a:bodyPr wrap="square" lIns="0" tIns="0" rIns="0" bIns="0" anchor="ctr" rtlCol="0">
-            <a:noAutofit/>
-          </a:bodyPr>
-          <a:lstStyle/>
-          <a:p>
-            <a:pPr algn="ctr">
-              <a:spcBef>
-                <a:spcPts val="0"/>
-              </a:spcBef>
-              <a:spcAft>
-                <a:spcPts val="0"/>
-              </a:spcAft>
-            </a:pPr>
-            <a:r>
-              <a:rPr lang="en-US" sz="2000" b="1" i="0" dirty="0">
-                <a:solidFill>
-                  <a:srgbClr val="FFFFFF"/>
-                </a:solidFill>
-                <a:latin typeface="Calibri"/>
-                <a:cs typeface="Calibri"/>
-              </a:rPr>
-              <a:t>3</a:t>
-            </a:r>
-          </a:p>
-        </p:txBody>
-      </p:sp>
-      <p:sp>
-        <p:nvSpPr>
-          <p:cNvPr id="111" name="TextBox 111"/>
-          <p:cNvSpPr txBox="1"/>
-          <p:nvPr/>
-        </p:nvSpPr>
-        <p:spPr>
-          <a:xfrm>
-            <a:off x="1417320" y="8869680"/>
-            <a:ext cx="7223760" cy="548640"/>
-          </a:xfrm>
-          <a:prstGeom prst="rect">
-            <a:avLst/>
-          </a:prstGeom>
-          <a:noFill/>
-          <a:ln>
-            <a:noFill/>
-          </a:ln>
-        </p:spPr>
-        <p:txBody>
-          <a:bodyPr wrap="square" lIns="0" tIns="0" rIns="0" bIns="0" anchor="ctr" rtlCol="0">
-            <a:noAutofit/>
-          </a:bodyPr>
-          <a:lstStyle/>
-          <a:p>
-            <a:pPr algn="l">
-              <a:spcBef>
-                <a:spcPts val="0"/>
-              </a:spcBef>
-              <a:spcAft>
-                <a:spcPts val="0"/>
-              </a:spcAft>
-            </a:pPr>
-            <a:r>
-              <a:rPr lang="en-US" sz="2000" b="0" i="0" dirty="0">
-                <a:solidFill>
-                  <a:srgbClr val="111111"/>
-                </a:solidFill>
-                <a:latin typeface="Calibri"/>
-                <a:cs typeface="Calibri"/>
-              </a:rPr>
-              <a:t>Guard warned in seconds; wall shows time left to critical.</a:t>
-            </a:r>
-          </a:p>
-        </p:txBody>
-      </p:sp>
-      <p:sp>
-        <p:nvSpPr>
-          <p:cNvPr id="113" name="TextBox 113"/>
-          <p:cNvSpPr txBox="1"/>
-          <p:nvPr/>
-        </p:nvSpPr>
-        <p:spPr>
-          <a:xfrm>
-            <a:off x="8961120" y="7269480"/>
-            <a:ext cx="8595360" cy="365760"/>
-          </a:xfrm>
-          <a:prstGeom prst="rect">
-            <a:avLst/>
-          </a:prstGeom>
-          <a:noFill/>
-          <a:ln>
-            <a:noFill/>
-          </a:ln>
-        </p:spPr>
-        <p:txBody>
-          <a:bodyPr wrap="square" lIns="0" tIns="0" rIns="0" bIns="0" anchor="ctr" rtlCol="0">
-            <a:noAutofit/>
-          </a:bodyPr>
-          <a:lstStyle/>
-          <a:p>
-            <a:pPr algn="l">
-              <a:spcBef>
-                <a:spcPts val="0"/>
-              </a:spcBef>
-              <a:spcAft>
-                <a:spcPts val="0"/>
-              </a:spcAft>
-            </a:pPr>
-            <a:r>
-              <a:rPr lang="en-US" sz="1600" b="0" i="1" dirty="0">
+              <a:rPr sz="1600" b="0" i="1">
                 <a:solidFill>
                   <a:srgbClr val="5A5A5A"/>
                 </a:solidFill>
                 <a:latin typeface="Calibri"/>
-                <a:cs typeface="Calibri"/>
-              </a:rPr>
-              <a:t>Guard screen: one map with every zone ranked by risk.</a:t>
-            </a:r>
-          </a:p>
-        </p:txBody>
-      </p:sp>
-      <p:sp>
-        <p:nvSpPr>
-          <p:cNvPr id="114" name="Legend 114"/>
-          <p:cNvSpPr/>
-          <p:nvPr/>
-        </p:nvSpPr>
-        <p:spPr>
-          <a:xfrm>
-            <a:off x="8961120" y="7818120"/>
-            <a:ext cx="8595360" cy="1737360"/>
-          </a:xfrm>
-          <a:prstGeom prst="roundRect">
-            <a:avLst>
-              <a:gd name="adj" fmla="val 9000"/>
-            </a:avLst>
-          </a:prstGeom>
-          <a:solidFill>
-            <a:srgbClr val="EEF2FF"/>
-          </a:solidFill>
-          <a:ln>
-            <a:noFill/>
-          </a:ln>
-          <a:effectLst>
-            <a:outerShdw blurRad="127000" dist="38100" dir="5400000" algn="t" rotWithShape="0">
-              <a:srgbClr val="1E2761">
-                <a:alpha val="16000"/>
-              </a:srgbClr>
-            </a:outerShdw>
-          </a:effectLst>
-        </p:spPr>
-        <p:txBody>
-          <a:bodyPr wrap="square" lIns="0" tIns="0" rIns="0" bIns="0" anchor="ctr" rtlCol="0">
-            <a:noAutofit/>
-          </a:bodyPr>
-          <a:lstStyle/>
-          <a:p>
-            <a:pPr algn="l">
-              <a:spcBef>
-                <a:spcPts val="0"/>
-              </a:spcBef>
-              <a:spcAft>
-                <a:spcPts val="0"/>
-              </a:spcAft>
-            </a:pPr>
-            <a:r>
-              <a:rPr lang="en-US" sz="1200" b="0" i="0" dirty="0">
-                <a:solidFill>
-                  <a:srgbClr val="111111"/>
-                </a:solidFill>
-                <a:latin typeface="Calibri"/>
-                <a:cs typeface="Calibri"/>
-              </a:rPr>
-              <a:t/>
-            </a:r>
-          </a:p>
-        </p:txBody>
-      </p:sp>
-      <p:sp>
-        <p:nvSpPr>
-          <p:cNvPr id="115" name="TextBox 115"/>
-          <p:cNvSpPr txBox="1"/>
-          <p:nvPr/>
-        </p:nvSpPr>
-        <p:spPr>
-          <a:xfrm>
-            <a:off x="9281160" y="7936992"/>
-            <a:ext cx="7955280" cy="411480"/>
-          </a:xfrm>
-          <a:prstGeom prst="rect">
-            <a:avLst/>
-          </a:prstGeom>
-          <a:noFill/>
-          <a:ln>
-            <a:noFill/>
-          </a:ln>
-        </p:spPr>
-        <p:txBody>
-          <a:bodyPr wrap="square" lIns="0" tIns="0" rIns="0" bIns="0" anchor="ctr" rtlCol="0">
-            <a:noAutofit/>
-          </a:bodyPr>
-          <a:lstStyle/>
-          <a:p>
-            <a:pPr algn="l">
-              <a:spcBef>
-                <a:spcPts val="0"/>
-              </a:spcBef>
-              <a:spcAft>
-                <a:spcPts val="0"/>
-              </a:spcAft>
-            </a:pPr>
-            <a:r>
-              <a:rPr lang="en-US" sz="2000" b="1" i="0" dirty="0">
-                <a:solidFill>
-                  <a:srgbClr val="1E2761"/>
-                </a:solidFill>
-                <a:latin typeface="Calibri"/>
-                <a:cs typeface="Calibri"/>
-              </a:rPr>
-              <a:t>What the colours mean</a:t>
-            </a:r>
-          </a:p>
-        </p:txBody>
-      </p:sp>
-      <p:sp>
-        <p:nvSpPr>
-          <p:cNvPr id="116" name="Dot 116"/>
-          <p:cNvSpPr/>
-          <p:nvPr/>
-        </p:nvSpPr>
-        <p:spPr>
-          <a:xfrm>
-            <a:off x="9281160" y="8522208"/>
-            <a:ext cx="256032" cy="256032"/>
-          </a:xfrm>
-          <a:prstGeom prst="ellipse">
-            <a:avLst/>
-          </a:prstGeom>
-          <a:solidFill>
-            <a:srgbClr val="2E9E5B"/>
-          </a:solidFill>
-          <a:ln>
-            <a:noFill/>
-          </a:ln>
-        </p:spPr>
-        <p:txBody>
-          <a:bodyPr wrap="square" lIns="0" tIns="0" rIns="0" bIns="0" anchor="ctr" rtlCol="0">
-            <a:noAutofit/>
-          </a:bodyPr>
-          <a:lstStyle/>
-          <a:p>
-            <a:pPr algn="l">
-              <a:spcBef>
-                <a:spcPts val="0"/>
-              </a:spcBef>
-              <a:spcAft>
-                <a:spcPts val="0"/>
-              </a:spcAft>
-            </a:pPr>
-            <a:r>
-              <a:rPr lang="en-US" sz="1200" b="0" i="0" dirty="0">
-                <a:solidFill>
-                  <a:srgbClr val="111111"/>
-                </a:solidFill>
-                <a:latin typeface="Calibri"/>
-                <a:cs typeface="Calibri"/>
-              </a:rPr>
-              <a:t/>
-            </a:r>
-          </a:p>
-        </p:txBody>
-      </p:sp>
-      <p:sp>
-        <p:nvSpPr>
-          <p:cNvPr id="117" name="TextBox 117"/>
-          <p:cNvSpPr txBox="1"/>
-          <p:nvPr/>
-        </p:nvSpPr>
-        <p:spPr>
-          <a:xfrm>
-            <a:off x="9646920" y="8449056"/>
-            <a:ext cx="2286000" cy="1005840"/>
-          </a:xfrm>
-          <a:prstGeom prst="rect">
-            <a:avLst/>
-          </a:prstGeom>
-          <a:noFill/>
-          <a:ln>
-            <a:noFill/>
-          </a:ln>
-        </p:spPr>
-        <p:txBody>
-          <a:bodyPr wrap="square" lIns="0" tIns="0" rIns="0" bIns="0" anchor="t" rtlCol="0">
-            <a:noAutofit/>
-          </a:bodyPr>
-          <a:lstStyle/>
-          <a:p>
-            <a:pPr algn="l">
-              <a:spcBef>
-                <a:spcPts val="0"/>
-              </a:spcBef>
-              <a:spcAft>
-                <a:spcPts val="100"/>
-              </a:spcAft>
-            </a:pPr>
-            <a:r>
-              <a:rPr lang="en-US" sz="1800" b="1" i="0" dirty="0">
-                <a:solidFill>
-                  <a:srgbClr val="111111"/>
-                </a:solidFill>
-                <a:latin typeface="Calibri"/>
-                <a:cs typeface="Calibri"/>
-              </a:rPr>
-              <a:t>Calm</a:t>
-            </a:r>
-          </a:p>
-          <a:p>
-            <a:pPr algn="l">
-              <a:spcBef>
-                <a:spcPts val="0"/>
-              </a:spcBef>
-              <a:spcAft>
-                <a:spcPts val="0"/>
-              </a:spcAft>
-            </a:pPr>
-            <a:r>
-              <a:rPr lang="en-US" sz="1500" b="0" i="0" dirty="0">
-                <a:solidFill>
-                  <a:srgbClr val="5A5A5A"/>
-                </a:solidFill>
-                <a:latin typeface="Calibri"/>
-                <a:cs typeface="Calibri"/>
-              </a:rPr>
-              <a:t>All is well.</a:t>
-            </a:r>
-          </a:p>
-        </p:txBody>
-      </p:sp>
-      <p:sp>
-        <p:nvSpPr>
-          <p:cNvPr id="118" name="Dot 118"/>
-          <p:cNvSpPr/>
-          <p:nvPr/>
-        </p:nvSpPr>
-        <p:spPr>
-          <a:xfrm>
-            <a:off x="12024360" y="8522208"/>
-            <a:ext cx="256032" cy="256032"/>
-          </a:xfrm>
-          <a:prstGeom prst="ellipse">
-            <a:avLst/>
-          </a:prstGeom>
-          <a:solidFill>
-            <a:srgbClr val="E5B822"/>
-          </a:solidFill>
-          <a:ln>
-            <a:noFill/>
-          </a:ln>
-        </p:spPr>
-        <p:txBody>
-          <a:bodyPr wrap="square" lIns="0" tIns="0" rIns="0" bIns="0" anchor="ctr" rtlCol="0">
-            <a:noAutofit/>
-          </a:bodyPr>
-          <a:lstStyle/>
-          <a:p>
-            <a:pPr algn="l">
-              <a:spcBef>
-                <a:spcPts val="0"/>
-              </a:spcBef>
-              <a:spcAft>
-                <a:spcPts val="0"/>
-              </a:spcAft>
-            </a:pPr>
-            <a:r>
-              <a:rPr lang="en-US" sz="1200" b="0" i="0" dirty="0">
-                <a:solidFill>
-                  <a:srgbClr val="111111"/>
-                </a:solidFill>
-                <a:latin typeface="Calibri"/>
-                <a:cs typeface="Calibri"/>
-              </a:rPr>
-              <a:t/>
-            </a:r>
-          </a:p>
-        </p:txBody>
-      </p:sp>
-      <p:sp>
-        <p:nvSpPr>
-          <p:cNvPr id="119" name="TextBox 119"/>
-          <p:cNvSpPr txBox="1"/>
-          <p:nvPr/>
-        </p:nvSpPr>
-        <p:spPr>
-          <a:xfrm>
-            <a:off x="12390120" y="8449056"/>
-            <a:ext cx="2286000" cy="1005840"/>
-          </a:xfrm>
-          <a:prstGeom prst="rect">
-            <a:avLst/>
-          </a:prstGeom>
-          <a:noFill/>
-          <a:ln>
-            <a:noFill/>
-          </a:ln>
-        </p:spPr>
-        <p:txBody>
-          <a:bodyPr wrap="square" lIns="0" tIns="0" rIns="0" bIns="0" anchor="t" rtlCol="0">
-            <a:noAutofit/>
-          </a:bodyPr>
-          <a:lstStyle/>
-          <a:p>
-            <a:pPr algn="l">
-              <a:spcBef>
-                <a:spcPts val="0"/>
-              </a:spcBef>
-              <a:spcAft>
-                <a:spcPts val="100"/>
-              </a:spcAft>
-            </a:pPr>
-            <a:r>
-              <a:rPr lang="en-US" sz="1800" b="1" i="0" dirty="0">
-                <a:solidFill>
-                  <a:srgbClr val="111111"/>
-                </a:solidFill>
-                <a:latin typeface="Calibri"/>
-                <a:cs typeface="Calibri"/>
-              </a:rPr>
-              <a:t>Watch</a:t>
-            </a:r>
-          </a:p>
-          <a:p>
-            <a:pPr algn="l">
-              <a:spcBef>
-                <a:spcPts val="0"/>
-              </a:spcBef>
-              <a:spcAft>
-                <a:spcPts val="0"/>
-              </a:spcAft>
-            </a:pPr>
-            <a:r>
-              <a:rPr lang="en-US" sz="1500" b="0" i="0" dirty="0">
-                <a:solidFill>
-                  <a:srgbClr val="5A5A5A"/>
-                </a:solidFill>
-                <a:latin typeface="Calibri"/>
-                <a:cs typeface="Calibri"/>
-              </a:rPr>
-              <a:t>Getting crowded. Guards get an early warning.</a:t>
-            </a:r>
-          </a:p>
-        </p:txBody>
-      </p:sp>
-      <p:sp>
-        <p:nvSpPr>
-          <p:cNvPr id="120" name="Dot 120"/>
-          <p:cNvSpPr/>
-          <p:nvPr/>
-        </p:nvSpPr>
-        <p:spPr>
-          <a:xfrm>
-            <a:off x="14767560" y="8522208"/>
-            <a:ext cx="256032" cy="256032"/>
-          </a:xfrm>
-          <a:prstGeom prst="ellipse">
-            <a:avLst/>
-          </a:prstGeom>
-          <a:solidFill>
-            <a:srgbClr val="D64545"/>
-          </a:solidFill>
-          <a:ln>
-            <a:noFill/>
-          </a:ln>
-        </p:spPr>
-        <p:txBody>
-          <a:bodyPr wrap="square" lIns="0" tIns="0" rIns="0" bIns="0" anchor="ctr" rtlCol="0">
-            <a:noAutofit/>
-          </a:bodyPr>
-          <a:lstStyle/>
-          <a:p>
-            <a:pPr algn="l">
-              <a:spcBef>
-                <a:spcPts val="0"/>
-              </a:spcBef>
-              <a:spcAft>
-                <a:spcPts val="0"/>
-              </a:spcAft>
-            </a:pPr>
-            <a:r>
-              <a:rPr lang="en-US" sz="1200" b="0" i="0" dirty="0">
-                <a:solidFill>
-                  <a:srgbClr val="111111"/>
-                </a:solidFill>
-                <a:latin typeface="Calibri"/>
-                <a:cs typeface="Calibri"/>
-              </a:rPr>
-              <a:t/>
-            </a:r>
-          </a:p>
-        </p:txBody>
-      </p:sp>
-      <p:sp>
-        <p:nvSpPr>
-          <p:cNvPr id="121" name="TextBox 121"/>
-          <p:cNvSpPr txBox="1"/>
-          <p:nvPr/>
-        </p:nvSpPr>
-        <p:spPr>
-          <a:xfrm>
-            <a:off x="15133320" y="8449056"/>
-            <a:ext cx="2286000" cy="1005840"/>
-          </a:xfrm>
-          <a:prstGeom prst="rect">
-            <a:avLst/>
-          </a:prstGeom>
-          <a:noFill/>
-          <a:ln>
-            <a:noFill/>
-          </a:ln>
-        </p:spPr>
-        <p:txBody>
-          <a:bodyPr wrap="square" lIns="0" tIns="0" rIns="0" bIns="0" anchor="t" rtlCol="0">
-            <a:noAutofit/>
-          </a:bodyPr>
-          <a:lstStyle/>
-          <a:p>
-            <a:pPr algn="l">
-              <a:spcBef>
-                <a:spcPts val="0"/>
-              </a:spcBef>
-              <a:spcAft>
-                <a:spcPts val="100"/>
-              </a:spcAft>
-            </a:pPr>
-            <a:r>
-              <a:rPr lang="en-US" sz="1800" b="1" i="0" dirty="0">
-                <a:solidFill>
-                  <a:srgbClr val="111111"/>
-                </a:solidFill>
-                <a:latin typeface="Calibri"/>
-                <a:cs typeface="Calibri"/>
-              </a:rPr>
-              <a:t>Critical</a:t>
-            </a:r>
-          </a:p>
-          <a:p>
-            <a:pPr algn="l">
-              <a:spcBef>
-                <a:spcPts val="0"/>
-              </a:spcBef>
-              <a:spcAft>
-                <a:spcPts val="0"/>
-              </a:spcAft>
-            </a:pPr>
-            <a:r>
-              <a:rPr lang="en-US" sz="1500" b="0" i="0" dirty="0">
-                <a:solidFill>
-                  <a:srgbClr val="5A5A5A"/>
-                </a:solidFill>
-                <a:latin typeface="Calibri"/>
-                <a:cs typeface="Calibri"/>
-              </a:rPr>
-              <a:t>Crowd packed and stuck. Clear the area now.</a:t>
+              </a:rPr>
+              <a:t>Four hours of human warning. No machine ever paged anyone.</a:t>
             </a:r>
           </a:p>
         </p:txBody>
@@ -6527,7 +5687,7 @@
       </p:sp>
       <p:sp>
         <p:nvSpPr>
-          <p:cNvPr id="123" name="VM card"/>
+          <p:cNvPr id="123" name="P2 time"/>
           <p:cNvSpPr/>
           <p:nvPr/>
         </p:nvSpPr>
@@ -6572,14 +5732,14 @@
       </p:sp>
       <p:sp>
         <p:nvSpPr>
-          <p:cNvPr id="124" name="VM title"/>
+          <p:cNvPr id="124" name="P2 timet"/>
           <p:cNvSpPr txBox="1"/>
           <p:nvPr/>
         </p:nvSpPr>
         <p:spPr>
           <a:xfrm>
             <a:off x="9235440" y="2743200"/>
-            <a:ext cx="8046720" cy="502920"/>
+            <a:ext cx="8046720" cy="548640"/>
           </a:xfrm>
           <a:prstGeom prst="rect">
             <a:avLst/>
@@ -6587,7 +5747,7 @@
           <a:noFill/>
         </p:spPr>
         <p:txBody>
-          <a:bodyPr wrap="square" anchor="ctr" lIns="27432" rIns="27432" tIns="9144" bIns="9144"/>
+          <a:bodyPr wrap="square" anchor="ctr" lIns="45720" rIns="45720" tIns="18288" bIns="18288"/>
           <a:lstStyle/>
           <a:p>
             <a:pPr algn="l"/>
@@ -6598,38 +5758,27 @@
                 </a:solidFill>
                 <a:latin typeface="Calibri"/>
               </a:rPr>
-              <a:t>Venue map</a:t>
-            </a:r>
-            <a:r>
-              <a:rPr sz="1600" b="0" i="0">
-                <a:solidFill>
-                  <a:srgbClr val="1E2761"/>
-                </a:solidFill>
-                <a:latin typeface="Calibri"/>
-              </a:rPr>
-              <a:t>  — every zone ranked by risk</a:t>
-            </a:r>
-          </a:p>
-        </p:txBody>
-      </p:sp>
-      <p:sp>
-        <p:nvSpPr>
-          <p:cNvPr id="125" name="VM tile Stage"/>
+              <a:t>Itaewon, 29 October 2022</a:t>
+            </a:r>
+          </a:p>
+        </p:txBody>
+      </p:sp>
+      <p:sp>
+        <p:nvSpPr>
+          <p:cNvPr id="125" name="P2 dot"/>
           <p:cNvSpPr/>
           <p:nvPr/>
         </p:nvSpPr>
         <p:spPr>
           <a:xfrm>
-            <a:off x="9235440" y="3474720"/>
-            <a:ext cx="2240280" cy="2011680"/>
-          </a:xfrm>
-          <a:prstGeom prst="roundRect">
-            <a:avLst>
-              <a:gd name="adj" fmla="val 7000"/>
-            </a:avLst>
+            <a:off x="9418320" y="3584448"/>
+            <a:ext cx="502920" cy="502920"/>
+          </a:xfrm>
+          <a:prstGeom prst="ellipse">
+            <a:avLst/>
           </a:prstGeom>
           <a:solidFill>
-            <a:srgbClr val="2E9E5B"/>
+            <a:srgbClr val="1E2761"/>
           </a:solidFill>
           <a:ln>
             <a:noFill/>
@@ -6650,42 +5799,68 @@
           </a:fontRef>
         </p:style>
         <p:txBody>
-          <a:bodyPr rtlCol="0" anchor="ctr" wrap="square" lIns="73152" rIns="73152"/>
+          <a:bodyPr rtlCol="0" anchor="ctr"/>
           <a:lstStyle/>
           <a:p>
             <a:pPr algn="ctr"/>
-            <a:r>
-              <a:rPr sz="1700" b="1">
-                <a:solidFill>
-                  <a:srgbClr val="FFFFFF"/>
-                </a:solidFill>
-                <a:latin typeface="Calibri"/>
-              </a:rPr>
-              <a:t>Stage</a:t>
-            </a:r>
-            <a:r>
-              <a:rPr sz="1200" b="0">
-                <a:solidFill>
-                  <a:srgbClr val="FFFFFF"/>
-                </a:solidFill>
-                <a:latin typeface="Calibri"/>
-              </a:rPr>
-              <a:t>
-Calm — all is well</a:t>
-            </a:r>
-          </a:p>
-        </p:txBody>
-      </p:sp>
-      <p:sp>
-        <p:nvSpPr>
-          <p:cNvPr id="126" name="VM rank Stage"/>
+          </a:p>
+        </p:txBody>
+      </p:sp>
+      <p:sp>
+        <p:nvSpPr>
+          <p:cNvPr id="126" name="P2 ev"/>
+          <p:cNvSpPr txBox="1"/>
+          <p:nvPr/>
+        </p:nvSpPr>
+        <p:spPr>
+          <a:xfrm>
+            <a:off x="10104120" y="3474720"/>
+            <a:ext cx="6949440" cy="868680"/>
+          </a:xfrm>
+          <a:prstGeom prst="rect">
+            <a:avLst/>
+          </a:prstGeom>
+          <a:noFill/>
+        </p:spPr>
+        <p:txBody>
+          <a:bodyPr wrap="square" anchor="ctr" lIns="45720" rIns="45720" tIns="18288" bIns="18288"/>
+          <a:lstStyle/>
+          <a:p>
+            <a:pPr algn="l"/>
+            <a:r>
+              <a:rPr sz="1600" b="1" i="0">
+                <a:solidFill>
+                  <a:srgbClr val="1E2761"/>
+                </a:solidFill>
+                <a:latin typeface="Calibri"/>
+              </a:rPr>
+              <a:t>18:34</a:t>
+            </a:r>
+          </a:p>
+          <a:p>
+            <a:pPr algn="l"/>
+            <a:r>
+              <a:rPr sz="1400" b="0" i="0">
+                <a:solidFill>
+                  <a:srgbClr val="111111"/>
+                </a:solidFill>
+                <a:latin typeface="Calibri"/>
+              </a:rPr>
+              <a:t>First distress calls from the packed alley.</a:t>
+            </a:r>
+          </a:p>
+        </p:txBody>
+      </p:sp>
+      <p:sp>
+        <p:nvSpPr>
+          <p:cNvPr id="127" name="P2 dot"/>
           <p:cNvSpPr/>
           <p:nvPr/>
         </p:nvSpPr>
         <p:spPr>
           <a:xfrm>
-            <a:off x="9308592" y="3547872"/>
-            <a:ext cx="457200" cy="457200"/>
+            <a:off x="9418320" y="4681728"/>
+            <a:ext cx="502920" cy="502920"/>
           </a:xfrm>
           <a:prstGeom prst="ellipse">
             <a:avLst/>
@@ -6721,14 +5896,14 @@
       </p:sp>
       <p:sp>
         <p:nvSpPr>
-          <p:cNvPr id="127" name="VM rankt Stage"/>
+          <p:cNvPr id="128" name="P2 ev"/>
           <p:cNvSpPr txBox="1"/>
           <p:nvPr/>
         </p:nvSpPr>
         <p:spPr>
           <a:xfrm>
-            <a:off x="9308592" y="3547872"/>
-            <a:ext cx="457200" cy="457200"/>
+            <a:off x="10104120" y="4572000"/>
+            <a:ext cx="6949440" cy="868680"/>
           </a:xfrm>
           <a:prstGeom prst="rect">
             <a:avLst/>
@@ -6736,40 +5911,50 @@
           <a:noFill/>
         </p:spPr>
         <p:txBody>
-          <a:bodyPr wrap="square" anchor="ctr" lIns="27432" rIns="27432" tIns="9144" bIns="9144"/>
-          <a:lstStyle/>
-          <a:p>
-            <a:pPr algn="ctr"/>
-            <a:r>
-              <a:rPr sz="1500" b="1" i="0">
-                <a:solidFill>
-                  <a:srgbClr val="FFFFFF"/>
-                </a:solidFill>
-                <a:latin typeface="Calibri"/>
-              </a:rPr>
-              <a:t>3</a:t>
-            </a:r>
-          </a:p>
-        </p:txBody>
-      </p:sp>
-      <p:sp>
-        <p:nvSpPr>
-          <p:cNvPr id="128" name="VM tile Concourse"/>
+          <a:bodyPr wrap="square" anchor="ctr" lIns="45720" rIns="45720" tIns="18288" bIns="18288"/>
+          <a:lstStyle/>
+          <a:p>
+            <a:pPr algn="l"/>
+            <a:r>
+              <a:rPr sz="1600" b="1" i="0">
+                <a:solidFill>
+                  <a:srgbClr val="1E2761"/>
+                </a:solidFill>
+                <a:latin typeface="Calibri"/>
+              </a:rPr>
+              <a:t>hours pass</a:t>
+            </a:r>
+          </a:p>
+          <a:p>
+            <a:pPr algn="l"/>
+            <a:r>
+              <a:rPr sz="1400" b="0" i="0">
+                <a:solidFill>
+                  <a:srgbClr val="111111"/>
+                </a:solidFill>
+                <a:latin typeface="Calibri"/>
+              </a:rPr>
+              <a:t>Calls keep coming. No machine raises an alarm.</a:t>
+            </a:r>
+          </a:p>
+        </p:txBody>
+      </p:sp>
+      <p:sp>
+        <p:nvSpPr>
+          <p:cNvPr id="129" name="P2 dot"/>
           <p:cNvSpPr/>
           <p:nvPr/>
         </p:nvSpPr>
         <p:spPr>
           <a:xfrm>
-            <a:off x="12015216" y="3474720"/>
-            <a:ext cx="2240280" cy="2011680"/>
-          </a:xfrm>
-          <a:prstGeom prst="roundRect">
-            <a:avLst>
-              <a:gd name="adj" fmla="val 7000"/>
-            </a:avLst>
+            <a:off x="9418320" y="5779008"/>
+            <a:ext cx="502920" cy="502920"/>
+          </a:xfrm>
+          <a:prstGeom prst="ellipse">
+            <a:avLst/>
           </a:prstGeom>
           <a:solidFill>
-            <a:srgbClr val="E5B822"/>
+            <a:srgbClr val="1E2761"/>
           </a:solidFill>
           <a:ln>
             <a:noFill/>
@@ -6790,45 +5975,73 @@
           </a:fontRef>
         </p:style>
         <p:txBody>
-          <a:bodyPr rtlCol="0" anchor="ctr" wrap="square" lIns="73152" rIns="73152"/>
+          <a:bodyPr rtlCol="0" anchor="ctr"/>
           <a:lstStyle/>
           <a:p>
             <a:pPr algn="ctr"/>
-            <a:r>
-              <a:rPr sz="1700" b="1">
-                <a:solidFill>
-                  <a:srgbClr val="FFFFFF"/>
-                </a:solidFill>
-                <a:latin typeface="Calibri"/>
-              </a:rPr>
-              <a:t>Concourse</a:t>
-            </a:r>
-            <a:r>
-              <a:rPr sz="1200" b="0">
-                <a:solidFill>
-                  <a:srgbClr val="FFFFFF"/>
-                </a:solidFill>
-                <a:latin typeface="Calibri"/>
-              </a:rPr>
-              <a:t>
-Watch — getting crowded</a:t>
-            </a:r>
-          </a:p>
-        </p:txBody>
-      </p:sp>
-      <p:sp>
-        <p:nvSpPr>
-          <p:cNvPr id="129" name="VM rank Concourse"/>
+          </a:p>
+        </p:txBody>
+      </p:sp>
+      <p:sp>
+        <p:nvSpPr>
+          <p:cNvPr id="130" name="P2 ev"/>
+          <p:cNvSpPr txBox="1"/>
+          <p:nvPr/>
+        </p:nvSpPr>
+        <p:spPr>
+          <a:xfrm>
+            <a:off x="10104120" y="5669280"/>
+            <a:ext cx="6949440" cy="868680"/>
+          </a:xfrm>
+          <a:prstGeom prst="rect">
+            <a:avLst/>
+          </a:prstGeom>
+          <a:noFill/>
+        </p:spPr>
+        <p:txBody>
+          <a:bodyPr wrap="square" anchor="ctr" lIns="45720" rIns="45720" tIns="18288" bIns="18288"/>
+          <a:lstStyle/>
+          <a:p>
+            <a:pPr algn="l"/>
+            <a:r>
+              <a:rPr sz="1600" b="1" i="0">
+                <a:solidFill>
+                  <a:srgbClr val="1E2761"/>
+                </a:solidFill>
+                <a:latin typeface="Calibri"/>
+              </a:rPr>
+              <a:t>22:15</a:t>
+            </a:r>
+          </a:p>
+          <a:p>
+            <a:pPr algn="l"/>
+            <a:r>
+              <a:rPr sz="1400" b="0" i="0">
+                <a:solidFill>
+                  <a:srgbClr val="111111"/>
+                </a:solidFill>
+                <a:latin typeface="Calibri"/>
+              </a:rPr>
+              <a:t>The alley locks. 159 dead, 196 injured.</a:t>
+            </a:r>
+          </a:p>
+        </p:txBody>
+      </p:sp>
+      <p:sp>
+        <p:nvSpPr>
+          <p:cNvPr id="131" name="P2 claim"/>
           <p:cNvSpPr/>
           <p:nvPr/>
         </p:nvSpPr>
         <p:spPr>
           <a:xfrm>
-            <a:off x="12088368" y="3547872"/>
-            <a:ext cx="457200" cy="457200"/>
-          </a:xfrm>
-          <a:prstGeom prst="ellipse">
-            <a:avLst/>
+            <a:off x="8961120" y="7818120"/>
+            <a:ext cx="8595360" cy="1737360"/>
+          </a:xfrm>
+          <a:prstGeom prst="roundRect">
+            <a:avLst>
+              <a:gd name="adj" fmla="val 7000"/>
+            </a:avLst>
           </a:prstGeom>
           <a:solidFill>
             <a:srgbClr val="1E2761"/>
@@ -6852,56 +6065,44 @@
           </a:fontRef>
         </p:style>
         <p:txBody>
-          <a:bodyPr rtlCol="0" anchor="ctr"/>
-          <a:lstStyle/>
-          <a:p>
-            <a:pPr algn="ctr"/>
-          </a:p>
-        </p:txBody>
-      </p:sp>
-      <p:sp>
-        <p:nvSpPr>
-          <p:cNvPr id="130" name="VM rankt Concourse"/>
-          <p:cNvSpPr txBox="1"/>
-          <p:nvPr/>
-        </p:nvSpPr>
-        <p:spPr>
-          <a:xfrm>
-            <a:off x="12088368" y="3547872"/>
-            <a:ext cx="457200" cy="457200"/>
-          </a:xfrm>
-          <a:prstGeom prst="rect">
-            <a:avLst/>
-          </a:prstGeom>
-          <a:noFill/>
-        </p:spPr>
-        <p:txBody>
-          <a:bodyPr wrap="square" anchor="ctr" lIns="27432" rIns="27432" tIns="9144" bIns="9144"/>
-          <a:lstStyle/>
-          <a:p>
-            <a:pPr algn="ctr"/>
-            <a:r>
-              <a:rPr sz="1500" b="1" i="0">
+          <a:bodyPr rtlCol="0" anchor="ctr" wrap="square" lIns="45720" rIns="45720" tIns="18288" bIns="18288"/>
+          <a:lstStyle/>
+          <a:p>
+            <a:pPr algn="l"/>
+            <a:r>
+              <a:rPr sz="1800" b="1" i="0">
                 <a:solidFill>
                   <a:srgbClr val="FFFFFF"/>
                 </a:solidFill>
                 <a:latin typeface="Calibri"/>
               </a:rPr>
-              <a:t>2</a:t>
-            </a:r>
-          </a:p>
-        </p:txBody>
-      </p:sp>
-      <p:sp>
-        <p:nvSpPr>
-          <p:cNvPr id="131" name="VM tile Gate"/>
+              <a:t>Danger is invisible pressure, not visible stillness.</a:t>
+            </a:r>
+          </a:p>
+          <a:p>
+            <a:pPr algn="l"/>
+            <a:r>
+              <a:rPr sz="1500" b="0" i="0">
+                <a:solidFill>
+                  <a:srgbClr val="FFFFFF"/>
+                </a:solidFill>
+                <a:latin typeface="Calibri"/>
+              </a:rPr>
+              <a:t>Measure pressure, warn early, open gates.</a:t>
+            </a:r>
+          </a:p>
+        </p:txBody>
+      </p:sp>
+      <p:sp>
+        <p:nvSpPr>
+          <p:cNvPr id="132" name="P2 still"/>
           <p:cNvSpPr/>
           <p:nvPr/>
         </p:nvSpPr>
         <p:spPr>
           <a:xfrm>
-            <a:off x="14794992" y="3474720"/>
-            <a:ext cx="2240280" cy="2011680"/>
+            <a:off x="731520" y="6812280"/>
+            <a:ext cx="7863840" cy="2651760"/>
           </a:xfrm>
           <a:prstGeom prst="roundRect">
             <a:avLst>
@@ -6909,7 +6110,7 @@
             </a:avLst>
           </a:prstGeom>
           <a:solidFill>
-            <a:srgbClr val="D64545"/>
+            <a:srgbClr val="EEF2FF"/>
           </a:solidFill>
           <a:ln>
             <a:noFill/>
@@ -6930,223 +6131,30 @@
           </a:fontRef>
         </p:style>
         <p:txBody>
-          <a:bodyPr rtlCol="0" anchor="ctr" wrap="square" lIns="73152" rIns="73152"/>
-          <a:lstStyle/>
-          <a:p>
-            <a:pPr algn="ctr"/>
-            <a:r>
-              <a:rPr sz="1700" b="1">
-                <a:solidFill>
-                  <a:srgbClr val="FFFFFF"/>
-                </a:solidFill>
-                <a:latin typeface="Calibri"/>
-              </a:rPr>
-              <a:t>Gate</a:t>
-            </a:r>
-            <a:r>
-              <a:rPr sz="1200" b="0">
-                <a:solidFill>
-                  <a:srgbClr val="FFFFFF"/>
-                </a:solidFill>
-                <a:latin typeface="Calibri"/>
-              </a:rPr>
-              <a:t>
-Critical — packed and stuck</a:t>
-            </a:r>
-          </a:p>
-        </p:txBody>
-      </p:sp>
-      <p:sp>
-        <p:nvSpPr>
-          <p:cNvPr id="132" name="VM rank Gate"/>
-          <p:cNvSpPr/>
-          <p:nvPr/>
-        </p:nvSpPr>
-        <p:spPr>
-          <a:xfrm>
-            <a:off x="14868143" y="3547872"/>
-            <a:ext cx="457200" cy="457200"/>
-          </a:xfrm>
-          <a:prstGeom prst="ellipse">
-            <a:avLst/>
-          </a:prstGeom>
-          <a:solidFill>
-            <a:srgbClr val="1E2761"/>
-          </a:solidFill>
-          <a:ln>
-            <a:noFill/>
-          </a:ln>
-        </p:spPr>
-        <p:style>
-          <a:lnRef idx="1">
-            <a:schemeClr val="accent1"/>
-          </a:lnRef>
-          <a:fillRef idx="3">
-            <a:schemeClr val="accent1"/>
-          </a:fillRef>
-          <a:effectRef idx="2">
-            <a:schemeClr val="accent1"/>
-          </a:effectRef>
-          <a:fontRef idx="minor">
-            <a:schemeClr val="lt1"/>
-          </a:fontRef>
-        </p:style>
-        <p:txBody>
-          <a:bodyPr rtlCol="0" anchor="ctr"/>
-          <a:lstStyle/>
-          <a:p>
-            <a:pPr algn="ctr"/>
-          </a:p>
-        </p:txBody>
-      </p:sp>
-      <p:sp>
-        <p:nvSpPr>
-          <p:cNvPr id="133" name="VM rankt Gate"/>
-          <p:cNvSpPr txBox="1"/>
-          <p:nvPr/>
-        </p:nvSpPr>
-        <p:spPr>
-          <a:xfrm>
-            <a:off x="14868143" y="3547872"/>
-            <a:ext cx="457200" cy="457200"/>
-          </a:xfrm>
-          <a:prstGeom prst="rect">
-            <a:avLst/>
-          </a:prstGeom>
-          <a:noFill/>
-        </p:spPr>
-        <p:txBody>
-          <a:bodyPr wrap="square" anchor="ctr" lIns="27432" rIns="27432" tIns="9144" bIns="9144"/>
-          <a:lstStyle/>
-          <a:p>
-            <a:pPr algn="ctr"/>
-            <a:r>
-              <a:rPr sz="1500" b="1" i="0">
-                <a:solidFill>
-                  <a:srgbClr val="FFFFFF"/>
-                </a:solidFill>
-                <a:latin typeface="Calibri"/>
-              </a:rPr>
-              <a:t>1</a:t>
-            </a:r>
-          </a:p>
-        </p:txBody>
-      </p:sp>
-      <p:sp>
-        <p:nvSpPr>
-          <p:cNvPr id="134" name="VM arrow"/>
-          <p:cNvSpPr/>
-          <p:nvPr/>
-        </p:nvSpPr>
-        <p:spPr>
-          <a:xfrm>
-            <a:off x="11539728" y="4251960"/>
-            <a:ext cx="411480" cy="457200"/>
-          </a:xfrm>
-          <a:prstGeom prst="rightArrow">
-            <a:avLst/>
-          </a:prstGeom>
-          <a:solidFill>
-            <a:srgbClr val="1E2761"/>
-          </a:solidFill>
-          <a:ln>
-            <a:noFill/>
-          </a:ln>
-        </p:spPr>
-        <p:style>
-          <a:lnRef idx="1">
-            <a:schemeClr val="accent1"/>
-          </a:lnRef>
-          <a:fillRef idx="3">
-            <a:schemeClr val="accent1"/>
-          </a:fillRef>
-          <a:effectRef idx="2">
-            <a:schemeClr val="accent1"/>
-          </a:effectRef>
-          <a:fontRef idx="minor">
-            <a:schemeClr val="lt1"/>
-          </a:fontRef>
-        </p:style>
-        <p:txBody>
-          <a:bodyPr rtlCol="0" anchor="ctr"/>
-          <a:lstStyle/>
-          <a:p>
-            <a:pPr algn="ctr"/>
-          </a:p>
-        </p:txBody>
-      </p:sp>
-      <p:sp>
-        <p:nvSpPr>
-          <p:cNvPr id="135" name="VM arrow"/>
-          <p:cNvSpPr/>
-          <p:nvPr/>
-        </p:nvSpPr>
-        <p:spPr>
-          <a:xfrm>
-            <a:off x="14319504" y="4251960"/>
-            <a:ext cx="411480" cy="457200"/>
-          </a:xfrm>
-          <a:prstGeom prst="rightArrow">
-            <a:avLst/>
-          </a:prstGeom>
-          <a:solidFill>
-            <a:srgbClr val="1E2761"/>
-          </a:solidFill>
-          <a:ln>
-            <a:noFill/>
-          </a:ln>
-        </p:spPr>
-        <p:style>
-          <a:lnRef idx="1">
-            <a:schemeClr val="accent1"/>
-          </a:lnRef>
-          <a:fillRef idx="3">
-            <a:schemeClr val="accent1"/>
-          </a:fillRef>
-          <a:effectRef idx="2">
-            <a:schemeClr val="accent1"/>
-          </a:effectRef>
-          <a:fontRef idx="minor">
-            <a:schemeClr val="lt1"/>
-          </a:fontRef>
-        </p:style>
-        <p:txBody>
-          <a:bodyPr rtlCol="0" anchor="ctr"/>
-          <a:lstStyle/>
-          <a:p>
-            <a:pPr algn="ctr"/>
-          </a:p>
-        </p:txBody>
-      </p:sp>
-      <p:sp>
-        <p:nvSpPr>
-          <p:cNvPr id="136" name="VM foot"/>
-          <p:cNvSpPr txBox="1"/>
-          <p:nvPr/>
-        </p:nvSpPr>
-        <p:spPr>
-          <a:xfrm>
-            <a:off x="9235440" y="5623560"/>
-            <a:ext cx="8046720" cy="1371600"/>
-          </a:xfrm>
-          <a:prstGeom prst="rect">
-            <a:avLst/>
-          </a:prstGeom>
-          <a:noFill/>
-        </p:spPr>
-        <p:txBody>
-          <a:bodyPr wrap="square" anchor="ctr" lIns="27432" rIns="27432" tIns="9144" bIns="9144"/>
+          <a:bodyPr rtlCol="0" anchor="ctr" wrap="square" lIns="45720" rIns="45720" tIns="18288" bIns="18288"/>
           <a:lstStyle/>
           <a:p>
             <a:pPr algn="l"/>
             <a:r>
-              <a:rPr sz="1500" b="0" i="0">
-                <a:solidFill>
-                  <a:srgbClr val="5A5A5A"/>
-                </a:solidFill>
-                <a:latin typeface="Calibri"/>
-              </a:rPr>
-              <a:t>Arrows follow the crowd. Risk ranks the other way: Gate first.</a:t>
+              <a:rPr sz="2000" b="1" i="0">
+                <a:solidFill>
+                  <a:srgbClr val="1E2761"/>
+                </a:solidFill>
+                <a:latin typeface="Calibri"/>
+              </a:rPr>
+              <a:t>Why stillness lies</a:t>
+            </a:r>
+          </a:p>
+          <a:p>
+            <a:pPr algn="l"/>
+            <a:r>
+              <a:rPr sz="1600" b="0" i="0">
+                <a:solidFill>
+                  <a:srgbClr val="111111"/>
+                </a:solidFill>
+                <a:latin typeface="Calibri"/>
+              </a:rPr>
+              <a:t>A stopped crowd is not a warning. It is the accident. Pressure passes body to body long before feet stop. That is why cameras must read force, not faces.</a:t>
             </a:r>
           </a:p>
         </p:txBody>
@@ -7275,7 +6283,7 @@
                 <a:cs typeface="Calibri"/>
                 <a:sym typeface="Calibri"/>
               </a:rPr>
-              <a:t>TECHNICAL APPROACH</a:t>
+              <a:t>HOW IT WORKS</a:t>
             </a:r>
           </a:p>
           <a:p>
@@ -7309,9 +6317,7 @@
           </a:ln>
         </p:spPr>
         <p:txBody>
-          <a:bodyPr wrap="square" lIns="0" tIns="0" rIns="0" bIns="0" anchor="ctr" rtlCol="0">
-            <a:noAutofit/>
-          </a:bodyPr>
+          <a:bodyPr wrap="square" lIns="45720" tIns="18288" rIns="45720" bIns="18288" anchor="ctr" rtlCol="0"/>
           <a:lstStyle/>
           <a:p>
             <a:pPr algn="ctr">
@@ -7323,14 +6329,13 @@
               </a:spcAft>
             </a:pPr>
             <a:r>
-              <a:rPr lang="en-US" sz="2200" b="1" i="0" dirty="0">
+              <a:rPr sz="2000" b="1" i="0">
                 <a:solidFill>
                   <a:srgbClr val="FFFFFF"/>
                 </a:solidFill>
                 <a:latin typeface="Calibri"/>
-                <a:cs typeface="Calibri"/>
-              </a:rPr>
-              <a:t>Watch</a:t>
+              </a:rPr>
+              <a:t>Calibrate</a:t>
             </a:r>
           </a:p>
         </p:txBody>
@@ -7355,9 +6360,7 @@
           </a:ln>
         </p:spPr>
         <p:txBody>
-          <a:bodyPr wrap="square" lIns="0" tIns="0" rIns="0" bIns="0" anchor="t" rtlCol="0">
-            <a:noAutofit/>
-          </a:bodyPr>
+          <a:bodyPr wrap="square" lIns="45720" tIns="18288" rIns="45720" bIns="18288" anchor="ctr" rtlCol="0"/>
           <a:lstStyle/>
           <a:p>
             <a:pPr algn="ctr">
@@ -7369,14 +6372,13 @@
               </a:spcAft>
             </a:pPr>
             <a:r>
-              <a:rPr lang="en-US" sz="1700" b="0" i="0" dirty="0">
+              <a:rPr sz="1500" b="0" i="0">
                 <a:solidFill>
                   <a:srgbClr val="5A5A5A"/>
                 </a:solidFill>
                 <a:latin typeface="Calibri"/>
-                <a:cs typeface="Calibri"/>
-              </a:rPr>
-              <a:t>takes in any camera feed</a:t>
+              </a:rPr>
+              <a:t>pixels to ground, once per camera</a:t>
             </a:r>
           </a:p>
         </p:txBody>
@@ -7403,9 +6405,7 @@
           </a:ln>
         </p:spPr>
         <p:txBody>
-          <a:bodyPr wrap="square" lIns="0" tIns="0" rIns="0" bIns="0" anchor="ctr" rtlCol="0">
-            <a:noAutofit/>
-          </a:bodyPr>
+          <a:bodyPr wrap="square" lIns="45720" tIns="18288" rIns="45720" bIns="18288" anchor="ctr" rtlCol="0"/>
           <a:lstStyle/>
           <a:p>
             <a:pPr algn="ctr">
@@ -7417,14 +6417,13 @@
               </a:spcAft>
             </a:pPr>
             <a:r>
-              <a:rPr lang="en-US" sz="2200" b="1" i="0" dirty="0">
+              <a:rPr sz="2000" b="1" i="0">
                 <a:solidFill>
                   <a:srgbClr val="FFFFFF"/>
                 </a:solidFill>
                 <a:latin typeface="Calibri"/>
-                <a:cs typeface="Calibri"/>
-              </a:rPr>
-              <a:t>Spot</a:t>
+              </a:rPr>
+              <a:t>Map density</a:t>
             </a:r>
           </a:p>
         </p:txBody>
@@ -7449,9 +6448,7 @@
           </a:ln>
         </p:spPr>
         <p:txBody>
-          <a:bodyPr wrap="square" lIns="0" tIns="0" rIns="0" bIns="0" anchor="t" rtlCol="0">
-            <a:noAutofit/>
-          </a:bodyPr>
+          <a:bodyPr wrap="square" lIns="45720" tIns="18288" rIns="45720" bIns="18288" anchor="ctr" rtlCol="0"/>
           <a:lstStyle/>
           <a:p>
             <a:pPr algn="ctr">
@@ -7463,14 +6460,13 @@
               </a:spcAft>
             </a:pPr>
             <a:r>
-              <a:rPr lang="en-US" sz="1700" b="0" i="0" dirty="0">
+              <a:rPr sz="1500" b="0" i="0">
                 <a:solidFill>
                   <a:srgbClr val="5A5A5A"/>
                 </a:solidFill>
                 <a:latin typeface="Calibri"/>
-                <a:cs typeface="Calibri"/>
-              </a:rPr>
-              <a:t>finds every person</a:t>
+              </a:rPr>
+              <a:t>heatmaps count overlap</a:t>
             </a:r>
           </a:p>
         </p:txBody>
@@ -7497,9 +6493,7 @@
           </a:ln>
         </p:spPr>
         <p:txBody>
-          <a:bodyPr wrap="square" lIns="0" tIns="0" rIns="0" bIns="0" anchor="ctr" rtlCol="0">
-            <a:noAutofit/>
-          </a:bodyPr>
+          <a:bodyPr wrap="square" lIns="45720" tIns="18288" rIns="45720" bIns="18288" anchor="ctr" rtlCol="0"/>
           <a:lstStyle/>
           <a:p>
             <a:pPr algn="ctr">
@@ -7511,14 +6505,13 @@
               </a:spcAft>
             </a:pPr>
             <a:r>
-              <a:rPr lang="en-US" sz="2200" b="1" i="0" dirty="0">
+              <a:rPr sz="2000" b="1" i="0">
                 <a:solidFill>
                   <a:srgbClr val="FFFFFF"/>
                 </a:solidFill>
                 <a:latin typeface="Calibri"/>
-                <a:cs typeface="Calibri"/>
-              </a:rPr>
-              <a:t>Follow</a:t>
+              </a:rPr>
+              <a:t>Track flow</a:t>
             </a:r>
           </a:p>
         </p:txBody>
@@ -7543,9 +6536,7 @@
           </a:ln>
         </p:spPr>
         <p:txBody>
-          <a:bodyPr wrap="square" lIns="0" tIns="0" rIns="0" bIns="0" anchor="t" rtlCol="0">
-            <a:noAutofit/>
-          </a:bodyPr>
+          <a:bodyPr wrap="square" lIns="45720" tIns="18288" rIns="45720" bIns="18288" anchor="ctr" rtlCol="0"/>
           <a:lstStyle/>
           <a:p>
             <a:pPr algn="ctr">
@@ -7557,14 +6548,13 @@
               </a:spcAft>
             </a:pPr>
             <a:r>
-              <a:rPr lang="en-US" sz="1700" b="0" i="0" dirty="0">
+              <a:rPr sz="1500" b="0" i="0">
                 <a:solidFill>
                   <a:srgbClr val="5A5A5A"/>
                 </a:solidFill>
                 <a:latin typeface="Calibri"/>
-                <a:cs typeface="Calibri"/>
-              </a:rPr>
-              <a:t>keeps track of each one</a:t>
+              </a:rPr>
+              <a:t>flow reads crowd currents</a:t>
             </a:r>
           </a:p>
         </p:txBody>
@@ -7591,9 +6581,7 @@
           </a:ln>
         </p:spPr>
         <p:txBody>
-          <a:bodyPr wrap="square" lIns="0" tIns="0" rIns="0" bIns="0" anchor="ctr" rtlCol="0">
-            <a:noAutofit/>
-          </a:bodyPr>
+          <a:bodyPr wrap="square" lIns="45720" tIns="18288" rIns="45720" bIns="18288" anchor="ctr" rtlCol="0"/>
           <a:lstStyle/>
           <a:p>
             <a:pPr algn="ctr">
@@ -7605,14 +6593,13 @@
               </a:spcAft>
             </a:pPr>
             <a:r>
-              <a:rPr lang="en-US" sz="2200" b="1" i="0" dirty="0">
+              <a:rPr sz="2000" b="1" i="0">
                 <a:solidFill>
                   <a:srgbClr val="FFFFFF"/>
                 </a:solidFill>
                 <a:latin typeface="Calibri"/>
-                <a:cs typeface="Calibri"/>
-              </a:rPr>
-              <a:t>Know</a:t>
+              </a:rPr>
+              <a:t>Measure pressure</a:t>
             </a:r>
           </a:p>
         </p:txBody>
@@ -7637,9 +6624,7 @@
           </a:ln>
         </p:spPr>
         <p:txBody>
-          <a:bodyPr wrap="square" lIns="0" tIns="0" rIns="0" bIns="0" anchor="t" rtlCol="0">
-            <a:noAutofit/>
-          </a:bodyPr>
+          <a:bodyPr wrap="square" lIns="45720" tIns="18288" rIns="45720" bIns="18288" anchor="ctr" rtlCol="0"/>
           <a:lstStyle/>
           <a:p>
             <a:pPr algn="ctr">
@@ -7651,14 +6636,13 @@
               </a:spcAft>
             </a:pPr>
             <a:r>
-              <a:rPr lang="en-US" sz="1700" b="0" i="0" dirty="0">
+              <a:rPr sz="1500" b="0" i="0">
                 <a:solidFill>
                   <a:srgbClr val="5A5A5A"/>
                 </a:solidFill>
                 <a:latin typeface="Calibri"/>
-                <a:cs typeface="Calibri"/>
-              </a:rPr>
-              <a:t>measures density and flow</a:t>
+              </a:rPr>
+              <a:t>density times movement</a:t>
             </a:r>
           </a:p>
         </p:txBody>
@@ -7685,9 +6669,7 @@
           </a:ln>
         </p:spPr>
         <p:txBody>
-          <a:bodyPr wrap="square" lIns="0" tIns="0" rIns="0" bIns="0" anchor="ctr" rtlCol="0">
-            <a:noAutofit/>
-          </a:bodyPr>
+          <a:bodyPr wrap="square" lIns="45720" tIns="18288" rIns="45720" bIns="18288" anchor="ctr" rtlCol="0"/>
           <a:lstStyle/>
           <a:p>
             <a:pPr algn="ctr">
@@ -7699,14 +6681,13 @@
               </a:spcAft>
             </a:pPr>
             <a:r>
-              <a:rPr lang="en-US" sz="2200" b="1" i="0" dirty="0">
+              <a:rPr sz="2000" b="1" i="0">
                 <a:solidFill>
                   <a:srgbClr val="FFFFFF"/>
                 </a:solidFill>
                 <a:latin typeface="Calibri"/>
-                <a:cs typeface="Calibri"/>
-              </a:rPr>
-              <a:t>Predict</a:t>
+              </a:rPr>
+              <a:t>Forecast jam</a:t>
             </a:r>
           </a:p>
         </p:txBody>
@@ -7731,9 +6712,7 @@
           </a:ln>
         </p:spPr>
         <p:txBody>
-          <a:bodyPr wrap="square" lIns="0" tIns="0" rIns="0" bIns="0" anchor="t" rtlCol="0">
-            <a:noAutofit/>
-          </a:bodyPr>
+          <a:bodyPr wrap="square" lIns="45720" tIns="18288" rIns="45720" bIns="18288" anchor="ctr" rtlCol="0"/>
           <a:lstStyle/>
           <a:p>
             <a:pPr algn="ctr">
@@ -7745,14 +6724,13 @@
               </a:spcAft>
             </a:pPr>
             <a:r>
-              <a:rPr lang="en-US" sz="1700" b="0" i="0" dirty="0">
+              <a:rPr sz="1500" b="0" i="0">
                 <a:solidFill>
                   <a:srgbClr val="5A5A5A"/>
                 </a:solidFill>
                 <a:latin typeface="Calibri"/>
-                <a:cs typeface="Calibri"/>
-              </a:rPr>
-              <a:t>forecasts time to critical</a:t>
+              </a:rPr>
+              <a:t>inflow beats outflow</a:t>
             </a:r>
           </a:p>
         </p:txBody>
@@ -7779,9 +6757,7 @@
           </a:ln>
         </p:spPr>
         <p:txBody>
-          <a:bodyPr wrap="square" lIns="0" tIns="0" rIns="0" bIns="0" anchor="ctr" rtlCol="0">
-            <a:noAutofit/>
-          </a:bodyPr>
+          <a:bodyPr wrap="square" lIns="45720" tIns="18288" rIns="45720" bIns="18288" anchor="ctr" rtlCol="0"/>
           <a:lstStyle/>
           <a:p>
             <a:pPr algn="ctr">
@@ -7793,12 +6769,11 @@
               </a:spcAft>
             </a:pPr>
             <a:r>
-              <a:rPr lang="en-US" sz="2200" b="1" i="0" dirty="0">
+              <a:rPr sz="2000" b="1" i="0">
                 <a:solidFill>
                   <a:srgbClr val="1E2761"/>
                 </a:solidFill>
                 <a:latin typeface="Calibri"/>
-                <a:cs typeface="Calibri"/>
               </a:rPr>
               <a:t>Warn</a:t>
             </a:r>
@@ -7825,9 +6800,7 @@
           </a:ln>
         </p:spPr>
         <p:txBody>
-          <a:bodyPr wrap="square" lIns="0" tIns="0" rIns="0" bIns="0" anchor="t" rtlCol="0">
-            <a:noAutofit/>
-          </a:bodyPr>
+          <a:bodyPr wrap="square" lIns="45720" tIns="18288" rIns="45720" bIns="18288" anchor="ctr" rtlCol="0"/>
           <a:lstStyle/>
           <a:p>
             <a:pPr algn="ctr">
@@ -7839,14 +6812,13 @@
               </a:spcAft>
             </a:pPr>
             <a:r>
-              <a:rPr lang="en-US" sz="1700" b="0" i="0" dirty="0">
+              <a:rPr sz="1500" b="0" i="0">
                 <a:solidFill>
                   <a:srgbClr val="5A5A5A"/>
                 </a:solidFill>
                 <a:latin typeface="Calibri"/>
-                <a:cs typeface="Calibri"/>
-              </a:rPr>
-              <a:t>alerts guards before a crush</a:t>
+              </a:rPr>
+              <a:t>open gates upstream</a:t>
             </a:r>
           </a:p>
         </p:txBody>
@@ -7875,12 +6847,10 @@
           </a:ln>
         </p:spPr>
         <p:txBody>
-          <a:bodyPr wrap="square" lIns="274320" tIns="45720" rIns="274320" bIns="45720" anchor="ctr" rtlCol="0">
-            <a:noAutofit/>
-          </a:bodyPr>
-          <a:lstStyle/>
-          <a:p>
-            <a:pPr algn="ctr">
+          <a:bodyPr wrap="square" lIns="45720" tIns="18288" rIns="45720" bIns="18288" anchor="ctr" rtlCol="0"/>
+          <a:lstStyle/>
+          <a:p>
+            <a:pPr algn="l">
               <a:spcBef>
                 <a:spcPts val="0"/>
               </a:spcBef>
@@ -7889,14 +6859,13 @@
               </a:spcAft>
             </a:pPr>
             <a:r>
-              <a:rPr lang="en-US" sz="2200" b="0" i="0" dirty="0">
+              <a:rPr sz="2000" b="0" i="0">
                 <a:solidFill>
                   <a:srgbClr val="1E2761"/>
                 </a:solidFill>
                 <a:latin typeface="Calibri"/>
-                <a:cs typeface="Calibri"/>
-              </a:rPr>
-              <a:t>In plain words: cameras share one venue map, the software flags where the crowd stops moving, and it warns guards before a crush builds.</a:t>
+              </a:rPr>
+              <a:t>In plain words: map the ground right, count the crowd as heat, read its currents, warn on pressure.</a:t>
             </a:r>
           </a:p>
         </p:txBody>
@@ -7932,9 +6901,7 @@
           </a:effectLst>
         </p:spPr>
         <p:txBody>
-          <a:bodyPr wrap="square" lIns="320040" tIns="109728" rIns="320040" bIns="109728" anchor="ctr" rtlCol="0">
-            <a:noAutofit/>
-          </a:bodyPr>
+          <a:bodyPr wrap="square" lIns="45720" tIns="18288" rIns="45720" bIns="18288" anchor="ctr" rtlCol="0"/>
           <a:lstStyle/>
           <a:p>
             <a:pPr algn="l">
@@ -7946,37 +6913,25 @@
               </a:spcAft>
             </a:pPr>
             <a:r>
-              <a:rPr lang="en-US" sz="2100" b="1" i="0" dirty="0">
+              <a:rPr sz="1800" b="1" i="0">
                 <a:solidFill>
                   <a:srgbClr val="1E2761"/>
                 </a:solidFill>
                 <a:latin typeface="Calibri"/>
-                <a:cs typeface="Calibri"/>
-              </a:rPr>
-              <a:t>Crowd metrics, not faces</a:t>
-            </a:r>
-          </a:p>
-          <a:p>
-            <a:pPr algn="l">
-              <a:lnSpc>
-                <a:spcPct val="100000"/>
-              </a:lnSpc>
-              <a:spcBef>
-                <a:spcPts val="0"/>
-              </a:spcBef>
-              <a:spcAft>
-                <a:spcPts val="0"/>
-              </a:spcAft>
-            </a:pPr>
-            <a:r>
-              <a:rPr lang="en-US" sz="1800" b="0" i="0" dirty="0">
+              </a:rPr>
+              <a:t>Heatmaps beat boxes</a:t>
+            </a:r>
+          </a:p>
+          <a:p>
+            <a:pPr algn="l"/>
+            <a:r>
+              <a:rPr sz="1350" b="0" i="0">
                 <a:solidFill>
                   <a:srgbClr val="111111"/>
                 </a:solidFill>
                 <a:latin typeface="Calibri"/>
-                <a:cs typeface="Calibri"/>
-              </a:rPr>
-              <a:t>Risk = density x stillness x counterflow. Stillness only escalates risk when the zone is also packed.</a:t>
+              </a:rPr>
+              <a:t>At crush density a detector scores F1 0.07 against 0.71 point-based. (NWPU-Crowd)</a:t>
             </a:r>
           </a:p>
         </p:txBody>
@@ -8012,9 +6967,7 @@
           </a:effectLst>
         </p:spPr>
         <p:txBody>
-          <a:bodyPr wrap="square" lIns="320040" tIns="109728" rIns="320040" bIns="109728" anchor="ctr" rtlCol="0">
-            <a:noAutofit/>
-          </a:bodyPr>
+          <a:bodyPr wrap="square" lIns="45720" tIns="18288" rIns="45720" bIns="18288" anchor="ctr" rtlCol="0"/>
           <a:lstStyle/>
           <a:p>
             <a:pPr algn="l">
@@ -8026,37 +6979,25 @@
               </a:spcAft>
             </a:pPr>
             <a:r>
-              <a:rPr lang="en-US" sz="2100" b="1" i="0" dirty="0">
+              <a:rPr sz="1800" b="1" i="0">
                 <a:solidFill>
                   <a:srgbClr val="1E2761"/>
                 </a:solidFill>
                 <a:latin typeface="Calibri"/>
-                <a:cs typeface="Calibri"/>
-              </a:rPr>
-              <a:t>Tested on real video</a:t>
-            </a:r>
-          </a:p>
-          <a:p>
-            <a:pPr algn="l">
-              <a:lnSpc>
-                <a:spcPct val="100000"/>
-              </a:lnSpc>
-              <a:spcBef>
-                <a:spcPts val="0"/>
-              </a:spcBef>
-              <a:spcAft>
-                <a:spcPts val="0"/>
-              </a:spcAft>
-            </a:pPr>
-            <a:r>
-              <a:rPr lang="en-US" sz="1800" b="0" i="0" dirty="0">
+              </a:rPr>
+              <a:t>Pressure, not stillness</a:t>
+            </a:r>
+          </a:p>
+          <a:p>
+            <a:pPr algn="l"/>
+            <a:r>
+              <a:rPr sz="1350" b="0" i="0">
                 <a:solidFill>
                   <a:srgbClr val="111111"/>
                 </a:solidFill>
                 <a:latin typeface="Calibri"/>
-                <a:cs typeface="Calibri"/>
-              </a:rPr>
-              <a:t>Followed 18 people at once across 2 minutes of busy station video.</a:t>
+              </a:rPr>
+              <a:t>Pressure is density times uneven movement. Density or speed alone cannot warn. (Johansson 2008)</a:t>
             </a:r>
           </a:p>
         </p:txBody>
@@ -8092,9 +7033,7 @@
           </a:effectLst>
         </p:spPr>
         <p:txBody>
-          <a:bodyPr wrap="square" lIns="320040" tIns="109728" rIns="320040" bIns="109728" anchor="ctr" rtlCol="0">
-            <a:noAutofit/>
-          </a:bodyPr>
+          <a:bodyPr wrap="square" lIns="45720" tIns="18288" rIns="45720" bIns="18288" anchor="ctr" rtlCol="0"/>
           <a:lstStyle/>
           <a:p>
             <a:pPr algn="l">
@@ -8106,37 +7045,25 @@
               </a:spcAft>
             </a:pPr>
             <a:r>
-              <a:rPr lang="en-US" sz="2100" b="1" i="0" dirty="0">
+              <a:rPr sz="1800" b="1" i="0">
                 <a:solidFill>
                   <a:srgbClr val="1E2761"/>
                 </a:solidFill>
                 <a:latin typeface="Calibri"/>
-                <a:cs typeface="Calibri"/>
-              </a:rPr>
-              <a:t>Works with normal cameras</a:t>
-            </a:r>
-          </a:p>
-          <a:p>
-            <a:pPr algn="l">
-              <a:lnSpc>
-                <a:spcPct val="100000"/>
-              </a:lnSpc>
-              <a:spcBef>
-                <a:spcPts val="0"/>
-              </a:spcBef>
-              <a:spcAft>
-                <a:spcPts val="0"/>
-              </a:spcAft>
-            </a:pPr>
-            <a:r>
-              <a:rPr lang="en-US" sz="1800" b="0" i="0" dirty="0">
+              </a:rPr>
+              <a:t>Side track, kept</a:t>
+            </a:r>
+          </a:p>
+          <a:p>
+            <a:pPr algn="l"/>
+            <a:r>
+              <a:rPr sz="1350" b="0" i="0">
                 <a:solidFill>
                   <a:srgbClr val="111111"/>
                 </a:solidFill>
                 <a:latin typeface="Calibri"/>
-                <a:cs typeface="Calibri"/>
-              </a:rPr>
-              <a:t>Cameras link into one venue graph, so a jam is traced back to where it started. High, wide angles measure density best.</a:t>
+              </a:rPr>
+              <a:t>Below 2 people per m2, box IDs still run and feed the dossier. Already built.</a:t>
             </a:r>
           </a:p>
         </p:txBody>
@@ -8189,7 +7116,7 @@
       </p:sp>
       <p:sp>
         <p:nvSpPr>
-          <p:cNvPr id="119" name="VG card"/>
+          <p:cNvPr id="119" name="P3 mae"/>
           <p:cNvSpPr/>
           <p:nvPr/>
         </p:nvSpPr>
@@ -8234,14 +7161,14 @@
       </p:sp>
       <p:sp>
         <p:nvSpPr>
-          <p:cNvPr id="120" name="VG title"/>
+          <p:cNvPr id="120" name="P3 maet"/>
           <p:cNvSpPr txBox="1"/>
           <p:nvPr/>
         </p:nvSpPr>
         <p:spPr>
           <a:xfrm>
             <a:off x="960120" y="6126480"/>
-            <a:ext cx="6309360" cy="457200"/>
+            <a:ext cx="6309360" cy="502920"/>
           </a:xfrm>
           <a:prstGeom prst="rect">
             <a:avLst/>
@@ -8249,38 +7176,71 @@
           <a:noFill/>
         </p:spPr>
         <p:txBody>
-          <a:bodyPr wrap="square" anchor="ctr" lIns="27432" rIns="27432" tIns="9144" bIns="9144"/>
+          <a:bodyPr wrap="square" anchor="ctr" lIns="45720" rIns="45720" tIns="18288" bIns="18288"/>
           <a:lstStyle/>
           <a:p>
             <a:pPr algn="l"/>
             <a:r>
-              <a:rPr sz="1800" b="1" i="0">
+              <a:rPr sz="1500" b="1" i="0">
                 <a:solidFill>
                   <a:srgbClr val="1E2761"/>
                 </a:solidFill>
                 <a:latin typeface="Calibri"/>
               </a:rPr>
-              <a:t>One venue graph</a:t>
-            </a:r>
-          </a:p>
-        </p:txBody>
-      </p:sp>
-      <p:sp>
-        <p:nvSpPr>
-          <p:cNvPr id="121" name="VG cam 1"/>
+              <a:t>Count error keeps falling (MAE, lower is better)</a:t>
+            </a:r>
+          </a:p>
+        </p:txBody>
+      </p:sp>
+      <p:sp>
+        <p:nvSpPr>
+          <p:cNvPr id="121" name="P3 lbl"/>
+          <p:cNvSpPr txBox="1"/>
+          <p:nvPr/>
+        </p:nvSpPr>
+        <p:spPr>
+          <a:xfrm>
+            <a:off x="960120" y="6812280"/>
+            <a:ext cx="1554480" cy="502920"/>
+          </a:xfrm>
+          <a:prstGeom prst="rect">
+            <a:avLst/>
+          </a:prstGeom>
+          <a:noFill/>
+        </p:spPr>
+        <p:txBody>
+          <a:bodyPr wrap="square" anchor="ctr" lIns="45720" rIns="45720" tIns="18288" bIns="18288"/>
+          <a:lstStyle/>
+          <a:p>
+            <a:pPr algn="r"/>
+            <a:r>
+              <a:rPr sz="1300" b="0" i="0">
+                <a:solidFill>
+                  <a:srgbClr val="1E2761"/>
+                </a:solidFill>
+                <a:latin typeface="Calibri"/>
+              </a:rPr>
+              <a:t>CSRNet</a:t>
+            </a:r>
+          </a:p>
+        </p:txBody>
+      </p:sp>
+      <p:sp>
+        <p:nvSpPr>
+          <p:cNvPr id="122" name="P3 track"/>
           <p:cNvSpPr/>
           <p:nvPr/>
         </p:nvSpPr>
         <p:spPr>
           <a:xfrm>
-            <a:off x="1051560" y="7040880"/>
-            <a:ext cx="640080" cy="640080"/>
-          </a:xfrm>
-          <a:prstGeom prst="ellipse">
+            <a:off x="2606040" y="6903720"/>
+            <a:ext cx="3291840" cy="292608"/>
+          </a:xfrm>
+          <a:prstGeom prst="rect">
             <a:avLst/>
           </a:prstGeom>
           <a:solidFill>
-            <a:srgbClr val="1E2761"/>
+            <a:srgbClr val="D5DBEA"/>
           </a:solidFill>
           <a:ln>
             <a:noFill/>
@@ -8310,80 +7270,14 @@
       </p:sp>
       <p:sp>
         <p:nvSpPr>
-          <p:cNvPr id="122" name="VG camt 1"/>
-          <p:cNvSpPr txBox="1"/>
-          <p:nvPr/>
-        </p:nvSpPr>
-        <p:spPr>
-          <a:xfrm>
-            <a:off x="1051560" y="7040880"/>
-            <a:ext cx="640080" cy="640080"/>
-          </a:xfrm>
-          <a:prstGeom prst="rect">
-            <a:avLst/>
-          </a:prstGeom>
-          <a:noFill/>
-        </p:spPr>
-        <p:txBody>
-          <a:bodyPr wrap="square" anchor="ctr" lIns="27432" rIns="27432" tIns="9144" bIns="9144"/>
-          <a:lstStyle/>
-          <a:p>
-            <a:pPr algn="ctr"/>
-            <a:r>
-              <a:rPr sz="1600" b="1" i="0">
-                <a:solidFill>
-                  <a:srgbClr val="FFFFFF"/>
-                </a:solidFill>
-                <a:latin typeface="Calibri"/>
-              </a:rPr>
-              <a:t>1</a:t>
-            </a:r>
-          </a:p>
-        </p:txBody>
-      </p:sp>
-      <p:sp>
-        <p:nvSpPr>
-          <p:cNvPr id="123" name="VG caml 1"/>
-          <p:cNvSpPr txBox="1"/>
-          <p:nvPr/>
-        </p:nvSpPr>
-        <p:spPr>
-          <a:xfrm>
-            <a:off x="1828800" y="7086600"/>
-            <a:ext cx="1188720" cy="548640"/>
-          </a:xfrm>
-          <a:prstGeom prst="rect">
-            <a:avLst/>
-          </a:prstGeom>
-          <a:noFill/>
-        </p:spPr>
-        <p:txBody>
-          <a:bodyPr wrap="square" anchor="ctr" lIns="27432" rIns="27432" tIns="9144" bIns="9144"/>
-          <a:lstStyle/>
-          <a:p>
-            <a:pPr algn="l"/>
-            <a:r>
-              <a:rPr sz="1300" b="0" i="0">
-                <a:solidFill>
-                  <a:srgbClr val="1E2761"/>
-                </a:solidFill>
-                <a:latin typeface="Calibri"/>
-              </a:rPr>
-              <a:t>Gate cam</a:t>
-            </a:r>
-          </a:p>
-        </p:txBody>
-      </p:sp>
-      <p:sp>
-        <p:nvSpPr>
-          <p:cNvPr id="124" name="VG link 1"/>
+          <p:cNvPr id="123" name="P3 fill"/>
           <p:cNvSpPr/>
           <p:nvPr/>
         </p:nvSpPr>
         <p:spPr>
           <a:xfrm>
-            <a:off x="3063240" y="7342632"/>
-            <a:ext cx="685800" cy="36576"/>
+            <a:off x="2606040" y="6903720"/>
+            <a:ext cx="3197787" cy="292608"/>
           </a:xfrm>
           <a:prstGeom prst="rect">
             <a:avLst/>
@@ -8419,20 +7313,86 @@
       </p:sp>
       <p:sp>
         <p:nvSpPr>
-          <p:cNvPr id="125" name="VG cam 2"/>
+          <p:cNvPr id="124" name="P3 val"/>
+          <p:cNvSpPr txBox="1"/>
+          <p:nvPr/>
+        </p:nvSpPr>
+        <p:spPr>
+          <a:xfrm>
+            <a:off x="6035040" y="6812280"/>
+            <a:ext cx="822960" cy="502920"/>
+          </a:xfrm>
+          <a:prstGeom prst="rect">
+            <a:avLst/>
+          </a:prstGeom>
+          <a:noFill/>
+        </p:spPr>
+        <p:txBody>
+          <a:bodyPr wrap="square" anchor="ctr" lIns="45720" rIns="45720" tIns="18288" bIns="18288"/>
+          <a:lstStyle/>
+          <a:p>
+            <a:pPr algn="l"/>
+            <a:r>
+              <a:rPr sz="1300" b="1" i="0">
+                <a:solidFill>
+                  <a:srgbClr val="1E2761"/>
+                </a:solidFill>
+                <a:latin typeface="Calibri"/>
+              </a:rPr>
+              <a:t>68</a:t>
+            </a:r>
+          </a:p>
+        </p:txBody>
+      </p:sp>
+      <p:sp>
+        <p:nvSpPr>
+          <p:cNvPr id="125" name="P3 lbl"/>
+          <p:cNvSpPr txBox="1"/>
+          <p:nvPr/>
+        </p:nvSpPr>
+        <p:spPr>
+          <a:xfrm>
+            <a:off x="960120" y="7543800"/>
+            <a:ext cx="1554480" cy="502920"/>
+          </a:xfrm>
+          <a:prstGeom prst="rect">
+            <a:avLst/>
+          </a:prstGeom>
+          <a:noFill/>
+        </p:spPr>
+        <p:txBody>
+          <a:bodyPr wrap="square" anchor="ctr" lIns="45720" rIns="45720" tIns="18288" bIns="18288"/>
+          <a:lstStyle/>
+          <a:p>
+            <a:pPr algn="r"/>
+            <a:r>
+              <a:rPr sz="1300" b="0" i="0">
+                <a:solidFill>
+                  <a:srgbClr val="1E2761"/>
+                </a:solidFill>
+                <a:latin typeface="Calibri"/>
+              </a:rPr>
+              <a:t>Bayesian</a:t>
+            </a:r>
+          </a:p>
+        </p:txBody>
+      </p:sp>
+      <p:sp>
+        <p:nvSpPr>
+          <p:cNvPr id="126" name="P3 track"/>
           <p:cNvSpPr/>
           <p:nvPr/>
         </p:nvSpPr>
         <p:spPr>
           <a:xfrm>
-            <a:off x="1051560" y="7818120"/>
-            <a:ext cx="640080" cy="640080"/>
-          </a:xfrm>
-          <a:prstGeom prst="ellipse">
+            <a:off x="2606040" y="7635240"/>
+            <a:ext cx="3291840" cy="292608"/>
+          </a:xfrm>
+          <a:prstGeom prst="rect">
             <a:avLst/>
           </a:prstGeom>
           <a:solidFill>
-            <a:srgbClr val="1E2761"/>
+            <a:srgbClr val="D5DBEA"/>
           </a:solidFill>
           <a:ln>
             <a:noFill/>
@@ -8462,80 +7422,14 @@
       </p:sp>
       <p:sp>
         <p:nvSpPr>
-          <p:cNvPr id="126" name="VG camt 2"/>
-          <p:cNvSpPr txBox="1"/>
-          <p:nvPr/>
-        </p:nvSpPr>
-        <p:spPr>
-          <a:xfrm>
-            <a:off x="1051560" y="7818120"/>
-            <a:ext cx="640080" cy="640080"/>
-          </a:xfrm>
-          <a:prstGeom prst="rect">
-            <a:avLst/>
-          </a:prstGeom>
-          <a:noFill/>
-        </p:spPr>
-        <p:txBody>
-          <a:bodyPr wrap="square" anchor="ctr" lIns="27432" rIns="27432" tIns="9144" bIns="9144"/>
-          <a:lstStyle/>
-          <a:p>
-            <a:pPr algn="ctr"/>
-            <a:r>
-              <a:rPr sz="1600" b="1" i="0">
-                <a:solidFill>
-                  <a:srgbClr val="FFFFFF"/>
-                </a:solidFill>
-                <a:latin typeface="Calibri"/>
-              </a:rPr>
-              <a:t>2</a:t>
-            </a:r>
-          </a:p>
-        </p:txBody>
-      </p:sp>
-      <p:sp>
-        <p:nvSpPr>
-          <p:cNvPr id="127" name="VG caml 2"/>
-          <p:cNvSpPr txBox="1"/>
-          <p:nvPr/>
-        </p:nvSpPr>
-        <p:spPr>
-          <a:xfrm>
-            <a:off x="1828800" y="7863840"/>
-            <a:ext cx="1188720" cy="548640"/>
-          </a:xfrm>
-          <a:prstGeom prst="rect">
-            <a:avLst/>
-          </a:prstGeom>
-          <a:noFill/>
-        </p:spPr>
-        <p:txBody>
-          <a:bodyPr wrap="square" anchor="ctr" lIns="27432" rIns="27432" tIns="9144" bIns="9144"/>
-          <a:lstStyle/>
-          <a:p>
-            <a:pPr algn="l"/>
-            <a:r>
-              <a:rPr sz="1300" b="0" i="0">
-                <a:solidFill>
-                  <a:srgbClr val="1E2761"/>
-                </a:solidFill>
-                <a:latin typeface="Calibri"/>
-              </a:rPr>
-              <a:t>Stage cam</a:t>
-            </a:r>
-          </a:p>
-        </p:txBody>
-      </p:sp>
-      <p:sp>
-        <p:nvSpPr>
-          <p:cNvPr id="128" name="VG link 2"/>
+          <p:cNvPr id="127" name="P3 fill"/>
           <p:cNvSpPr/>
           <p:nvPr/>
         </p:nvSpPr>
         <p:spPr>
           <a:xfrm>
-            <a:off x="3063240" y="8119872"/>
-            <a:ext cx="685800" cy="36576"/>
+            <a:off x="2606040" y="7635240"/>
+            <a:ext cx="2962656" cy="292608"/>
           </a:xfrm>
           <a:prstGeom prst="rect">
             <a:avLst/>
@@ -8571,20 +7465,86 @@
       </p:sp>
       <p:sp>
         <p:nvSpPr>
-          <p:cNvPr id="129" name="VG cam 3"/>
+          <p:cNvPr id="128" name="P3 val"/>
+          <p:cNvSpPr txBox="1"/>
+          <p:nvPr/>
+        </p:nvSpPr>
+        <p:spPr>
+          <a:xfrm>
+            <a:off x="6035040" y="7543800"/>
+            <a:ext cx="822960" cy="502920"/>
+          </a:xfrm>
+          <a:prstGeom prst="rect">
+            <a:avLst/>
+          </a:prstGeom>
+          <a:noFill/>
+        </p:spPr>
+        <p:txBody>
+          <a:bodyPr wrap="square" anchor="ctr" lIns="45720" rIns="45720" tIns="18288" bIns="18288"/>
+          <a:lstStyle/>
+          <a:p>
+            <a:pPr algn="l"/>
+            <a:r>
+              <a:rPr sz="1300" b="1" i="0">
+                <a:solidFill>
+                  <a:srgbClr val="1E2761"/>
+                </a:solidFill>
+                <a:latin typeface="Calibri"/>
+              </a:rPr>
+              <a:t>63</a:t>
+            </a:r>
+          </a:p>
+        </p:txBody>
+      </p:sp>
+      <p:sp>
+        <p:nvSpPr>
+          <p:cNvPr id="129" name="P3 lbl"/>
+          <p:cNvSpPr txBox="1"/>
+          <p:nvPr/>
+        </p:nvSpPr>
+        <p:spPr>
+          <a:xfrm>
+            <a:off x="960120" y="8275320"/>
+            <a:ext cx="1554480" cy="502920"/>
+          </a:xfrm>
+          <a:prstGeom prst="rect">
+            <a:avLst/>
+          </a:prstGeom>
+          <a:noFill/>
+        </p:spPr>
+        <p:txBody>
+          <a:bodyPr wrap="square" anchor="ctr" lIns="45720" rIns="45720" tIns="18288" bIns="18288"/>
+          <a:lstStyle/>
+          <a:p>
+            <a:pPr algn="r"/>
+            <a:r>
+              <a:rPr sz="1300" b="0" i="0">
+                <a:solidFill>
+                  <a:srgbClr val="1E2761"/>
+                </a:solidFill>
+                <a:latin typeface="Calibri"/>
+              </a:rPr>
+              <a:t>DM-Count</a:t>
+            </a:r>
+          </a:p>
+        </p:txBody>
+      </p:sp>
+      <p:sp>
+        <p:nvSpPr>
+          <p:cNvPr id="130" name="P3 track"/>
           <p:cNvSpPr/>
           <p:nvPr/>
         </p:nvSpPr>
         <p:spPr>
           <a:xfrm>
-            <a:off x="1051560" y="8595360"/>
-            <a:ext cx="640080" cy="640080"/>
-          </a:xfrm>
-          <a:prstGeom prst="ellipse">
+            <a:off x="2606040" y="8366760"/>
+            <a:ext cx="3291840" cy="292608"/>
+          </a:xfrm>
+          <a:prstGeom prst="rect">
             <a:avLst/>
           </a:prstGeom>
           <a:solidFill>
-            <a:srgbClr val="1E2761"/>
+            <a:srgbClr val="D5DBEA"/>
           </a:solidFill>
           <a:ln>
             <a:noFill/>
@@ -8614,80 +7574,14 @@
       </p:sp>
       <p:sp>
         <p:nvSpPr>
-          <p:cNvPr id="130" name="VG camt 3"/>
-          <p:cNvSpPr txBox="1"/>
-          <p:nvPr/>
-        </p:nvSpPr>
-        <p:spPr>
-          <a:xfrm>
-            <a:off x="1051560" y="8595360"/>
-            <a:ext cx="640080" cy="640080"/>
-          </a:xfrm>
-          <a:prstGeom prst="rect">
-            <a:avLst/>
-          </a:prstGeom>
-          <a:noFill/>
-        </p:spPr>
-        <p:txBody>
-          <a:bodyPr wrap="square" anchor="ctr" lIns="27432" rIns="27432" tIns="9144" bIns="9144"/>
-          <a:lstStyle/>
-          <a:p>
-            <a:pPr algn="ctr"/>
-            <a:r>
-              <a:rPr sz="1600" b="1" i="0">
-                <a:solidFill>
-                  <a:srgbClr val="FFFFFF"/>
-                </a:solidFill>
-                <a:latin typeface="Calibri"/>
-              </a:rPr>
-              <a:t>3</a:t>
-            </a:r>
-          </a:p>
-        </p:txBody>
-      </p:sp>
-      <p:sp>
-        <p:nvSpPr>
-          <p:cNvPr id="131" name="VG caml 3"/>
-          <p:cNvSpPr txBox="1"/>
-          <p:nvPr/>
-        </p:nvSpPr>
-        <p:spPr>
-          <a:xfrm>
-            <a:off x="1828800" y="8641080"/>
-            <a:ext cx="1188720" cy="548640"/>
-          </a:xfrm>
-          <a:prstGeom prst="rect">
-            <a:avLst/>
-          </a:prstGeom>
-          <a:noFill/>
-        </p:spPr>
-        <p:txBody>
-          <a:bodyPr wrap="square" anchor="ctr" lIns="27432" rIns="27432" tIns="9144" bIns="9144"/>
-          <a:lstStyle/>
-          <a:p>
-            <a:pPr algn="l"/>
-            <a:r>
-              <a:rPr sz="1300" b="0" i="0">
-                <a:solidFill>
-                  <a:srgbClr val="1E2761"/>
-                </a:solidFill>
-                <a:latin typeface="Calibri"/>
-              </a:rPr>
-              <a:t>Exit cam</a:t>
-            </a:r>
-          </a:p>
-        </p:txBody>
-      </p:sp>
-      <p:sp>
-        <p:nvSpPr>
-          <p:cNvPr id="132" name="VG link 3"/>
+          <p:cNvPr id="131" name="P3 fill"/>
           <p:cNvSpPr/>
           <p:nvPr/>
         </p:nvSpPr>
         <p:spPr>
           <a:xfrm>
-            <a:off x="3063240" y="8897112"/>
-            <a:ext cx="685800" cy="36576"/>
+            <a:off x="2606040" y="8366760"/>
+            <a:ext cx="2821577" cy="292608"/>
           </a:xfrm>
           <a:prstGeom prst="rect">
             <a:avLst/>
@@ -8723,22 +7617,86 @@
       </p:sp>
       <p:sp>
         <p:nvSpPr>
-          <p:cNvPr id="133" name="VG hub"/>
+          <p:cNvPr id="132" name="P3 val"/>
+          <p:cNvSpPr txBox="1"/>
+          <p:nvPr/>
+        </p:nvSpPr>
+        <p:spPr>
+          <a:xfrm>
+            <a:off x="6035040" y="8275320"/>
+            <a:ext cx="822960" cy="502920"/>
+          </a:xfrm>
+          <a:prstGeom prst="rect">
+            <a:avLst/>
+          </a:prstGeom>
+          <a:noFill/>
+        </p:spPr>
+        <p:txBody>
+          <a:bodyPr wrap="square" anchor="ctr" lIns="45720" rIns="45720" tIns="18288" bIns="18288"/>
+          <a:lstStyle/>
+          <a:p>
+            <a:pPr algn="l"/>
+            <a:r>
+              <a:rPr sz="1300" b="1" i="0">
+                <a:solidFill>
+                  <a:srgbClr val="1E2761"/>
+                </a:solidFill>
+                <a:latin typeface="Calibri"/>
+              </a:rPr>
+              <a:t>60</a:t>
+            </a:r>
+          </a:p>
+        </p:txBody>
+      </p:sp>
+      <p:sp>
+        <p:nvSpPr>
+          <p:cNvPr id="133" name="P3 lbl"/>
+          <p:cNvSpPr txBox="1"/>
+          <p:nvPr/>
+        </p:nvSpPr>
+        <p:spPr>
+          <a:xfrm>
+            <a:off x="960120" y="9006840"/>
+            <a:ext cx="1554480" cy="502920"/>
+          </a:xfrm>
+          <a:prstGeom prst="rect">
+            <a:avLst/>
+          </a:prstGeom>
+          <a:noFill/>
+        </p:spPr>
+        <p:txBody>
+          <a:bodyPr wrap="square" anchor="ctr" lIns="45720" rIns="45720" tIns="18288" bIns="18288"/>
+          <a:lstStyle/>
+          <a:p>
+            <a:pPr algn="r"/>
+            <a:r>
+              <a:rPr sz="1300" b="0" i="0">
+                <a:solidFill>
+                  <a:srgbClr val="1E2761"/>
+                </a:solidFill>
+                <a:latin typeface="Calibri"/>
+              </a:rPr>
+              <a:t>Latest</a:t>
+            </a:r>
+          </a:p>
+        </p:txBody>
+      </p:sp>
+      <p:sp>
+        <p:nvSpPr>
+          <p:cNvPr id="134" name="P3 track"/>
           <p:cNvSpPr/>
           <p:nvPr/>
         </p:nvSpPr>
         <p:spPr>
           <a:xfrm>
-            <a:off x="3749039" y="7726679"/>
-            <a:ext cx="1417320" cy="960120"/>
-          </a:xfrm>
-          <a:prstGeom prst="roundRect">
-            <a:avLst>
-              <a:gd name="adj" fmla="val 7000"/>
-            </a:avLst>
+            <a:off x="2606040" y="9098280"/>
+            <a:ext cx="3291840" cy="292608"/>
+          </a:xfrm>
+          <a:prstGeom prst="rect">
+            <a:avLst/>
           </a:prstGeom>
           <a:solidFill>
-            <a:srgbClr val="1E2761"/>
+            <a:srgbClr val="D5DBEA"/>
           </a:solidFill>
           <a:ln>
             <a:noFill/>
@@ -8768,53 +7726,20 @@
       </p:sp>
       <p:sp>
         <p:nvSpPr>
-          <p:cNvPr id="134" name="VG hubt"/>
-          <p:cNvSpPr txBox="1"/>
-          <p:nvPr/>
-        </p:nvSpPr>
-        <p:spPr>
-          <a:xfrm>
-            <a:off x="3749039" y="7726679"/>
-            <a:ext cx="1417320" cy="960120"/>
+          <p:cNvPr id="135" name="P3 fill"/>
+          <p:cNvSpPr/>
+          <p:nvPr/>
+        </p:nvSpPr>
+        <p:spPr>
+          <a:xfrm>
+            <a:off x="2606040" y="9098280"/>
+            <a:ext cx="2304288" cy="292608"/>
           </a:xfrm>
           <a:prstGeom prst="rect">
             <a:avLst/>
           </a:prstGeom>
-          <a:noFill/>
-        </p:spPr>
-        <p:txBody>
-          <a:bodyPr wrap="square" anchor="ctr" lIns="27432" rIns="27432" tIns="9144" bIns="9144"/>
-          <a:lstStyle/>
-          <a:p>
-            <a:pPr algn="ctr"/>
-            <a:r>
-              <a:rPr sz="1300" b="1" i="0">
-                <a:solidFill>
-                  <a:srgbClr val="FFFFFF"/>
-                </a:solidFill>
-                <a:latin typeface="Calibri"/>
-              </a:rPr>
-              <a:t>Venue map</a:t>
-            </a:r>
-          </a:p>
-        </p:txBody>
-      </p:sp>
-      <p:sp>
-        <p:nvSpPr>
-          <p:cNvPr id="135" name="VG arrow"/>
-          <p:cNvSpPr/>
-          <p:nvPr/>
-        </p:nvSpPr>
-        <p:spPr>
-          <a:xfrm>
-            <a:off x="5303520" y="7973568"/>
-            <a:ext cx="457200" cy="457200"/>
-          </a:xfrm>
-          <a:prstGeom prst="rightArrow">
-            <a:avLst/>
-          </a:prstGeom>
           <a:solidFill>
-            <a:srgbClr val="E5B822"/>
+            <a:srgbClr val="1E2761"/>
           </a:solidFill>
           <a:ln>
             <a:noFill/>
@@ -8844,61 +7769,14 @@
       </p:sp>
       <p:sp>
         <p:nvSpPr>
-          <p:cNvPr id="136" name="VG chip"/>
-          <p:cNvSpPr/>
-          <p:nvPr/>
-        </p:nvSpPr>
-        <p:spPr>
-          <a:xfrm>
-            <a:off x="5852160" y="7589520"/>
-            <a:ext cx="1417320" cy="1188720"/>
-          </a:xfrm>
-          <a:prstGeom prst="roundRect">
-            <a:avLst>
-              <a:gd name="adj" fmla="val 7000"/>
-            </a:avLst>
-          </a:prstGeom>
-          <a:solidFill>
-            <a:srgbClr val="FFFFFF"/>
-          </a:solidFill>
-          <a:ln w="19050">
-            <a:solidFill>
-              <a:srgbClr val="D64545"/>
-            </a:solidFill>
-          </a:ln>
-        </p:spPr>
-        <p:style>
-          <a:lnRef idx="1">
-            <a:schemeClr val="accent1"/>
-          </a:lnRef>
-          <a:fillRef idx="3">
-            <a:schemeClr val="accent1"/>
-          </a:fillRef>
-          <a:effectRef idx="2">
-            <a:schemeClr val="accent1"/>
-          </a:effectRef>
-          <a:fontRef idx="minor">
-            <a:schemeClr val="lt1"/>
-          </a:fontRef>
-        </p:style>
-        <p:txBody>
-          <a:bodyPr rtlCol="0" anchor="ctr"/>
-          <a:lstStyle/>
-          <a:p>
-            <a:pPr algn="ctr"/>
-          </a:p>
-        </p:txBody>
-      </p:sp>
-      <p:sp>
-        <p:nvSpPr>
-          <p:cNvPr id="137" name="VG chipt"/>
+          <p:cNvPr id="136" name="P3 val"/>
           <p:cNvSpPr txBox="1"/>
           <p:nvPr/>
         </p:nvSpPr>
         <p:spPr>
           <a:xfrm>
-            <a:off x="5897880" y="7635240"/>
-            <a:ext cx="1325880" cy="1097280"/>
+            <a:off x="6035040" y="9006840"/>
+            <a:ext cx="822960" cy="502920"/>
           </a:xfrm>
           <a:prstGeom prst="rect">
             <a:avLst/>
@@ -8906,30 +7784,18 @@
           <a:noFill/>
         </p:spPr>
         <p:txBody>
-          <a:bodyPr wrap="square" anchor="ctr" lIns="27432" rIns="27432" tIns="9144" bIns="9144"/>
-          <a:lstStyle/>
-          <a:p>
-            <a:pPr algn="ctr"/>
-            <a:r>
-              <a:rPr sz="1200" b="1" i="0">
+          <a:bodyPr wrap="square" anchor="ctr" lIns="45720" rIns="45720" tIns="18288" bIns="18288"/>
+          <a:lstStyle/>
+          <a:p>
+            <a:pPr algn="l"/>
+            <a:r>
+              <a:rPr sz="1300" b="1" i="0">
                 <a:solidFill>
                   <a:srgbClr val="1E2761"/>
                 </a:solidFill>
                 <a:latin typeface="Calibri"/>
               </a:rPr>
-              <a:t>Jam traced</a:t>
-            </a:r>
-          </a:p>
-          <a:p>
-            <a:pPr algn="ctr"/>
-            <a:r>
-              <a:rPr sz="1200" b="1" i="0">
-                <a:solidFill>
-                  <a:srgbClr val="1E2761"/>
-                </a:solidFill>
-                <a:latin typeface="Calibri"/>
-              </a:rPr>
-              <a:t>to Gate</a:t>
+              <a:t>49</a:t>
             </a:r>
           </a:p>
         </p:txBody>
@@ -9127,70 +7993,6 @@
           </a:p>
         </p:txBody>
       </p:sp>
-      <p:graphicFrame>
-        <p:nvGraphicFramePr>
-          <p:cNvPr id="5" name="Chart 4"/>
-          <p:cNvGraphicFramePr>
-            <a:graphicFrameLocks noGrp="1"/>
-          </p:cNvGraphicFramePr>
-          <p:nvPr/>
-        </p:nvGraphicFramePr>
-        <p:xfrm>
-          <a:off x="914400" y="2788920"/>
-          <a:ext cx="7863840" cy="5943600"/>
-        </p:xfrm>
-        <a:graphic>
-          <a:graphicData uri="http://schemas.openxmlformats.org/drawingml/2006/chart">
-            <c:chart xmlns:c="http://schemas.openxmlformats.org/drawingml/2006/chart" r:id="rId3"/>
-          </a:graphicData>
-        </a:graphic>
-      </p:graphicFrame>
-      <p:sp>
-        <p:nvSpPr>
-          <p:cNvPr id="102" name="TextBox 102"/>
-          <p:cNvSpPr txBox="1"/>
-          <p:nvPr/>
-        </p:nvSpPr>
-        <p:spPr>
-          <a:xfrm>
-            <a:off x="1097280" y="8823960"/>
-            <a:ext cx="7498080" cy="685800"/>
-          </a:xfrm>
-          <a:prstGeom prst="rect">
-            <a:avLst/>
-          </a:prstGeom>
-          <a:noFill/>
-          <a:ln>
-            <a:noFill/>
-          </a:ln>
-        </p:spPr>
-        <p:txBody>
-          <a:bodyPr wrap="square" lIns="0" tIns="0" rIns="0" bIns="0" anchor="ctr" rtlCol="0">
-            <a:noAutofit/>
-          </a:bodyPr>
-          <a:lstStyle/>
-          <a:p>
-            <a:pPr algn="ctr">
-              <a:spcBef>
-                <a:spcPts val="0"/>
-              </a:spcBef>
-              <a:spcAft>
-                <a:spcPts val="0"/>
-              </a:spcAft>
-            </a:pPr>
-            <a:r>
-              <a:rPr lang="en-US" sz="1700" b="0" i="0" dirty="0">
-                <a:solidFill>
-                  <a:srgbClr val="5A5A5A"/>
-                </a:solidFill>
-                <a:latin typeface="Calibri"/>
-                <a:cs typeface="Calibri"/>
-              </a:rPr>
-              <a:t>Model and tracker time only, same laptop. FPS stays above 30 even when the frame fills with people.</a:t>
-            </a:r>
-          </a:p>
-        </p:txBody>
-      </p:sp>
       <p:sp>
         <p:nvSpPr>
           <p:cNvPr id="103" name="Card 103"/>
@@ -9222,9 +8024,7 @@
           </a:effectLst>
         </p:spPr>
         <p:txBody>
-          <a:bodyPr wrap="square" lIns="320040" tIns="109728" rIns="320040" bIns="109728" anchor="ctr" rtlCol="0">
-            <a:noAutofit/>
-          </a:bodyPr>
+          <a:bodyPr wrap="square" lIns="45720" tIns="18288" rIns="45720" bIns="18288" anchor="ctr" rtlCol="0"/>
           <a:lstStyle/>
           <a:p>
             <a:pPr algn="l">
@@ -9236,37 +8036,25 @@
               </a:spcAft>
             </a:pPr>
             <a:r>
-              <a:rPr lang="en-US" sz="3000" b="1" i="0" dirty="0">
+              <a:rPr sz="2000" b="1" i="0">
                 <a:solidFill>
                   <a:srgbClr val="1E2761"/>
                 </a:solidFill>
                 <a:latin typeface="Calibri"/>
-                <a:cs typeface="Calibri"/>
-              </a:rPr>
-              <a:t>Forecast</a:t>
-            </a:r>
-          </a:p>
-          <a:p>
-            <a:pPr algn="l">
-              <a:lnSpc>
-                <a:spcPct val="100000"/>
-              </a:lnSpc>
-              <a:spcBef>
-                <a:spcPts val="0"/>
-              </a:spcBef>
-              <a:spcAft>
-                <a:spcPts val="0"/>
-              </a:spcAft>
-            </a:pPr>
-            <a:r>
-              <a:rPr lang="en-US" sz="2000" b="0" i="0" dirty="0">
+              </a:rPr>
+              <a:t>Video stays put</a:t>
+            </a:r>
+          </a:p>
+          <a:p>
+            <a:pPr algn="l"/>
+            <a:r>
+              <a:rPr sz="1500" b="0" i="0">
                 <a:solidFill>
                   <a:srgbClr val="111111"/>
                 </a:solidFill>
                 <a:latin typeface="Calibri"/>
-                <a:cs typeface="Calibri"/>
-              </a:rPr>
-              <a:t>The trend is fitted live, so the wall shows seconds to critical before the jam locks.</a:t>
+              </a:rPr>
+              <a:t>Each edge box sends small JSON numbers, never raw video. Footage is discarded at the camera.</a:t>
             </a:r>
           </a:p>
         </p:txBody>
@@ -9302,9 +8090,7 @@
           </a:effectLst>
         </p:spPr>
         <p:txBody>
-          <a:bodyPr wrap="square" lIns="320040" tIns="109728" rIns="320040" bIns="109728" anchor="ctr" rtlCol="0">
-            <a:noAutofit/>
-          </a:bodyPr>
+          <a:bodyPr wrap="square" lIns="45720" tIns="18288" rIns="45720" bIns="18288" anchor="ctr" rtlCol="0"/>
           <a:lstStyle/>
           <a:p>
             <a:pPr algn="l">
@@ -9316,37 +8102,25 @@
               </a:spcAft>
             </a:pPr>
             <a:r>
-              <a:rPr lang="en-US" sz="3000" b="1" i="0" dirty="0">
+              <a:rPr sz="2000" b="1" i="0">
                 <a:solidFill>
                   <a:srgbClr val="1E2761"/>
                 </a:solidFill>
                 <a:latin typeface="Calibri"/>
-                <a:cs typeface="Calibri"/>
-              </a:rPr>
-              <a:t>Red alert</a:t>
-            </a:r>
-          </a:p>
-          <a:p>
-            <a:pPr algn="l">
-              <a:lnSpc>
-                <a:spcPct val="100000"/>
-              </a:lnSpc>
-              <a:spcBef>
-                <a:spcPts val="0"/>
-              </a:spcBef>
-              <a:spcAft>
-                <a:spcPts val="0"/>
-              </a:spcAft>
-            </a:pPr>
-            <a:r>
-              <a:rPr lang="en-US" sz="2000" b="0" i="0" dirty="0">
+              </a:rPr>
+              <a:t>Calibrated where it counts</a:t>
+            </a:r>
+          </a:p>
+          <a:p>
+            <a:pPr algn="l"/>
+            <a:r>
+              <a:rPr sz="1500" b="0" i="0">
                 <a:solidFill>
                   <a:srgbClr val="111111"/>
                 </a:solidFill>
                 <a:latin typeface="Calibri"/>
-                <a:cs typeface="Calibri"/>
-              </a:rPr>
-              <a:t>Fires when a zone packs tight and stops. The wall counts down the seconds to critical.</a:t>
+              </a:rPr>
+              <a:t>Fixed gates are measured once. Other views use relative levels. No fake square metres.</a:t>
             </a:r>
           </a:p>
         </p:txBody>
@@ -9382,9 +8156,7 @@
           </a:effectLst>
         </p:spPr>
         <p:txBody>
-          <a:bodyPr wrap="square" lIns="320040" tIns="109728" rIns="320040" bIns="109728" anchor="ctr" rtlCol="0">
-            <a:noAutofit/>
-          </a:bodyPr>
+          <a:bodyPr wrap="square" lIns="45720" tIns="18288" rIns="45720" bIns="18288" anchor="ctr" rtlCol="0"/>
           <a:lstStyle/>
           <a:p>
             <a:pPr algn="l">
@@ -9396,37 +8168,25 @@
               </a:spcAft>
             </a:pPr>
             <a:r>
-              <a:rPr lang="en-US" sz="3000" b="1" i="0" dirty="0">
+              <a:rPr sz="2000" b="1" i="0">
                 <a:solidFill>
                   <a:srgbClr val="1E2761"/>
                 </a:solidFill>
                 <a:latin typeface="Calibri"/>
-                <a:cs typeface="Calibri"/>
-              </a:rPr>
-              <a:t>Built to scale out</a:t>
-            </a:r>
-          </a:p>
-          <a:p>
-            <a:pPr algn="l">
-              <a:lnSpc>
-                <a:spcPct val="100000"/>
-              </a:lnSpc>
-              <a:spcBef>
-                <a:spcPts val="0"/>
-              </a:spcBef>
-              <a:spcAft>
-                <a:spcPts val="0"/>
-              </a:spcAft>
-            </a:pPr>
-            <a:r>
-              <a:rPr lang="en-US" sz="2000" b="0" i="0" dirty="0">
+              </a:rPr>
+              <a:t>Private by design</a:t>
+            </a:r>
+          </a:p>
+          <a:p>
+            <a:pPr algn="l"/>
+            <a:r>
+              <a:rPr sz="1500" b="0" i="0">
                 <a:solidFill>
                   <a:srgbClr val="111111"/>
                 </a:solidFill>
                 <a:latin typeface="Calibri"/>
-                <a:cs typeface="Calibri"/>
-              </a:rPr>
-              <a:t>One laptop runs a venue today; an edge box per camera scales to mass gatherings.</a:t>
+              </a:rPr>
+              <a:t>Heatmaps cannot show a face. Saved video is blurred, wiped after 7 days, zero identity in core.</a:t>
             </a:r>
           </a:p>
         </p:txBody>
@@ -9479,14 +8239,47 @@
       </p:sp>
       <p:sp>
         <p:nvSpPr>
-          <p:cNvPr id="108" name="BC card"/>
+          <p:cNvPr id="108" name="P4 edget"/>
+          <p:cNvSpPr txBox="1"/>
+          <p:nvPr/>
+        </p:nvSpPr>
+        <p:spPr>
+          <a:xfrm>
+            <a:off x="1005840" y="2788920"/>
+            <a:ext cx="7680960" cy="548640"/>
+          </a:xfrm>
+          <a:prstGeom prst="rect">
+            <a:avLst/>
+          </a:prstGeom>
+          <a:noFill/>
+        </p:spPr>
+        <p:txBody>
+          <a:bodyPr wrap="square" anchor="ctr" lIns="45720" rIns="45720" tIns="18288" bIns="18288"/>
+          <a:lstStyle/>
+          <a:p>
+            <a:pPr algn="l"/>
+            <a:r>
+              <a:rPr sz="2000" b="1" i="0">
+                <a:solidFill>
+                  <a:srgbClr val="1E2761"/>
+                </a:solidFill>
+                <a:latin typeface="Calibri"/>
+              </a:rPr>
+              <a:t>One camera, one edge box</a:t>
+            </a:r>
+          </a:p>
+        </p:txBody>
+      </p:sp>
+      <p:sp>
+        <p:nvSpPr>
+          <p:cNvPr id="109" name="P4 node"/>
           <p:cNvSpPr/>
           <p:nvPr/>
         </p:nvSpPr>
         <p:spPr>
           <a:xfrm>
-            <a:off x="9326880" y="6812280"/>
-            <a:ext cx="8229600" cy="2788920"/>
+            <a:off x="1417320" y="3474720"/>
+            <a:ext cx="6858000" cy="731520"/>
           </a:xfrm>
           <a:prstGeom prst="roundRect">
             <a:avLst>
@@ -9494,7 +8287,7 @@
             </a:avLst>
           </a:prstGeom>
           <a:solidFill>
-            <a:srgbClr val="EEF2FF"/>
+            <a:srgbClr val="1E2761"/>
           </a:solidFill>
           <a:ln>
             <a:noFill/>
@@ -9515,64 +8308,38 @@
           </a:fontRef>
         </p:style>
         <p:txBody>
-          <a:bodyPr rtlCol="0" anchor="ctr"/>
+          <a:bodyPr rtlCol="0" anchor="ctr" wrap="square" lIns="45720" rIns="45720" tIns="18288" bIns="18288"/>
           <a:lstStyle/>
           <a:p>
             <a:pPr algn="ctr"/>
-          </a:p>
-        </p:txBody>
-      </p:sp>
-      <p:sp>
-        <p:nvSpPr>
-          <p:cNvPr id="109" name="BC title"/>
-          <p:cNvSpPr txBox="1"/>
-          <p:nvPr/>
-        </p:nvSpPr>
-        <p:spPr>
-          <a:xfrm>
-            <a:off x="9601200" y="6931152"/>
-            <a:ext cx="7680960" cy="411480"/>
-          </a:xfrm>
-          <a:prstGeom prst="rect">
+            <a:r>
+              <a:rPr sz="1500" b="1" i="0">
+                <a:solidFill>
+                  <a:srgbClr val="FFFFFF"/>
+                </a:solidFill>
+                <a:latin typeface="Calibri"/>
+              </a:rPr>
+              <a:t>Camera: fixed gate view</a:t>
+            </a:r>
+          </a:p>
+        </p:txBody>
+      </p:sp>
+      <p:sp>
+        <p:nvSpPr>
+          <p:cNvPr id="110" name="P4 arrow"/>
+          <p:cNvSpPr/>
+          <p:nvPr/>
+        </p:nvSpPr>
+        <p:spPr>
+          <a:xfrm>
+            <a:off x="4389120" y="4224528"/>
+            <a:ext cx="365760" cy="256032"/>
+          </a:xfrm>
+          <a:prstGeom prst="downArrow">
             <a:avLst/>
           </a:prstGeom>
-          <a:noFill/>
-        </p:spPr>
-        <p:txBody>
-          <a:bodyPr wrap="square" anchor="ctr" lIns="27432" rIns="27432" tIns="9144" bIns="9144"/>
-          <a:lstStyle/>
-          <a:p>
-            <a:pPr algn="l"/>
-            <a:r>
-              <a:rPr sz="1600" b="1" i="0">
-                <a:solidFill>
-                  <a:srgbClr val="1E2761"/>
-                </a:solidFill>
-                <a:latin typeface="Calibri"/>
-              </a:rPr>
-              <a:t>Tested on three real crowds</a:t>
-            </a:r>
-          </a:p>
-        </p:txBody>
-      </p:sp>
-      <p:sp>
-        <p:nvSpPr>
-          <p:cNvPr id="110" name="BC chip Station concourse"/>
-          <p:cNvSpPr/>
-          <p:nvPr/>
-        </p:nvSpPr>
-        <p:spPr>
-          <a:xfrm>
-            <a:off x="9601200" y="7406640"/>
-            <a:ext cx="2468880" cy="1417320"/>
-          </a:xfrm>
-          <a:prstGeom prst="roundRect">
-            <a:avLst>
-              <a:gd name="adj" fmla="val 7000"/>
-            </a:avLst>
-          </a:prstGeom>
           <a:solidFill>
-            <a:srgbClr val="FFFFFF"/>
+            <a:srgbClr val="1E2761"/>
           </a:solidFill>
           <a:ln>
             <a:noFill/>
@@ -9602,71 +8369,14 @@
       </p:sp>
       <p:sp>
         <p:nvSpPr>
-          <p:cNvPr id="111" name="BC chipt Station concourse"/>
-          <p:cNvSpPr txBox="1"/>
-          <p:nvPr/>
-        </p:nvSpPr>
-        <p:spPr>
-          <a:xfrm>
-            <a:off x="9646920" y="7424927"/>
-            <a:ext cx="2377440" cy="1380744"/>
-          </a:xfrm>
-          <a:prstGeom prst="rect">
-            <a:avLst/>
-          </a:prstGeom>
-          <a:noFill/>
-        </p:spPr>
-        <p:txBody>
-          <a:bodyPr wrap="square" anchor="ctr" lIns="27432" rIns="27432" tIns="9144" bIns="9144"/>
-          <a:lstStyle/>
-          <a:p>
-            <a:pPr algn="ctr"/>
-            <a:r>
-              <a:rPr sz="1300" b="1" i="0">
-                <a:solidFill>
-                  <a:srgbClr val="1E2761"/>
-                </a:solidFill>
-                <a:latin typeface="Calibri"/>
-              </a:rPr>
-              <a:t>Station concourse</a:t>
-            </a:r>
-          </a:p>
-          <a:p>
-            <a:pPr algn="ctr"/>
-            <a:r>
-              <a:rPr sz="1100" b="0" i="0">
-                <a:solidFill>
-                  <a:srgbClr val="5A5A5A"/>
-                </a:solidFill>
-                <a:latin typeface="Calibri"/>
-              </a:rPr>
-              <a:t>16 people peak</a:t>
-            </a:r>
-          </a:p>
-          <a:p>
-            <a:pPr algn="ctr"/>
-            <a:r>
-              <a:rPr sz="1600" b="1" i="0">
-                <a:solidFill>
-                  <a:srgbClr val="1E2761"/>
-                </a:solidFill>
-                <a:latin typeface="Calibri"/>
-              </a:rPr>
-              <a:t>37 FPS</a:t>
-            </a:r>
-          </a:p>
-        </p:txBody>
-      </p:sp>
-      <p:sp>
-        <p:nvSpPr>
-          <p:cNvPr id="112" name="BC chip Busy crossing"/>
+          <p:cNvPr id="111" name="P4 node"/>
           <p:cNvSpPr/>
           <p:nvPr/>
         </p:nvSpPr>
         <p:spPr>
           <a:xfrm>
-            <a:off x="12207240" y="7406640"/>
-            <a:ext cx="2468880" cy="1417320"/>
+            <a:off x="1417320" y="4526280"/>
+            <a:ext cx="6858000" cy="731520"/>
           </a:xfrm>
           <a:prstGeom prst="roundRect">
             <a:avLst>
@@ -9674,7 +8384,7 @@
             </a:avLst>
           </a:prstGeom>
           <a:solidFill>
-            <a:srgbClr val="FFFFFF"/>
+            <a:srgbClr val="1E2761"/>
           </a:solidFill>
           <a:ln>
             <a:noFill/>
@@ -9695,88 +8405,38 @@
           </a:fontRef>
         </p:style>
         <p:txBody>
-          <a:bodyPr rtlCol="0" anchor="ctr"/>
+          <a:bodyPr rtlCol="0" anchor="ctr" wrap="square" lIns="45720" rIns="45720" tIns="18288" bIns="18288"/>
           <a:lstStyle/>
           <a:p>
             <a:pPr algn="ctr"/>
-          </a:p>
-        </p:txBody>
-      </p:sp>
-      <p:sp>
-        <p:nvSpPr>
-          <p:cNvPr id="113" name="BC chipt Busy crossing"/>
-          <p:cNvSpPr txBox="1"/>
-          <p:nvPr/>
-        </p:nvSpPr>
-        <p:spPr>
-          <a:xfrm>
-            <a:off x="12252960" y="7424927"/>
-            <a:ext cx="2377440" cy="1380744"/>
-          </a:xfrm>
-          <a:prstGeom prst="rect">
+            <a:r>
+              <a:rPr sz="1500" b="1" i="0">
+                <a:solidFill>
+                  <a:srgbClr val="FFFFFF"/>
+                </a:solidFill>
+                <a:latin typeface="Calibri"/>
+              </a:rPr>
+              <a:t>Edge box: density plus flow plus pressure on device</a:t>
+            </a:r>
+          </a:p>
+        </p:txBody>
+      </p:sp>
+      <p:sp>
+        <p:nvSpPr>
+          <p:cNvPr id="112" name="P4 arrow"/>
+          <p:cNvSpPr/>
+          <p:nvPr/>
+        </p:nvSpPr>
+        <p:spPr>
+          <a:xfrm>
+            <a:off x="4389120" y="5276088"/>
+            <a:ext cx="365760" cy="256032"/>
+          </a:xfrm>
+          <a:prstGeom prst="downArrow">
             <a:avLst/>
           </a:prstGeom>
-          <a:noFill/>
-        </p:spPr>
-        <p:txBody>
-          <a:bodyPr wrap="square" anchor="ctr" lIns="27432" rIns="27432" tIns="9144" bIns="9144"/>
-          <a:lstStyle/>
-          <a:p>
-            <a:pPr algn="ctr"/>
-            <a:r>
-              <a:rPr sz="1300" b="1" i="0">
-                <a:solidFill>
-                  <a:srgbClr val="1E2761"/>
-                </a:solidFill>
-                <a:latin typeface="Calibri"/>
-              </a:rPr>
-              <a:t>Busy crossing</a:t>
-            </a:r>
-          </a:p>
-          <a:p>
-            <a:pPr algn="ctr"/>
-            <a:r>
-              <a:rPr sz="1100" b="0" i="0">
-                <a:solidFill>
-                  <a:srgbClr val="5A5A5A"/>
-                </a:solidFill>
-                <a:latin typeface="Calibri"/>
-              </a:rPr>
-              <a:t>7 people peak</a:t>
-            </a:r>
-          </a:p>
-          <a:p>
-            <a:pPr algn="ctr"/>
-            <a:r>
-              <a:rPr sz="1600" b="1" i="0">
-                <a:solidFill>
-                  <a:srgbClr val="1E2761"/>
-                </a:solidFill>
-                <a:latin typeface="Calibri"/>
-              </a:rPr>
-              <a:t>42 FPS</a:t>
-            </a:r>
-          </a:p>
-        </p:txBody>
-      </p:sp>
-      <p:sp>
-        <p:nvSpPr>
-          <p:cNvPr id="114" name="BC chip Temple street"/>
-          <p:cNvSpPr/>
-          <p:nvPr/>
-        </p:nvSpPr>
-        <p:spPr>
-          <a:xfrm>
-            <a:off x="14813280" y="7406640"/>
-            <a:ext cx="2468880" cy="1417320"/>
-          </a:xfrm>
-          <a:prstGeom prst="roundRect">
-            <a:avLst>
-              <a:gd name="adj" fmla="val 7000"/>
-            </a:avLst>
-          </a:prstGeom>
           <a:solidFill>
-            <a:srgbClr val="FFFFFF"/>
+            <a:srgbClr val="1E2761"/>
           </a:solidFill>
           <a:ln>
             <a:noFill/>
@@ -9806,14 +8466,262 @@
       </p:sp>
       <p:sp>
         <p:nvSpPr>
-          <p:cNvPr id="115" name="BC chipt Temple street"/>
+          <p:cNvPr id="113" name="P4 node"/>
+          <p:cNvSpPr/>
+          <p:nvPr/>
+        </p:nvSpPr>
+        <p:spPr>
+          <a:xfrm>
+            <a:off x="1417320" y="5577840"/>
+            <a:ext cx="6858000" cy="731520"/>
+          </a:xfrm>
+          <a:prstGeom prst="roundRect">
+            <a:avLst>
+              <a:gd name="adj" fmla="val 7000"/>
+            </a:avLst>
+          </a:prstGeom>
+          <a:solidFill>
+            <a:srgbClr val="E5B822"/>
+          </a:solidFill>
+          <a:ln>
+            <a:noFill/>
+          </a:ln>
+        </p:spPr>
+        <p:style>
+          <a:lnRef idx="1">
+            <a:schemeClr val="accent1"/>
+          </a:lnRef>
+          <a:fillRef idx="3">
+            <a:schemeClr val="accent1"/>
+          </a:fillRef>
+          <a:effectRef idx="2">
+            <a:schemeClr val="accent1"/>
+          </a:effectRef>
+          <a:fontRef idx="minor">
+            <a:schemeClr val="lt1"/>
+          </a:fontRef>
+        </p:style>
+        <p:txBody>
+          <a:bodyPr rtlCol="0" anchor="ctr" wrap="square" lIns="45720" rIns="45720" tIns="18288" bIns="18288"/>
+          <a:lstStyle/>
+          <a:p>
+            <a:pPr algn="ctr"/>
+            <a:r>
+              <a:rPr sz="1500" b="1" i="0">
+                <a:solidFill>
+                  <a:srgbClr val="1E2761"/>
+                </a:solidFill>
+                <a:latin typeface="Calibri"/>
+              </a:rPr>
+              <a:t>Sends JSON numbers only, never video</a:t>
+            </a:r>
+          </a:p>
+        </p:txBody>
+      </p:sp>
+      <p:sp>
+        <p:nvSpPr>
+          <p:cNvPr id="114" name="P4 arrow"/>
+          <p:cNvSpPr/>
+          <p:nvPr/>
+        </p:nvSpPr>
+        <p:spPr>
+          <a:xfrm>
+            <a:off x="4389120" y="6327648"/>
+            <a:ext cx="365760" cy="256032"/>
+          </a:xfrm>
+          <a:prstGeom prst="downArrow">
+            <a:avLst/>
+          </a:prstGeom>
+          <a:solidFill>
+            <a:srgbClr val="1E2761"/>
+          </a:solidFill>
+          <a:ln>
+            <a:noFill/>
+          </a:ln>
+        </p:spPr>
+        <p:style>
+          <a:lnRef idx="1">
+            <a:schemeClr val="accent1"/>
+          </a:lnRef>
+          <a:fillRef idx="3">
+            <a:schemeClr val="accent1"/>
+          </a:fillRef>
+          <a:effectRef idx="2">
+            <a:schemeClr val="accent1"/>
+          </a:effectRef>
+          <a:fontRef idx="minor">
+            <a:schemeClr val="lt1"/>
+          </a:fontRef>
+        </p:style>
+        <p:txBody>
+          <a:bodyPr rtlCol="0" anchor="ctr"/>
+          <a:lstStyle/>
+          <a:p>
+            <a:pPr algn="ctr"/>
+          </a:p>
+        </p:txBody>
+      </p:sp>
+      <p:sp>
+        <p:nvSpPr>
+          <p:cNvPr id="115" name="P4 node"/>
+          <p:cNvSpPr/>
+          <p:nvPr/>
+        </p:nvSpPr>
+        <p:spPr>
+          <a:xfrm>
+            <a:off x="1417320" y="6629400"/>
+            <a:ext cx="6858000" cy="731520"/>
+          </a:xfrm>
+          <a:prstGeom prst="roundRect">
+            <a:avLst>
+              <a:gd name="adj" fmla="val 7000"/>
+            </a:avLst>
+          </a:prstGeom>
+          <a:solidFill>
+            <a:srgbClr val="1E2761"/>
+          </a:solidFill>
+          <a:ln>
+            <a:noFill/>
+          </a:ln>
+        </p:spPr>
+        <p:style>
+          <a:lnRef idx="1">
+            <a:schemeClr val="accent1"/>
+          </a:lnRef>
+          <a:fillRef idx="3">
+            <a:schemeClr val="accent1"/>
+          </a:fillRef>
+          <a:effectRef idx="2">
+            <a:schemeClr val="accent1"/>
+          </a:effectRef>
+          <a:fontRef idx="minor">
+            <a:schemeClr val="lt1"/>
+          </a:fontRef>
+        </p:style>
+        <p:txBody>
+          <a:bodyPr rtlCol="0" anchor="ctr" wrap="square" lIns="45720" rIns="45720" tIns="18288" bIns="18288"/>
+          <a:lstStyle/>
+          <a:p>
+            <a:pPr algn="ctr"/>
+            <a:r>
+              <a:rPr sz="1500" b="1" i="0">
+                <a:solidFill>
+                  <a:srgbClr val="FFFFFF"/>
+                </a:solidFill>
+                <a:latin typeface="Calibri"/>
+              </a:rPr>
+              <a:t>Venue server: fuses every camera into one map</a:t>
+            </a:r>
+          </a:p>
+        </p:txBody>
+      </p:sp>
+      <p:sp>
+        <p:nvSpPr>
+          <p:cNvPr id="116" name="P4 arrow"/>
+          <p:cNvSpPr/>
+          <p:nvPr/>
+        </p:nvSpPr>
+        <p:spPr>
+          <a:xfrm>
+            <a:off x="4389120" y="7379208"/>
+            <a:ext cx="365760" cy="256032"/>
+          </a:xfrm>
+          <a:prstGeom prst="downArrow">
+            <a:avLst/>
+          </a:prstGeom>
+          <a:solidFill>
+            <a:srgbClr val="1E2761"/>
+          </a:solidFill>
+          <a:ln>
+            <a:noFill/>
+          </a:ln>
+        </p:spPr>
+        <p:style>
+          <a:lnRef idx="1">
+            <a:schemeClr val="accent1"/>
+          </a:lnRef>
+          <a:fillRef idx="3">
+            <a:schemeClr val="accent1"/>
+          </a:fillRef>
+          <a:effectRef idx="2">
+            <a:schemeClr val="accent1"/>
+          </a:effectRef>
+          <a:fontRef idx="minor">
+            <a:schemeClr val="lt1"/>
+          </a:fontRef>
+        </p:style>
+        <p:txBody>
+          <a:bodyPr rtlCol="0" anchor="ctr"/>
+          <a:lstStyle/>
+          <a:p>
+            <a:pPr algn="ctr"/>
+          </a:p>
+        </p:txBody>
+      </p:sp>
+      <p:sp>
+        <p:nvSpPr>
+          <p:cNvPr id="117" name="P4 node"/>
+          <p:cNvSpPr/>
+          <p:nvPr/>
+        </p:nvSpPr>
+        <p:spPr>
+          <a:xfrm>
+            <a:off x="1417320" y="7680960"/>
+            <a:ext cx="6858000" cy="731520"/>
+          </a:xfrm>
+          <a:prstGeom prst="roundRect">
+            <a:avLst>
+              <a:gd name="adj" fmla="val 7000"/>
+            </a:avLst>
+          </a:prstGeom>
+          <a:solidFill>
+            <a:srgbClr val="1E2761"/>
+          </a:solidFill>
+          <a:ln>
+            <a:noFill/>
+          </a:ln>
+        </p:spPr>
+        <p:style>
+          <a:lnRef idx="1">
+            <a:schemeClr val="accent1"/>
+          </a:lnRef>
+          <a:fillRef idx="3">
+            <a:schemeClr val="accent1"/>
+          </a:fillRef>
+          <a:effectRef idx="2">
+            <a:schemeClr val="accent1"/>
+          </a:effectRef>
+          <a:fontRef idx="minor">
+            <a:schemeClr val="lt1"/>
+          </a:fontRef>
+        </p:style>
+        <p:txBody>
+          <a:bodyPr rtlCol="0" anchor="ctr" wrap="square" lIns="45720" rIns="45720" tIns="18288" bIns="18288"/>
+          <a:lstStyle/>
+          <a:p>
+            <a:pPr algn="ctr"/>
+            <a:r>
+              <a:rPr sz="1500" b="1" i="0">
+                <a:solidFill>
+                  <a:srgbClr val="FFFFFF"/>
+                </a:solidFill>
+                <a:latin typeface="Calibri"/>
+              </a:rPr>
+              <a:t>Guard wall: ranked zones, early warning</a:t>
+            </a:r>
+          </a:p>
+        </p:txBody>
+      </p:sp>
+      <p:sp>
+        <p:nvSpPr>
+          <p:cNvPr id="118" name="P4 edgef"/>
           <p:cNvSpPr txBox="1"/>
           <p:nvPr/>
         </p:nvSpPr>
         <p:spPr>
           <a:xfrm>
-            <a:off x="14859000" y="7424927"/>
-            <a:ext cx="2377440" cy="1380744"/>
+            <a:off x="1005840" y="8641080"/>
+            <a:ext cx="7680960" cy="731520"/>
           </a:xfrm>
           <a:prstGeom prst="rect">
             <a:avLst/>
@@ -9821,56 +8729,77 @@
           <a:noFill/>
         </p:spPr>
         <p:txBody>
-          <a:bodyPr wrap="square" anchor="ctr" lIns="27432" rIns="27432" tIns="9144" bIns="9144"/>
+          <a:bodyPr wrap="square" anchor="ctr" lIns="45720" rIns="45720" tIns="18288" bIns="18288"/>
+          <a:lstStyle/>
+          <a:p>
+            <a:pPr algn="l"/>
+            <a:r>
+              <a:rPr sz="1400" b="0" i="0">
+                <a:solidFill>
+                  <a:srgbClr val="5A5A5A"/>
+                </a:solidFill>
+                <a:latin typeface="Calibri"/>
+              </a:rPr>
+              <a:t>Raw video never leaves the camera box.</a:t>
+            </a:r>
+          </a:p>
+        </p:txBody>
+      </p:sp>
+      <p:sp>
+        <p:nvSpPr>
+          <p:cNvPr id="119" name="P4 site"/>
+          <p:cNvSpPr/>
+          <p:nvPr/>
+        </p:nvSpPr>
+        <p:spPr>
+          <a:xfrm>
+            <a:off x="9326880" y="6812280"/>
+            <a:ext cx="8229600" cy="2788920"/>
+          </a:xfrm>
+          <a:prstGeom prst="roundRect">
+            <a:avLst>
+              <a:gd name="adj" fmla="val 7000"/>
+            </a:avLst>
+          </a:prstGeom>
+          <a:solidFill>
+            <a:srgbClr val="EEF2FF"/>
+          </a:solidFill>
+          <a:ln>
+            <a:noFill/>
+          </a:ln>
+        </p:spPr>
+        <p:style>
+          <a:lnRef idx="1">
+            <a:schemeClr val="accent1"/>
+          </a:lnRef>
+          <a:fillRef idx="3">
+            <a:schemeClr val="accent1"/>
+          </a:fillRef>
+          <a:effectRef idx="2">
+            <a:schemeClr val="accent1"/>
+          </a:effectRef>
+          <a:fontRef idx="minor">
+            <a:schemeClr val="lt1"/>
+          </a:fontRef>
+        </p:style>
+        <p:txBody>
+          <a:bodyPr rtlCol="0" anchor="ctr"/>
           <a:lstStyle/>
           <a:p>
             <a:pPr algn="ctr"/>
-            <a:r>
-              <a:rPr sz="1300" b="1" i="0">
-                <a:solidFill>
-                  <a:srgbClr val="1E2761"/>
-                </a:solidFill>
-                <a:latin typeface="Calibri"/>
-              </a:rPr>
-              <a:t>Temple street</a:t>
-            </a:r>
-          </a:p>
-          <a:p>
-            <a:pPr algn="ctr"/>
-            <a:r>
-              <a:rPr sz="1100" b="0" i="0">
-                <a:solidFill>
-                  <a:srgbClr val="5A5A5A"/>
-                </a:solidFill>
-                <a:latin typeface="Calibri"/>
-              </a:rPr>
-              <a:t>15 people peak</a:t>
-            </a:r>
-          </a:p>
-          <a:p>
-            <a:pPr algn="ctr"/>
-            <a:r>
-              <a:rPr sz="1600" b="1" i="0">
-                <a:solidFill>
-                  <a:srgbClr val="1E2761"/>
-                </a:solidFill>
-                <a:latin typeface="Calibri"/>
-              </a:rPr>
-              <a:t>47 FPS</a:t>
-            </a:r>
-          </a:p>
-        </p:txBody>
-      </p:sp>
-      <p:sp>
-        <p:nvSpPr>
-          <p:cNvPr id="116" name="BC foot"/>
+          </a:p>
+        </p:txBody>
+      </p:sp>
+      <p:sp>
+        <p:nvSpPr>
+          <p:cNvPr id="120" name="P4 sitet"/>
           <p:cNvSpPr txBox="1"/>
           <p:nvPr/>
         </p:nvSpPr>
         <p:spPr>
           <a:xfrm>
-            <a:off x="9601200" y="8887968"/>
-            <a:ext cx="7680960" cy="566928"/>
+            <a:off x="9601200" y="6931152"/>
+            <a:ext cx="7680960" cy="411480"/>
           </a:xfrm>
           <a:prstGeom prst="rect">
             <a:avLst/>
@@ -9878,18 +8807,150 @@
           <a:noFill/>
         </p:spPr>
         <p:txBody>
-          <a:bodyPr wrap="square" anchor="ctr" lIns="27432" rIns="27432" tIns="9144" bIns="9144"/>
+          <a:bodyPr wrap="square" anchor="ctr" lIns="45720" rIns="45720" tIns="18288" bIns="18288"/>
           <a:lstStyle/>
           <a:p>
             <a:pPr algn="l"/>
             <a:r>
+              <a:rPr sz="1600" b="1" i="0">
+                <a:solidFill>
+                  <a:srgbClr val="1E2761"/>
+                </a:solidFill>
+                <a:latin typeface="Calibri"/>
+              </a:rPr>
+              <a:t>Runs on site, not in the cloud</a:t>
+            </a:r>
+          </a:p>
+        </p:txBody>
+      </p:sp>
+      <p:sp>
+        <p:nvSpPr>
+          <p:cNvPr id="121" name="P4 siterow"/>
+          <p:cNvSpPr txBox="1"/>
+          <p:nvPr/>
+        </p:nvSpPr>
+        <p:spPr>
+          <a:xfrm>
+            <a:off x="9601200" y="7424927"/>
+            <a:ext cx="7680960" cy="548640"/>
+          </a:xfrm>
+          <a:prstGeom prst="rect">
+            <a:avLst/>
+          </a:prstGeom>
+          <a:noFill/>
+        </p:spPr>
+        <p:txBody>
+          <a:bodyPr wrap="square" anchor="ctr" lIns="45720" rIns="45720" tIns="18288" bIns="18288"/>
+          <a:lstStyle/>
+          <a:p>
+            <a:pPr algn="l"/>
+            <a:r>
+              <a:rPr sz="1350" b="0" i="0">
+                <a:solidFill>
+                  <a:srgbClr val="111111"/>
+                </a:solidFill>
+                <a:latin typeface="Calibri"/>
+              </a:rPr>
+              <a:t>Edge box per 1 to 4 cameras (Jetson class)</a:t>
+            </a:r>
+          </a:p>
+        </p:txBody>
+      </p:sp>
+      <p:sp>
+        <p:nvSpPr>
+          <p:cNvPr id="122" name="P4 siterow"/>
+          <p:cNvSpPr txBox="1"/>
+          <p:nvPr/>
+        </p:nvSpPr>
+        <p:spPr>
+          <a:xfrm>
+            <a:off x="9601200" y="7991855"/>
+            <a:ext cx="7680960" cy="548640"/>
+          </a:xfrm>
+          <a:prstGeom prst="rect">
+            <a:avLst/>
+          </a:prstGeom>
+          <a:noFill/>
+        </p:spPr>
+        <p:txBody>
+          <a:bodyPr wrap="square" anchor="ctr" lIns="45720" rIns="45720" tIns="18288" bIns="18288"/>
+          <a:lstStyle/>
+          <a:p>
+            <a:pPr algn="l"/>
+            <a:r>
+              <a:rPr sz="1350" b="0" i="0">
+                <a:solidFill>
+                  <a:srgbClr val="111111"/>
+                </a:solidFill>
+                <a:latin typeface="Calibri"/>
+              </a:rPr>
+              <a:t>Venue server fuses every feed into one map</a:t>
+            </a:r>
+          </a:p>
+        </p:txBody>
+      </p:sp>
+      <p:sp>
+        <p:nvSpPr>
+          <p:cNvPr id="123" name="P4 siterow"/>
+          <p:cNvSpPr txBox="1"/>
+          <p:nvPr/>
+        </p:nvSpPr>
+        <p:spPr>
+          <a:xfrm>
+            <a:off x="9601200" y="8558784"/>
+            <a:ext cx="7680960" cy="548640"/>
+          </a:xfrm>
+          <a:prstGeom prst="rect">
+            <a:avLst/>
+          </a:prstGeom>
+          <a:noFill/>
+        </p:spPr>
+        <p:txBody>
+          <a:bodyPr wrap="square" anchor="ctr" lIns="45720" rIns="45720" tIns="18288" bIns="18288"/>
+          <a:lstStyle/>
+          <a:p>
+            <a:pPr algn="l"/>
+            <a:r>
+              <a:rPr sz="1350" b="0" i="0">
+                <a:solidFill>
+                  <a:srgbClr val="111111"/>
+                </a:solidFill>
+                <a:latin typeface="Calibri"/>
+              </a:rPr>
+              <a:t>Guard handsets get the alert, human confirms</a:t>
+            </a:r>
+          </a:p>
+        </p:txBody>
+      </p:sp>
+      <p:sp>
+        <p:nvSpPr>
+          <p:cNvPr id="124" name="P4 sitef"/>
+          <p:cNvSpPr txBox="1"/>
+          <p:nvPr/>
+        </p:nvSpPr>
+        <p:spPr>
+          <a:xfrm>
+            <a:off x="9601200" y="9125712"/>
+            <a:ext cx="7680960" cy="365760"/>
+          </a:xfrm>
+          <a:prstGeom prst="rect">
+            <a:avLst/>
+          </a:prstGeom>
+          <a:noFill/>
+        </p:spPr>
+        <p:txBody>
+          <a:bodyPr wrap="square" anchor="ctr" lIns="45720" rIns="45720" tIns="18288" bIns="18288"/>
+          <a:lstStyle/>
+          <a:p>
+            <a:pPr algn="l"/>
+            <a:r>
               <a:rPr sz="1050" b="0" i="0">
                 <a:solidFill>
                   <a:srgbClr val="5A5A5A"/>
                 </a:solidFill>
                 <a:latin typeface="Calibri"/>
               </a:rPr>
-              <a:t>Same laptop, 500 frames per clip — model and tracker time only.</a:t>
+              <a:t>Deployment scale numbers only, no laptop tests.</a:t>
             </a:r>
           </a:p>
         </p:txBody>
@@ -10131,9 +9192,7 @@
           </a:effectLst>
         </p:spPr>
         <p:txBody>
-          <a:bodyPr wrap="square" lIns="320040" tIns="91440" rIns="320040" bIns="91440" anchor="ctr" rtlCol="0">
-            <a:noAutofit/>
-          </a:bodyPr>
+          <a:bodyPr wrap="square" lIns="45720" tIns="18288" rIns="45720" bIns="18288" anchor="ctr" rtlCol="0"/>
           <a:lstStyle/>
           <a:p>
             <a:pPr algn="l">
@@ -10145,34 +9204,25 @@
               </a:spcAft>
             </a:pPr>
             <a:r>
-              <a:rPr lang="en-US" sz="2000" b="1" i="0" dirty="0">
-                <a:solidFill>
-                  <a:srgbClr val="D9A441"/>
-                </a:solidFill>
-                <a:latin typeface="Calibri"/>
-                <a:cs typeface="Calibri"/>
+              <a:rPr sz="1800" b="1" i="0">
+                <a:solidFill>
+                  <a:srgbClr val="E5B822"/>
+                </a:solidFill>
+                <a:latin typeface="Calibri"/>
               </a:rPr>
               <a:t>After</a:t>
             </a:r>
           </a:p>
           <a:p>
-            <a:pPr algn="l">
-              <a:spcBef>
-                <a:spcPts val="0"/>
-              </a:spcBef>
-              <a:spcAft>
-                <a:spcPts val="0"/>
-              </a:spcAft>
-            </a:pPr>
-            <a:r>
-              <a:rPr lang="en-US" sz="2100" b="1" i="0" dirty="0">
+            <a:pPr algn="l"/>
+            <a:r>
+              <a:rPr sz="1600" b="1" i="0">
                 <a:solidFill>
                   <a:srgbClr val="FFFFFF"/>
                 </a:solidFill>
                 <a:latin typeface="Calibri"/>
-                <a:cs typeface="Calibri"/>
-              </a:rPr>
-              <a:t>One screen ranks zones and traces jams to their origin: security moves from reactive to proactive.</a:t>
+              </a:rPr>
+              <a:t>Pressure rising at Gate B opens overflow at Gate A upstream. Security acts before the jam, not after.</a:t>
             </a:r>
           </a:p>
         </p:txBody>
@@ -10437,12 +9487,10 @@
           </a:ln>
         </p:spPr>
         <p:txBody>
-          <a:bodyPr wrap="square" lIns="0" tIns="0" rIns="0" bIns="0" anchor="ctr" rtlCol="0">
-            <a:noAutofit/>
-          </a:bodyPr>
-          <a:lstStyle/>
-          <a:p>
-            <a:pPr algn="r">
+          <a:bodyPr wrap="square" lIns="45720" tIns="18288" rIns="45720" bIns="18288" anchor="ctr" rtlCol="0"/>
+          <a:lstStyle/>
+          <a:p>
+            <a:pPr algn="l">
               <a:spcBef>
                 <a:spcPts val="0"/>
               </a:spcBef>
@@ -10451,12 +9499,11 @@
               </a:spcAft>
             </a:pPr>
             <a:r>
-              <a:rPr lang="en-US" sz="1400" b="0" i="0" dirty="0">
+              <a:rPr sz="1200">
                 <a:solidFill>
                   <a:srgbClr val="5A5A5A"/>
                 </a:solidFill>
                 <a:latin typeface="Calibri"/>
-                <a:cs typeface="Calibri"/>
               </a:rPr>
               <a:t>Team Raksha  |  Team Leader: Shounak Joshi</a:t>
             </a:r>
@@ -10486,13 +9533,13 @@
           <a:lstStyle/>
           <a:p>
             <a:r>
-              <a:rPr sz="2400" b="1">
+              <a:rPr sz="2000" b="1">
                 <a:solidFill>
                   <a:srgbClr val="1E2761"/>
                 </a:solidFill>
                 <a:latin typeface="Calibri"/>
               </a:rPr>
-              <a:t>When the alarm goes up</a:t>
+              <a:t>When pressure rises</a:t>
             </a:r>
           </a:p>
         </p:txBody>
@@ -10557,13 +9604,12 @@
           <a:noFill/>
         </p:spPr>
         <p:txBody>
-          <a:bodyPr wrap="square">
-            <a:spAutoFit/>
-          </a:bodyPr>
-          <a:lstStyle/>
-          <a:p>
-            <a:r>
-              <a:rPr sz="2200" b="1">
+          <a:bodyPr wrap="square" anchor="ctr" lIns="45720" rIns="45720" tIns="18288" bIns="18288"/>
+          <a:lstStyle/>
+          <a:p>
+            <a:pPr algn="l"/>
+            <a:r>
+              <a:rPr sz="2000" b="1" i="0">
                 <a:solidFill>
                   <a:srgbClr val="FFFFFF"/>
                 </a:solidFill>
@@ -10573,19 +9619,15 @@
             </a:r>
           </a:p>
           <a:p>
-            <a:pPr>
-              <a:spcBef>
-                <a:spcPts val="400"/>
-              </a:spcBef>
-            </a:pPr>
-            <a:r>
-              <a:rPr sz="1800">
+            <a:pPr algn="l"/>
+            <a:r>
+              <a:rPr sz="1500" b="0" i="0">
                 <a:solidFill>
                   <a:srgbClr val="FFFFFF"/>
                 </a:solidFill>
                 <a:latin typeface="Calibri"/>
               </a:rPr>
-              <a:t>Guards keep eyes on the zone. Crowd flow is slowed.</a:t>
+              <a:t>Guards watch the zone closely. Overflow gates get ready.</a:t>
             </a:r>
           </a:p>
         </p:txBody>
@@ -10650,13 +9692,12 @@
           <a:noFill/>
         </p:spPr>
         <p:txBody>
-          <a:bodyPr wrap="square">
-            <a:spAutoFit/>
-          </a:bodyPr>
-          <a:lstStyle/>
-          <a:p>
-            <a:r>
-              <a:rPr sz="2200" b="1">
+          <a:bodyPr wrap="square" anchor="ctr" lIns="45720" rIns="45720" tIns="18288" bIns="18288"/>
+          <a:lstStyle/>
+          <a:p>
+            <a:pPr algn="l"/>
+            <a:r>
+              <a:rPr sz="2000" b="1" i="0">
                 <a:solidFill>
                   <a:srgbClr val="FFFFFF"/>
                 </a:solidFill>
@@ -10666,13 +9707,9 @@
             </a:r>
           </a:p>
           <a:p>
-            <a:pPr>
-              <a:spcBef>
-                <a:spcPts val="400"/>
-              </a:spcBef>
-            </a:pPr>
-            <a:r>
-              <a:rPr sz="1800">
+            <a:pPr algn="l"/>
+            <a:r>
+              <a:rPr sz="1500" b="0" i="0">
                 <a:solidFill>
                   <a:srgbClr val="FFFFFF"/>
                 </a:solidFill>
@@ -10743,13 +9780,12 @@
           <a:noFill/>
         </p:spPr>
         <p:txBody>
-          <a:bodyPr wrap="square">
-            <a:spAutoFit/>
-          </a:bodyPr>
-          <a:lstStyle/>
-          <a:p>
-            <a:r>
-              <a:rPr sz="2200" b="1">
+          <a:bodyPr wrap="square" anchor="ctr" lIns="45720" rIns="45720" tIns="18288" bIns="18288"/>
+          <a:lstStyle/>
+          <a:p>
+            <a:pPr algn="l"/>
+            <a:r>
+              <a:rPr sz="2000" b="1" i="0">
                 <a:solidFill>
                   <a:srgbClr val="FFFFFF"/>
                 </a:solidFill>
@@ -10759,13 +9795,9 @@
             </a:r>
           </a:p>
           <a:p>
-            <a:pPr>
-              <a:spcBef>
-                <a:spcPts val="400"/>
-              </a:spcBef>
-            </a:pPr>
-            <a:r>
-              <a:rPr sz="1800">
+            <a:pPr algn="l"/>
+            <a:r>
+              <a:rPr sz="1500" b="0" i="0">
                 <a:solidFill>
                   <a:srgbClr val="FFFFFF"/>
                 </a:solidFill>
@@ -10836,35 +9868,18 @@
           <a:noFill/>
         </p:spPr>
         <p:txBody>
-          <a:bodyPr wrap="square">
-            <a:spAutoFit/>
-          </a:bodyPr>
-          <a:lstStyle/>
-          <a:p>
-            <a:r>
-              <a:rPr sz="1700" b="1">
+          <a:bodyPr wrap="square" anchor="ctr" lIns="45720" rIns="45720" tIns="18288" bIns="18288"/>
+          <a:lstStyle/>
+          <a:p>
+            <a:pPr algn="l"/>
+            <a:r>
+              <a:rPr sz="1500" b="1" i="0">
                 <a:solidFill>
                   <a:srgbClr val="1E2761"/>
                 </a:solidFill>
                 <a:latin typeface="Calibri"/>
               </a:rPr>
-              <a:t>Pilot targets: tens of seconds forecast before critical, guard warned under 1 second, every step logged.</a:t>
-            </a:r>
-          </a:p>
-          <a:p>
-            <a:pPr>
-              <a:spcBef>
-                <a:spcPts val="400"/>
-              </a:spcBef>
-            </a:pPr>
-            <a:r>
-              <a:rPr sz="1700">
-                <a:solidFill>
-                  <a:srgbClr val="1E2761"/>
-                </a:solidFill>
-                <a:latin typeface="Calibri"/>
-              </a:rPr>
-              <a:t/>
+              <a:t>Pilot targets: warn before critical, page guards in seconds, log every step.</a:t>
             </a:r>
           </a:p>
         </p:txBody>
@@ -11025,9 +10040,7 @@
           </a:ln>
         </p:spPr>
         <p:txBody>
-          <a:bodyPr wrap="square" lIns="0" tIns="0" rIns="0" bIns="0" anchor="ctr" rtlCol="0">
-            <a:noAutofit/>
-          </a:bodyPr>
+          <a:bodyPr wrap="square" lIns="45720" tIns="18288" rIns="45720" bIns="18288" anchor="ctr" rtlCol="0"/>
           <a:lstStyle/>
           <a:p>
             <a:pPr algn="l">
@@ -11039,12 +10052,11 @@
               </a:spcAft>
             </a:pPr>
             <a:r>
-              <a:rPr lang="en-US" sz="2400" b="1" i="0" dirty="0">
+              <a:rPr sz="2000" b="1" i="0">
                 <a:solidFill>
                   <a:srgbClr val="1E2761"/>
                 </a:solidFill>
                 <a:latin typeface="Calibri"/>
-                <a:cs typeface="Calibri"/>
               </a:rPr>
               <a:t>The science behind it</a:t>
             </a:r>
@@ -11082,9 +10094,7 @@
           </a:effectLst>
         </p:spPr>
         <p:txBody>
-          <a:bodyPr wrap="square" lIns="320040" tIns="109728" rIns="320040" bIns="109728" anchor="ctr" rtlCol="0">
-            <a:noAutofit/>
-          </a:bodyPr>
+          <a:bodyPr wrap="square" lIns="45720" tIns="18288" rIns="45720" bIns="18288" anchor="ctr" rtlCol="0"/>
           <a:lstStyle/>
           <a:p>
             <a:pPr algn="l">
@@ -11096,85 +10106,58 @@
               </a:spcAft>
             </a:pPr>
             <a:r>
-              <a:rPr lang="en-US" sz="2200" b="1" i="0" dirty="0">
+              <a:rPr sz="1800" b="1" i="0">
                 <a:solidFill>
                   <a:srgbClr val="1E2761"/>
                 </a:solidFill>
                 <a:latin typeface="Calibri"/>
-                <a:cs typeface="Calibri"/>
-              </a:rPr>
-              <a:t>Finding and following people</a:t>
-            </a:r>
-          </a:p>
-          <a:p>
-            <a:pPr algn="l">
-              <a:lnSpc>
-                <a:spcPct val="100000"/>
-              </a:lnSpc>
-              <a:spcBef>
-                <a:spcPts val="0"/>
-              </a:spcBef>
-              <a:spcAft>
-                <a:spcPts val="0"/>
-              </a:spcAft>
-            </a:pPr>
-            <a:r>
-              <a:rPr lang="en-US" sz="1700" b="0" i="0" dirty="0">
+              </a:rPr>
+              <a:t>Count the overlap</a:t>
+            </a:r>
+          </a:p>
+          <a:p>
+            <a:pPr algn="l"/>
+            <a:r>
+              <a:rPr sz="1300" b="0" i="0">
                 <a:solidFill>
                   <a:srgbClr val="111111"/>
                 </a:solidFill>
                 <a:latin typeface="Calibri"/>
-                <a:cs typeface="Calibri"/>
-              </a:rPr>
-              <a:t>Finds every person and follows each one. Uses YOLOv8 and ByteTrack, the standard real-time pairing for crowd tracking.</a:t>
-            </a:r>
-          </a:p>
-          <a:p>
-            <a:pPr>
-              <a:spcBef>
-                <a:spcPts val="400"/>
-              </a:spcBef>
-              <a:spcAft>
-                <a:spcPts val="0"/>
-              </a:spcAft>
-            </a:pPr>
-            <a:r>
-              <a:rPr sz="1400">
+              </a:rPr>
+              <a:t>CSRNet (CVPR 2018), Bayesian Loss (ICCV 2019), DM-Count (NeurIPS 2020).</a:t>
+            </a:r>
+          </a:p>
+          <a:p>
+            <a:pPr algn="l"/>
+            <a:r>
+              <a:rPr sz="1100" b="0" i="0">
                 <a:solidFill>
                   <a:srgbClr val="5A5A5A"/>
                 </a:solidFill>
                 <a:latin typeface="Calibri"/>
-              </a:rPr>
-              <a:t>Code: </a:t>
-            </a:r>
-            <a:r>
-              <a:rPr sz="1400" b="1" u="sng">
-                <a:solidFill>
-                  <a:srgbClr val="1E2761"/>
-                </a:solidFill>
-                <a:latin typeface="Calibri"/>
-                <a:hlinkClick r:id="rId4"/>
-              </a:rPr>
-              <a:t>github.com/ultralytics/ultralytics</a:t>
-            </a:r>
-            <a:r>
-              <a:rPr sz="1400">
+                <a:hlinkClick r:id="rId9"/>
+              </a:rPr>
+              <a:t>arXiv:1802.10062  </a:t>
+            </a:r>
+            <a:r>
+              <a:rPr sz="1100" b="0" i="0">
                 <a:solidFill>
                   <a:srgbClr val="5A5A5A"/>
                 </a:solidFill>
                 <a:latin typeface="Calibri"/>
-              </a:rPr>
-              <a:t>, </a:t>
-            </a:r>
-            <a:r>
-              <a:rPr sz="1400" b="1" u="sng">
-                <a:solidFill>
-                  <a:srgbClr val="1E2761"/>
-                </a:solidFill>
-                <a:latin typeface="Calibri"/>
-                <a:hlinkClick r:id="rId5"/>
-              </a:rPr>
-              <a:t>github.com/ifzhang/ByteTrack</a:t>
+                <a:hlinkClick r:id="rId10"/>
+              </a:rPr>
+              <a:t>arXiv:1908.03684  </a:t>
+            </a:r>
+            <a:r>
+              <a:rPr sz="1100" b="0" i="0">
+                <a:solidFill>
+                  <a:srgbClr val="5A5A5A"/>
+                </a:solidFill>
+                <a:latin typeface="Calibri"/>
+                <a:hlinkClick r:id="rId11"/>
+              </a:rPr>
+              <a:t>DM-Count</a:t>
             </a:r>
           </a:p>
         </p:txBody>
@@ -11210,9 +10193,7 @@
           </a:effectLst>
         </p:spPr>
         <p:txBody>
-          <a:bodyPr wrap="square" lIns="320040" tIns="109728" rIns="320040" bIns="109728" anchor="ctr" rtlCol="0">
-            <a:noAutofit/>
-          </a:bodyPr>
+          <a:bodyPr wrap="square" lIns="45720" tIns="18288" rIns="45720" bIns="18288" anchor="ctr" rtlCol="0"/>
           <a:lstStyle/>
           <a:p>
             <a:pPr algn="l">
@@ -11224,85 +10205,48 @@
               </a:spcAft>
             </a:pPr>
             <a:r>
-              <a:rPr lang="en-US" sz="2200" b="1" i="0" dirty="0">
+              <a:rPr sz="1800" b="1" i="0">
                 <a:solidFill>
                   <a:srgbClr val="1E2761"/>
                 </a:solidFill>
                 <a:latin typeface="Calibri"/>
-                <a:cs typeface="Calibri"/>
-              </a:rPr>
-              <a:t>Phase 2: face search</a:t>
-            </a:r>
-          </a:p>
-          <a:p>
-            <a:pPr algn="l">
-              <a:lnSpc>
-                <a:spcPct val="100000"/>
-              </a:lnSpc>
-              <a:spcBef>
-                <a:spcPts val="0"/>
-              </a:spcBef>
-              <a:spcAft>
-                <a:spcPts val="0"/>
-              </a:spcAft>
-            </a:pPr>
-            <a:r>
-              <a:rPr lang="en-US" sz="1700" b="0" i="0" dirty="0">
+              </a:rPr>
+              <a:t>Map pixels to ground</a:t>
+            </a:r>
+          </a:p>
+          <a:p>
+            <a:pPr algn="l"/>
+            <a:r>
+              <a:rPr sz="1300" b="0" i="0">
                 <a:solidFill>
                   <a:srgbClr val="111111"/>
                 </a:solidFill>
                 <a:latin typeface="Calibri"/>
-                <a:cs typeface="Calibri"/>
-              </a:rPr>
-              <a:t>Not in the MVP. The pipeline is modular, so agencies can plug in their own face-search API later for post-incident cases (opt-in, B2G).</a:t>
-            </a:r>
-          </a:p>
-          <a:p>
-            <a:pPr>
-              <a:spcBef>
-                <a:spcPts val="400"/>
-              </a:spcBef>
-              <a:spcAft>
-                <a:spcPts val="0"/>
-              </a:spcAft>
-            </a:pPr>
-            <a:r>
-              <a:rPr sz="1400">
+              </a:rPr>
+              <a:t>Chan perspective maps (CVPR 2008), Zhang ground-plane fusion (CVPR 2019).</a:t>
+            </a:r>
+          </a:p>
+          <a:p>
+            <a:pPr algn="l"/>
+            <a:r>
+              <a:rPr sz="1100" b="0" i="0">
                 <a:solidFill>
                   <a:srgbClr val="5A5A5A"/>
                 </a:solidFill>
                 <a:latin typeface="Calibri"/>
-              </a:rPr>
-              <a:t>Code: </a:t>
-            </a:r>
-            <a:r>
-              <a:rPr sz="1400" b="1" u="sng">
-                <a:solidFill>
-                  <a:srgbClr val="1E2761"/>
-                </a:solidFill>
-                <a:latin typeface="Calibri"/>
-                <a:hlinkClick r:id="rId6"/>
-              </a:rPr>
-              <a:t>github.com/deepinsight/insightface</a:t>
-            </a:r>
-            <a:r>
-              <a:rPr sz="1400">
+                <a:hlinkClick r:id="rId12"/>
+              </a:rPr>
+              <a:t>people counting paper  </a:t>
+            </a:r>
+            <a:r>
+              <a:rPr sz="1100" b="0" i="0">
                 <a:solidFill>
                   <a:srgbClr val="5A5A5A"/>
                 </a:solidFill>
                 <a:latin typeface="Calibri"/>
-              </a:rPr>
-              <a:t>, </a:t>
-            </a:r>
-            <a:r>
-              <a:rPr sz="1400" b="1" u="sng">
-                <a:solidFill>
-                  <a:srgbClr val="1E2761"/>
-                </a:solidFill>
-                <a:latin typeface="Calibri"/>
-                <a:hlinkClick r:id="rId7"/>
-              </a:rPr>
-              <a:t>github.com/facebookresearch/faiss</a:t>
+                <a:hlinkClick r:id="rId13"/>
+              </a:rPr>
+              <a:t>ground-plane paper</a:t>
             </a:r>
           </a:p>
         </p:txBody>
@@ -11338,9 +10282,7 @@
           </a:effectLst>
         </p:spPr>
         <p:txBody>
-          <a:bodyPr wrap="square" lIns="320040" tIns="109728" rIns="320040" bIns="109728" anchor="ctr" rtlCol="0">
-            <a:noAutofit/>
-          </a:bodyPr>
+          <a:bodyPr wrap="square" lIns="45720" tIns="18288" rIns="45720" bIns="18288" anchor="ctr" rtlCol="0"/>
           <a:lstStyle/>
           <a:p>
             <a:pPr algn="l">
@@ -11352,56 +10294,48 @@
               </a:spcAft>
             </a:pPr>
             <a:r>
-              <a:rPr lang="en-US" sz="2200" b="1" i="0" dirty="0">
+              <a:rPr sz="1800" b="1" i="0">
                 <a:solidFill>
                   <a:srgbClr val="1E2761"/>
                 </a:solidFill>
                 <a:latin typeface="Calibri"/>
-                <a:cs typeface="Calibri"/>
-              </a:rPr>
-              <a:t>Predicting crushes</a:t>
-            </a:r>
-          </a:p>
-          <a:p>
-            <a:pPr algn="l">
-              <a:lnSpc>
-                <a:spcPct val="100000"/>
-              </a:lnSpc>
-              <a:spcBef>
-                <a:spcPts val="0"/>
-              </a:spcBef>
-              <a:spcAft>
-                <a:spcPts val="0"/>
-              </a:spcAft>
-            </a:pPr>
-            <a:r>
-              <a:rPr lang="en-US" sz="1700" b="0" i="0" dirty="0">
+              </a:rPr>
+              <a:t>Read the currents</a:t>
+            </a:r>
+          </a:p>
+          <a:p>
+            <a:pPr algn="l"/>
+            <a:r>
+              <a:rPr sz="1300" b="0" i="0">
                 <a:solidFill>
                   <a:srgbClr val="111111"/>
                 </a:solidFill>
                 <a:latin typeface="Calibri"/>
-                <a:cs typeface="Calibri"/>
-              </a:rPr>
-              <a:t>The AURORA warning model plus our live optical-flow stall meter spot danger early. A Delhi trial cut response time by 37 percent.</a:t>
-            </a:r>
-          </a:p>
-          <a:p>
-            <a:pPr>
-              <a:spcBef>
-                <a:spcPts val="400"/>
-              </a:spcBef>
-              <a:spcAft>
-                <a:spcPts val="0"/>
-              </a:spcAft>
-            </a:pPr>
-            <a:r>
-              <a:rPr sz="1400">
+              </a:rPr>
+              <a:t>Mehran social force (CVPR 2009), streaklines (ECCV 2010).</a:t>
+            </a:r>
+          </a:p>
+          <a:p>
+            <a:pPr algn="l"/>
+            <a:r>
+              <a:rPr sz="1100" b="0" i="0">
                 <a:solidFill>
                   <a:srgbClr val="5A5A5A"/>
                 </a:solidFill>
                 <a:latin typeface="Calibri"/>
-              </a:rPr>
-              <a:t>Ideas: AURORA warning model, optical-flow stall metrics, STAR-Crowd Delhi trial</a:t>
+                <a:hlinkClick r:id="rId14"/>
+              </a:rPr>
+              <a:t>CVPR 2009 pdf  </a:t>
+            </a:r>
+            <a:r>
+              <a:rPr sz="1100" b="0" i="0">
+                <a:solidFill>
+                  <a:srgbClr val="5A5A5A"/>
+                </a:solidFill>
+                <a:latin typeface="Calibri"/>
+                <a:hlinkClick r:id="rId15"/>
+              </a:rPr>
+              <a:t>streakline project</a:t>
             </a:r>
           </a:p>
         </p:txBody>
@@ -11437,9 +10371,7 @@
           </a:effectLst>
         </p:spPr>
         <p:txBody>
-          <a:bodyPr wrap="square" lIns="320040" tIns="109728" rIns="320040" bIns="109728" anchor="ctr" rtlCol="0">
-            <a:noAutofit/>
-          </a:bodyPr>
+          <a:bodyPr wrap="square" lIns="45720" tIns="18288" rIns="45720" bIns="18288" anchor="ctr" rtlCol="0"/>
           <a:lstStyle/>
           <a:p>
             <a:pPr algn="l">
@@ -11451,75 +10383,58 @@
               </a:spcAft>
             </a:pPr>
             <a:r>
-              <a:rPr lang="en-US" sz="2200" b="1" i="0" dirty="0">
+              <a:rPr sz="1800" b="1" i="0">
                 <a:solidFill>
                   <a:srgbClr val="1E2761"/>
                 </a:solidFill>
                 <a:latin typeface="Calibri"/>
-                <a:cs typeface="Calibri"/>
-              </a:rPr>
-              <a:t>Why India needs it</a:t>
-            </a:r>
-          </a:p>
-          <a:p>
-            <a:pPr algn="l">
-              <a:lnSpc>
-                <a:spcPct val="100000"/>
-              </a:lnSpc>
-              <a:spcBef>
-                <a:spcPts val="0"/>
-              </a:spcBef>
-              <a:spcAft>
-                <a:spcPts val="0"/>
-              </a:spcAft>
-            </a:pPr>
-            <a:r>
-              <a:rPr lang="en-US" sz="1700" b="0" i="0" dirty="0">
+              </a:rPr>
+              <a:t>Warn on pressure</a:t>
+            </a:r>
+          </a:p>
+          <a:p>
+            <a:pPr algn="l"/>
+            <a:r>
+              <a:rPr sz="1300" b="0" i="0">
                 <a:solidFill>
                   <a:srgbClr val="111111"/>
                 </a:solidFill>
                 <a:latin typeface="Calibri"/>
-                <a:cs typeface="Calibri"/>
-              </a:rPr>
-              <a:t>Packed crowds and blocked exits turned deadly at Hathras, Kumbh and railway stations.</a:t>
-            </a:r>
-          </a:p>
-          <a:p>
-            <a:pPr>
-              <a:spcBef>
-                <a:spcPts val="400"/>
-              </a:spcBef>
-              <a:spcAft>
-                <a:spcPts val="0"/>
-              </a:spcAft>
-            </a:pPr>
-            <a:r>
-              <a:rPr sz="1400">
+              </a:rPr>
+              <a:t>Helbing social force (1995), crowd disasters (2007), Johansson pressure (2008).</a:t>
+            </a:r>
+          </a:p>
+          <a:p>
+            <a:pPr algn="l"/>
+            <a:r>
+              <a:rPr sz="1100" b="0" i="0">
                 <a:solidFill>
                   <a:srgbClr val="5A5A5A"/>
                 </a:solidFill>
                 <a:latin typeface="Calibri"/>
-              </a:rPr>
-              <a:t>Test video: </a:t>
-            </a:r>
-            <a:r>
-              <a:rPr sz="1400" b="1" u="sng">
-                <a:solidFill>
-                  <a:srgbClr val="1E2761"/>
-                </a:solidFill>
-                <a:latin typeface="Calibri"/>
-                <a:hlinkClick r:id="rId8"/>
-              </a:rPr>
-              <a:t>Wikimedia Commons</a:t>
-            </a:r>
-            <a:r>
-              <a:rPr sz="1400">
+                <a:hlinkClick r:id="rId16"/>
+              </a:rPr>
+              <a:t>DOI:10.1103/PhysRevE.51.4282  </a:t>
+            </a:r>
+            <a:r>
+              <a:rPr sz="1100" b="0" i="0">
                 <a:solidFill>
                   <a:srgbClr val="5A5A5A"/>
                 </a:solidFill>
                 <a:latin typeface="Calibri"/>
-              </a:rPr>
-              <a:t> public footage (station, crossing, temple)</a:t>
+                <a:hlinkClick r:id="rId17"/>
+              </a:rPr>
+              <a:t>arXiv:0708.3339  </a:t>
+            </a:r>
+            <a:r>
+              <a:rPr sz="1100" b="0" i="0">
+                <a:solidFill>
+                  <a:srgbClr val="5A5A5A"/>
+                </a:solidFill>
+                <a:latin typeface="Calibri"/>
+                <a:hlinkClick r:id="rId18"/>
+              </a:rPr>
+              <a:t>pressure analysis</a:t>
             </a:r>
           </a:p>
         </p:txBody>
@@ -11544,9 +10459,7 @@
           </a:ln>
         </p:spPr>
         <p:txBody>
-          <a:bodyPr wrap="square" lIns="0" tIns="0" rIns="0" bIns="0" anchor="ctr" rtlCol="0">
-            <a:noAutofit/>
-          </a:bodyPr>
+          <a:bodyPr wrap="square" lIns="45720" tIns="18288" rIns="45720" bIns="18288" anchor="ctr" rtlCol="0"/>
           <a:lstStyle/>
           <a:p>
             <a:pPr algn="l">
@@ -11558,14 +10471,13 @@
               </a:spcAft>
             </a:pPr>
             <a:r>
-              <a:rPr lang="en-US" sz="2400" b="1" i="0" dirty="0">
+              <a:rPr sz="2000" b="1" i="0">
                 <a:solidFill>
                   <a:srgbClr val="1E2761"/>
                 </a:solidFill>
                 <a:latin typeface="Calibri"/>
-                <a:cs typeface="Calibri"/>
-              </a:rPr>
-              <a:t>Privacy built in</a:t>
+              </a:rPr>
+              <a:t>Disasters, limits, footage</a:t>
             </a:r>
           </a:p>
         </p:txBody>
@@ -11601,9 +10513,7 @@
           </a:effectLst>
         </p:spPr>
         <p:txBody>
-          <a:bodyPr wrap="square" lIns="320040" tIns="109728" rIns="320040" bIns="109728" anchor="ctr" rtlCol="0">
-            <a:noAutofit/>
-          </a:bodyPr>
+          <a:bodyPr wrap="square" lIns="45720" tIns="18288" rIns="45720" bIns="18288" anchor="ctr" rtlCol="0"/>
           <a:lstStyle/>
           <a:p>
             <a:pPr algn="l">
@@ -11615,37 +10525,25 @@
               </a:spcAft>
             </a:pPr>
             <a:r>
-              <a:rPr lang="en-US" sz="2300" b="1" i="0" dirty="0">
+              <a:rPr sz="1600" b="1" i="0">
                 <a:solidFill>
                   <a:srgbClr val="FFFFFF"/>
                 </a:solidFill>
                 <a:latin typeface="Calibri"/>
-                <a:cs typeface="Calibri"/>
-              </a:rPr>
-              <a:t>Anonymized by default</a:t>
-            </a:r>
-          </a:p>
-          <a:p>
-            <a:pPr algn="l">
-              <a:lnSpc>
-                <a:spcPct val="100000"/>
-              </a:lnSpc>
-              <a:spcBef>
-                <a:spcPts val="0"/>
-              </a:spcBef>
-              <a:spcAft>
-                <a:spcPts val="0"/>
-              </a:spcAft>
-            </a:pPr>
-            <a:r>
-              <a:rPr lang="en-US" sz="1900" b="0" i="0" dirty="0">
-                <a:solidFill>
-                  <a:srgbClr val="DDE3FA"/>
-                </a:solidFill>
-                <a:latin typeface="Calibri"/>
-                <a:cs typeface="Calibri"/>
-              </a:rPr>
-              <a:t>Saved video is face-blurred. Live alerts show zones and counts, not names.</a:t>
+              </a:rPr>
+              <a:t>Itaewon and Love Parade</a:t>
+            </a:r>
+          </a:p>
+          <a:p>
+            <a:pPr algn="l"/>
+            <a:r>
+              <a:rPr sz="1300" b="0" i="0">
+                <a:solidFill>
+                  <a:srgbClr val="FFFFFF"/>
+                </a:solidFill>
+                <a:latin typeface="Calibri"/>
+              </a:rPr>
+              <a:t>159 dead, Seoul 2022, ignored calls. 21 dead, Duisburg 2010. Turbulence, not panic.</a:t>
             </a:r>
           </a:p>
         </p:txBody>
@@ -11681,9 +10579,7 @@
           </a:effectLst>
         </p:spPr>
         <p:txBody>
-          <a:bodyPr wrap="square" lIns="320040" tIns="109728" rIns="320040" bIns="109728" anchor="ctr" rtlCol="0">
-            <a:noAutofit/>
-          </a:bodyPr>
+          <a:bodyPr wrap="square" lIns="45720" tIns="18288" rIns="45720" bIns="18288" anchor="ctr" rtlCol="0"/>
           <a:lstStyle/>
           <a:p>
             <a:pPr algn="l">
@@ -11695,37 +10591,25 @@
               </a:spcAft>
             </a:pPr>
             <a:r>
-              <a:rPr lang="en-US" sz="2300" b="1" i="0" dirty="0">
+              <a:rPr sz="1600" b="1" i="0">
                 <a:solidFill>
                   <a:srgbClr val="FFFFFF"/>
                 </a:solidFill>
                 <a:latin typeface="Calibri"/>
-                <a:cs typeface="Calibri"/>
-              </a:rPr>
-              <a:t>7-day routine wipe</a:t>
-            </a:r>
-          </a:p>
-          <a:p>
-            <a:pPr algn="l">
-              <a:lnSpc>
-                <a:spcPct val="100000"/>
-              </a:lnSpc>
-              <a:spcBef>
-                <a:spcPts val="0"/>
-              </a:spcBef>
-              <a:spcAft>
-                <a:spcPts val="0"/>
-              </a:spcAft>
-            </a:pPr>
-            <a:r>
-              <a:rPr lang="en-US" sz="1900" b="0" i="0" dirty="0">
-                <a:solidFill>
-                  <a:srgbClr val="DDE3FA"/>
-                </a:solidFill>
-                <a:latin typeface="Calibri"/>
-                <a:cs typeface="Calibri"/>
-              </a:rPr>
-              <a:t>Daily footage wipes after 7 days. Flagged incidents are exported first and kept for the police.</a:t>
+              </a:rPr>
+              <a:t>Kumbh and Hathras</a:t>
+            </a:r>
+          </a:p>
+          <a:p>
+            <a:pPr algn="l"/>
+            <a:r>
+              <a:rPr sz="1300" b="0" i="0">
+                <a:solidFill>
+                  <a:srgbClr val="FFFFFF"/>
+                </a:solidFill>
+                <a:latin typeface="Calibri"/>
+              </a:rPr>
+              <a:t>30 dead, Jan 2025, with AI live. 121 dead, Jul 2024, 80k permit vs 250k crowd.</a:t>
             </a:r>
           </a:p>
         </p:txBody>
@@ -11761,9 +10645,7 @@
           </a:effectLst>
         </p:spPr>
         <p:txBody>
-          <a:bodyPr wrap="square" lIns="320040" tIns="109728" rIns="320040" bIns="109728" anchor="ctr" rtlCol="0">
-            <a:noAutofit/>
-          </a:bodyPr>
+          <a:bodyPr wrap="square" lIns="45720" tIns="18288" rIns="45720" bIns="18288" anchor="ctr" rtlCol="0"/>
           <a:lstStyle/>
           <a:p>
             <a:pPr algn="l">
@@ -11775,37 +10657,25 @@
               </a:spcAft>
             </a:pPr>
             <a:r>
-              <a:rPr lang="en-US" sz="2300" b="1" i="0" dirty="0">
+              <a:rPr sz="1600" b="1" i="0">
                 <a:solidFill>
                   <a:srgbClr val="FFFFFF"/>
                 </a:solidFill>
                 <a:latin typeface="Calibri"/>
-                <a:cs typeface="Calibri"/>
-              </a:rPr>
-              <a:t>Tamper-evident log</a:t>
-            </a:r>
-          </a:p>
-          <a:p>
-            <a:pPr algn="l">
-              <a:lnSpc>
-                <a:spcPct val="100000"/>
-              </a:lnSpc>
-              <a:spcBef>
-                <a:spcPts val="0"/>
-              </a:spcBef>
-              <a:spcAft>
-                <a:spcPts val="0"/>
-              </a:spcAft>
-            </a:pPr>
-            <a:r>
-              <a:rPr lang="en-US" sz="1900" b="0" i="0" dirty="0">
-                <a:solidFill>
-                  <a:srgbClr val="DDE3FA"/>
-                </a:solidFill>
-                <a:latin typeface="Calibri"/>
-                <a:cs typeface="Calibri"/>
-              </a:rPr>
-              <a:t>Every action is hash-chained. Any edit leaves a trace.</a:t>
+              </a:rPr>
+              <a:t>Danger thresholds</a:t>
+            </a:r>
+          </a:p>
+          <a:p>
+            <a:pPr algn="l"/>
+            <a:r>
+              <a:rPr sz="1300" b="0" i="0">
+                <a:solidFill>
+                  <a:srgbClr val="FFFFFF"/>
+                </a:solidFill>
+                <a:latin typeface="Calibri"/>
+              </a:rPr>
+              <a:t>Fluid at 7 per m2. Serious above 4. Flow peaks at 2 to 3. (Fruin, Still)</a:t>
             </a:r>
           </a:p>
         </p:txBody>
@@ -11841,9 +10711,7 @@
           </a:effectLst>
         </p:spPr>
         <p:txBody>
-          <a:bodyPr wrap="square" lIns="320040" tIns="109728" rIns="320040" bIns="109728" anchor="ctr" rtlCol="0">
-            <a:noAutofit/>
-          </a:bodyPr>
+          <a:bodyPr wrap="square" lIns="45720" tIns="18288" rIns="45720" bIns="18288" anchor="ctr" rtlCol="0"/>
           <a:lstStyle/>
           <a:p>
             <a:pPr algn="l">
@@ -11855,37 +10723,38 @@
               </a:spcAft>
             </a:pPr>
             <a:r>
-              <a:rPr lang="en-US" sz="2300" b="1" i="0" dirty="0">
+              <a:rPr sz="1600" b="1" i="0">
                 <a:solidFill>
                   <a:srgbClr val="FFFFFF"/>
                 </a:solidFill>
                 <a:latin typeface="Calibri"/>
-                <a:cs typeface="Calibri"/>
-              </a:rPr>
-              <a:t>No ID in core</a:t>
-            </a:r>
-          </a:p>
-          <a:p>
-            <a:pPr algn="l">
-              <a:lnSpc>
-                <a:spcPct val="100000"/>
-              </a:lnSpc>
-              <a:spcBef>
-                <a:spcPts val="0"/>
-              </a:spcBef>
-              <a:spcAft>
-                <a:spcPts val="0"/>
-              </a:spcAft>
-            </a:pPr>
-            <a:r>
-              <a:rPr lang="en-US" sz="1900" b="0" i="0" dirty="0">
-                <a:solidFill>
-                  <a:srgbClr val="DDE3FA"/>
-                </a:solidFill>
-                <a:latin typeface="Calibri"/>
-                <a:cs typeface="Calibri"/>
-              </a:rPr>
-              <a:t>Crowd mode runs with zero identity. Face search stays opt-in Phase 2 only.</a:t>
+              </a:rPr>
+              <a:t>Test footage</a:t>
+            </a:r>
+          </a:p>
+          <a:p>
+            <a:pPr algn="l"/>
+            <a:r>
+              <a:rPr sz="1300" b="0" i="0">
+                <a:solidFill>
+                  <a:srgbClr val="FFFFFF"/>
+                </a:solidFill>
+                <a:latin typeface="Calibri"/>
+              </a:rPr>
+              <a:t>Public clips: station, crossing, temple.</a:t>
+            </a:r>
+          </a:p>
+          <a:p>
+            <a:pPr algn="l"/>
+            <a:r>
+              <a:rPr sz="1100" b="0" i="0">
+                <a:solidFill>
+                  <a:srgbClr val="5A5A5A"/>
+                </a:solidFill>
+                <a:latin typeface="Calibri"/>
+                <a:hlinkClick r:id="rId19"/>
+              </a:rPr>
+              <a:t>Wikimedia Commons</a:t>
             </a:r>
           </a:p>
         </p:txBody>

--- a/deck/Raksha_Hackathon2026_Simplified.pptx
+++ b/deck/Raksha_Hackathon2026_Simplified.pptx
@@ -5815,7 +5815,7 @@
         <p:spPr>
           <a:xfrm>
             <a:off x="10104120" y="3474720"/>
-            <a:ext cx="6949440" cy="868680"/>
+            <a:ext cx="3017520" cy="868680"/>
           </a:xfrm>
           <a:prstGeom prst="rect">
             <a:avLst/>
@@ -5903,7 +5903,7 @@
         <p:spPr>
           <a:xfrm>
             <a:off x="10104120" y="4572000"/>
-            <a:ext cx="6949440" cy="868680"/>
+            <a:ext cx="3017520" cy="868680"/>
           </a:xfrm>
           <a:prstGeom prst="rect">
             <a:avLst/>
@@ -5991,7 +5991,7 @@
         <p:spPr>
           <a:xfrm>
             <a:off x="10104120" y="5669280"/>
-            <a:ext cx="6949440" cy="868680"/>
+            <a:ext cx="3017520" cy="868680"/>
           </a:xfrm>
           <a:prstGeom prst="rect">
             <a:avLst/>
@@ -6155,6 +6155,66 @@
                 <a:latin typeface="Calibri"/>
               </a:rPr>
               <a:t>A stopped crowd is not a warning. It is the accident. Pressure passes body to body long before feet stop. That is why cameras must read force, not faces.</a:t>
+            </a:r>
+          </a:p>
+        </p:txBody>
+      </p:sp>
+      <p:pic>
+        <p:nvPicPr>
+          <p:cNvPr id="133" name="P2 kumbh" descr="kumbh_crowd.jpg"/>
+          <p:cNvPicPr>
+            <a:picLocks noChangeAspect="1"/>
+          </p:cNvPicPr>
+          <p:nvPr/>
+        </p:nvPicPr>
+        <p:blipFill>
+          <a:blip r:embed="rId3"/>
+          <a:stretch>
+            <a:fillRect/>
+          </a:stretch>
+        </p:blipFill>
+        <p:spPr>
+          <a:xfrm>
+            <a:off x="13441680" y="3566160"/>
+            <a:ext cx="3566160" cy="2002536"/>
+          </a:xfrm>
+          <a:prstGeom prst="rect">
+            <a:avLst/>
+          </a:prstGeom>
+          <a:ln>
+            <a:noFill/>
+          </a:ln>
+        </p:spPr>
+      </p:pic>
+      <p:sp>
+        <p:nvSpPr>
+          <p:cNvPr id="134" name="P2 kumbhc"/>
+          <p:cNvSpPr txBox="1"/>
+          <p:nvPr/>
+        </p:nvSpPr>
+        <p:spPr>
+          <a:xfrm>
+            <a:off x="13441680" y="5623560"/>
+            <a:ext cx="3566160" cy="822960"/>
+          </a:xfrm>
+          <a:prstGeom prst="rect">
+            <a:avLst/>
+          </a:prstGeom>
+          <a:noFill/>
+        </p:spPr>
+        <p:txBody>
+          <a:bodyPr wrap="square" anchor="ctr" lIns="45720" rIns="45720" tIns="18288" bIns="18288"/>
+          <a:lstStyle/>
+          <a:p>
+            <a:pPr algn="l"/>
+            <a:r>
+              <a:rPr sz="1100" b="0" i="0">
+                <a:solidFill>
+                  <a:srgbClr val="5A5A5A"/>
+                </a:solidFill>
+                <a:latin typeface="Calibri"/>
+              </a:rPr>
+              <a:t>Kumbh mela ground at night, Jan 2025. Photo: Wikimedia Commons.</a:t>
             </a:r>
           </a:p>
         </p:txBody>
@@ -6925,13 +6985,13 @@
           <a:p>
             <a:pPr algn="l"/>
             <a:r>
-              <a:rPr sz="1350" b="0" i="0">
+              <a:rPr sz="1300" b="0" i="0">
                 <a:solidFill>
                   <a:srgbClr val="111111"/>
                 </a:solidFill>
                 <a:latin typeface="Calibri"/>
               </a:rPr>
-              <a:t>At crush density a detector scores F1 0.07 against 0.71 point-based. (NWPU-Crowd)</a:t>
+              <a:t>At crush density a detector scores F1 0.07 against 0.71 point-based. Counting error fell from 68 to 49 MAE. (NWPU-Crowd, ShanghaiTech)</a:t>
             </a:r>
           </a:p>
         </p:txBody>
@@ -7168,7 +7228,7 @@
         <p:spPr>
           <a:xfrm>
             <a:off x="960120" y="6126480"/>
-            <a:ext cx="6309360" cy="502920"/>
+            <a:ext cx="6309360" cy="411480"/>
           </a:xfrm>
           <a:prstGeom prst="rect">
             <a:avLst/>
@@ -7187,140 +7247,108 @@
                 </a:solidFill>
                 <a:latin typeface="Calibri"/>
               </a:rPr>
-              <a:t>Count error keeps falling (MAE, lower is better)</a:t>
-            </a:r>
-          </a:p>
-        </p:txBody>
-      </p:sp>
-      <p:sp>
-        <p:nvSpPr>
-          <p:cNvPr id="121" name="P3 lbl"/>
-          <p:cNvSpPr txBox="1"/>
-          <p:nvPr/>
-        </p:nvSpPr>
-        <p:spPr>
-          <a:xfrm>
-            <a:off x="960120" y="6812280"/>
-            <a:ext cx="1554480" cy="502920"/>
+              <a:t>What the machine sees</a:t>
+            </a:r>
+          </a:p>
+        </p:txBody>
+      </p:sp>
+      <p:pic>
+        <p:nvPicPr>
+          <p:cNvPr id="121" name="P3 density" descr="jh_fig3_new.png"/>
+          <p:cNvPicPr>
+            <a:picLocks noChangeAspect="1"/>
+          </p:cNvPicPr>
+          <p:nvPr/>
+        </p:nvPicPr>
+        <p:blipFill>
+          <a:blip r:embed="rId3"/>
+          <a:stretch>
+            <a:fillRect/>
+          </a:stretch>
+        </p:blipFill>
+        <p:spPr>
+          <a:xfrm>
+            <a:off x="960120" y="6583680"/>
+            <a:ext cx="2743200" cy="2423160"/>
           </a:xfrm>
           <a:prstGeom prst="rect">
             <a:avLst/>
           </a:prstGeom>
-          <a:noFill/>
-        </p:spPr>
-        <p:txBody>
-          <a:bodyPr wrap="square" anchor="ctr" lIns="45720" rIns="45720" tIns="18288" bIns="18288"/>
-          <a:lstStyle/>
-          <a:p>
-            <a:pPr algn="r"/>
-            <a:r>
-              <a:rPr sz="1300" b="0" i="0">
-                <a:solidFill>
-                  <a:srgbClr val="1E2761"/>
-                </a:solidFill>
-                <a:latin typeface="Calibri"/>
-              </a:rPr>
-              <a:t>CSRNet</a:t>
-            </a:r>
-          </a:p>
-        </p:txBody>
-      </p:sp>
-      <p:sp>
-        <p:nvSpPr>
-          <p:cNvPr id="122" name="P3 track"/>
-          <p:cNvSpPr/>
-          <p:nvPr/>
-        </p:nvSpPr>
-        <p:spPr>
-          <a:xfrm>
-            <a:off x="2606040" y="6903720"/>
-            <a:ext cx="3291840" cy="292608"/>
-          </a:xfrm>
-          <a:prstGeom prst="rect">
-            <a:avLst/>
-          </a:prstGeom>
-          <a:solidFill>
-            <a:srgbClr val="D5DBEA"/>
-          </a:solidFill>
           <a:ln>
             <a:noFill/>
           </a:ln>
         </p:spPr>
-        <p:style>
-          <a:lnRef idx="1">
-            <a:schemeClr val="accent1"/>
-          </a:lnRef>
-          <a:fillRef idx="3">
-            <a:schemeClr val="accent1"/>
-          </a:fillRef>
-          <a:effectRef idx="2">
-            <a:schemeClr val="accent1"/>
-          </a:effectRef>
-          <a:fontRef idx="minor">
-            <a:schemeClr val="lt1"/>
-          </a:fontRef>
-        </p:style>
-        <p:txBody>
-          <a:bodyPr rtlCol="0" anchor="ctr"/>
-          <a:lstStyle/>
-          <a:p>
-            <a:pPr algn="ctr"/>
-          </a:p>
-        </p:txBody>
-      </p:sp>
-      <p:sp>
-        <p:nvSpPr>
-          <p:cNvPr id="123" name="P3 fill"/>
-          <p:cNvSpPr/>
-          <p:nvPr/>
-        </p:nvSpPr>
-        <p:spPr>
-          <a:xfrm>
-            <a:off x="2606040" y="6903720"/>
-            <a:ext cx="3197787" cy="292608"/>
+      </p:pic>
+      <p:sp>
+        <p:nvSpPr>
+          <p:cNvPr id="122" name="P3 densityc"/>
+          <p:cNvSpPr txBox="1"/>
+          <p:nvPr/>
+        </p:nvSpPr>
+        <p:spPr>
+          <a:xfrm>
+            <a:off x="960120" y="9034272"/>
+            <a:ext cx="2743200" cy="502920"/>
           </a:xfrm>
           <a:prstGeom prst="rect">
             <a:avLst/>
           </a:prstGeom>
-          <a:solidFill>
-            <a:srgbClr val="1E2761"/>
-          </a:solidFill>
+          <a:noFill/>
+        </p:spPr>
+        <p:txBody>
+          <a:bodyPr wrap="square" anchor="ctr" lIns="45720" rIns="45720" tIns="18288" bIns="18288"/>
+          <a:lstStyle/>
+          <a:p>
+            <a:pPr algn="l"/>
+            <a:r>
+              <a:rPr sz="1050" b="0" i="0">
+                <a:solidFill>
+                  <a:srgbClr val="5A5A5A"/>
+                </a:solidFill>
+                <a:latin typeface="Calibri"/>
+              </a:rPr>
+              <a:t>Head-density surface from video (Johansson 2008).</a:t>
+            </a:r>
+          </a:p>
+        </p:txBody>
+      </p:sp>
+      <p:pic>
+        <p:nvPicPr>
+          <p:cNvPr id="123" name="P3 flow" descr="dis_flow.png"/>
+          <p:cNvPicPr>
+            <a:picLocks noChangeAspect="1"/>
+          </p:cNvPicPr>
+          <p:nvPr/>
+        </p:nvPicPr>
+        <p:blipFill>
+          <a:blip r:embed="rId5"/>
+          <a:stretch>
+            <a:fillRect/>
+          </a:stretch>
+        </p:blipFill>
+        <p:spPr>
+          <a:xfrm>
+            <a:off x="3840480" y="6583680"/>
+            <a:ext cx="3429000" cy="960120"/>
+          </a:xfrm>
+          <a:prstGeom prst="rect">
+            <a:avLst/>
+          </a:prstGeom>
           <a:ln>
             <a:noFill/>
           </a:ln>
         </p:spPr>
-        <p:style>
-          <a:lnRef idx="1">
-            <a:schemeClr val="accent1"/>
-          </a:lnRef>
-          <a:fillRef idx="3">
-            <a:schemeClr val="accent1"/>
-          </a:fillRef>
-          <a:effectRef idx="2">
-            <a:schemeClr val="accent1"/>
-          </a:effectRef>
-          <a:fontRef idx="minor">
-            <a:schemeClr val="lt1"/>
-          </a:fontRef>
-        </p:style>
-        <p:txBody>
-          <a:bodyPr rtlCol="0" anchor="ctr"/>
-          <a:lstStyle/>
-          <a:p>
-            <a:pPr algn="ctr"/>
-          </a:p>
-        </p:txBody>
-      </p:sp>
-      <p:sp>
-        <p:nvSpPr>
-          <p:cNvPr id="124" name="P3 val"/>
+      </p:pic>
+      <p:sp>
+        <p:nvSpPr>
+          <p:cNvPr id="124" name="P3 flowc"/>
           <p:cNvSpPr txBox="1"/>
           <p:nvPr/>
         </p:nvSpPr>
         <p:spPr>
           <a:xfrm>
-            <a:off x="6035040" y="6812280"/>
-            <a:ext cx="822960" cy="502920"/>
+            <a:off x="3840480" y="7589520"/>
+            <a:ext cx="3429000" cy="1920240"/>
           </a:xfrm>
           <a:prstGeom prst="rect">
             <a:avLst/>
@@ -7333,469 +7361,13 @@
           <a:p>
             <a:pPr algn="l"/>
             <a:r>
-              <a:rPr sz="1300" b="1" i="0">
-                <a:solidFill>
-                  <a:srgbClr val="1E2761"/>
-                </a:solidFill>
-                <a:latin typeface="Calibri"/>
-              </a:rPr>
-              <a:t>68</a:t>
-            </a:r>
-          </a:p>
-        </p:txBody>
-      </p:sp>
-      <p:sp>
-        <p:nvSpPr>
-          <p:cNvPr id="125" name="P3 lbl"/>
-          <p:cNvSpPr txBox="1"/>
-          <p:nvPr/>
-        </p:nvSpPr>
-        <p:spPr>
-          <a:xfrm>
-            <a:off x="960120" y="7543800"/>
-            <a:ext cx="1554480" cy="502920"/>
-          </a:xfrm>
-          <a:prstGeom prst="rect">
-            <a:avLst/>
-          </a:prstGeom>
-          <a:noFill/>
-        </p:spPr>
-        <p:txBody>
-          <a:bodyPr wrap="square" anchor="ctr" lIns="45720" rIns="45720" tIns="18288" bIns="18288"/>
-          <a:lstStyle/>
-          <a:p>
-            <a:pPr algn="r"/>
-            <a:r>
-              <a:rPr sz="1300" b="0" i="0">
-                <a:solidFill>
-                  <a:srgbClr val="1E2761"/>
-                </a:solidFill>
-                <a:latin typeface="Calibri"/>
-              </a:rPr>
-              <a:t>Bayesian</a:t>
-            </a:r>
-          </a:p>
-        </p:txBody>
-      </p:sp>
-      <p:sp>
-        <p:nvSpPr>
-          <p:cNvPr id="126" name="P3 track"/>
-          <p:cNvSpPr/>
-          <p:nvPr/>
-        </p:nvSpPr>
-        <p:spPr>
-          <a:xfrm>
-            <a:off x="2606040" y="7635240"/>
-            <a:ext cx="3291840" cy="292608"/>
-          </a:xfrm>
-          <a:prstGeom prst="rect">
-            <a:avLst/>
-          </a:prstGeom>
-          <a:solidFill>
-            <a:srgbClr val="D5DBEA"/>
-          </a:solidFill>
-          <a:ln>
-            <a:noFill/>
-          </a:ln>
-        </p:spPr>
-        <p:style>
-          <a:lnRef idx="1">
-            <a:schemeClr val="accent1"/>
-          </a:lnRef>
-          <a:fillRef idx="3">
-            <a:schemeClr val="accent1"/>
-          </a:fillRef>
-          <a:effectRef idx="2">
-            <a:schemeClr val="accent1"/>
-          </a:effectRef>
-          <a:fontRef idx="minor">
-            <a:schemeClr val="lt1"/>
-          </a:fontRef>
-        </p:style>
-        <p:txBody>
-          <a:bodyPr rtlCol="0" anchor="ctr"/>
-          <a:lstStyle/>
-          <a:p>
-            <a:pPr algn="ctr"/>
-          </a:p>
-        </p:txBody>
-      </p:sp>
-      <p:sp>
-        <p:nvSpPr>
-          <p:cNvPr id="127" name="P3 fill"/>
-          <p:cNvSpPr/>
-          <p:nvPr/>
-        </p:nvSpPr>
-        <p:spPr>
-          <a:xfrm>
-            <a:off x="2606040" y="7635240"/>
-            <a:ext cx="2962656" cy="292608"/>
-          </a:xfrm>
-          <a:prstGeom prst="rect">
-            <a:avLst/>
-          </a:prstGeom>
-          <a:solidFill>
-            <a:srgbClr val="1E2761"/>
-          </a:solidFill>
-          <a:ln>
-            <a:noFill/>
-          </a:ln>
-        </p:spPr>
-        <p:style>
-          <a:lnRef idx="1">
-            <a:schemeClr val="accent1"/>
-          </a:lnRef>
-          <a:fillRef idx="3">
-            <a:schemeClr val="accent1"/>
-          </a:fillRef>
-          <a:effectRef idx="2">
-            <a:schemeClr val="accent1"/>
-          </a:effectRef>
-          <a:fontRef idx="minor">
-            <a:schemeClr val="lt1"/>
-          </a:fontRef>
-        </p:style>
-        <p:txBody>
-          <a:bodyPr rtlCol="0" anchor="ctr"/>
-          <a:lstStyle/>
-          <a:p>
-            <a:pPr algn="ctr"/>
-          </a:p>
-        </p:txBody>
-      </p:sp>
-      <p:sp>
-        <p:nvSpPr>
-          <p:cNvPr id="128" name="P3 val"/>
-          <p:cNvSpPr txBox="1"/>
-          <p:nvPr/>
-        </p:nvSpPr>
-        <p:spPr>
-          <a:xfrm>
-            <a:off x="6035040" y="7543800"/>
-            <a:ext cx="822960" cy="502920"/>
-          </a:xfrm>
-          <a:prstGeom prst="rect">
-            <a:avLst/>
-          </a:prstGeom>
-          <a:noFill/>
-        </p:spPr>
-        <p:txBody>
-          <a:bodyPr wrap="square" anchor="ctr" lIns="45720" rIns="45720" tIns="18288" bIns="18288"/>
-          <a:lstStyle/>
-          <a:p>
-            <a:pPr algn="l"/>
-            <a:r>
-              <a:rPr sz="1300" b="1" i="0">
-                <a:solidFill>
-                  <a:srgbClr val="1E2761"/>
-                </a:solidFill>
-                <a:latin typeface="Calibri"/>
-              </a:rPr>
-              <a:t>63</a:t>
-            </a:r>
-          </a:p>
-        </p:txBody>
-      </p:sp>
-      <p:sp>
-        <p:nvSpPr>
-          <p:cNvPr id="129" name="P3 lbl"/>
-          <p:cNvSpPr txBox="1"/>
-          <p:nvPr/>
-        </p:nvSpPr>
-        <p:spPr>
-          <a:xfrm>
-            <a:off x="960120" y="8275320"/>
-            <a:ext cx="1554480" cy="502920"/>
-          </a:xfrm>
-          <a:prstGeom prst="rect">
-            <a:avLst/>
-          </a:prstGeom>
-          <a:noFill/>
-        </p:spPr>
-        <p:txBody>
-          <a:bodyPr wrap="square" anchor="ctr" lIns="45720" rIns="45720" tIns="18288" bIns="18288"/>
-          <a:lstStyle/>
-          <a:p>
-            <a:pPr algn="r"/>
-            <a:r>
-              <a:rPr sz="1300" b="0" i="0">
-                <a:solidFill>
-                  <a:srgbClr val="1E2761"/>
-                </a:solidFill>
-                <a:latin typeface="Calibri"/>
-              </a:rPr>
-              <a:t>DM-Count</a:t>
-            </a:r>
-          </a:p>
-        </p:txBody>
-      </p:sp>
-      <p:sp>
-        <p:nvSpPr>
-          <p:cNvPr id="130" name="P3 track"/>
-          <p:cNvSpPr/>
-          <p:nvPr/>
-        </p:nvSpPr>
-        <p:spPr>
-          <a:xfrm>
-            <a:off x="2606040" y="8366760"/>
-            <a:ext cx="3291840" cy="292608"/>
-          </a:xfrm>
-          <a:prstGeom prst="rect">
-            <a:avLst/>
-          </a:prstGeom>
-          <a:solidFill>
-            <a:srgbClr val="D5DBEA"/>
-          </a:solidFill>
-          <a:ln>
-            <a:noFill/>
-          </a:ln>
-        </p:spPr>
-        <p:style>
-          <a:lnRef idx="1">
-            <a:schemeClr val="accent1"/>
-          </a:lnRef>
-          <a:fillRef idx="3">
-            <a:schemeClr val="accent1"/>
-          </a:fillRef>
-          <a:effectRef idx="2">
-            <a:schemeClr val="accent1"/>
-          </a:effectRef>
-          <a:fontRef idx="minor">
-            <a:schemeClr val="lt1"/>
-          </a:fontRef>
-        </p:style>
-        <p:txBody>
-          <a:bodyPr rtlCol="0" anchor="ctr"/>
-          <a:lstStyle/>
-          <a:p>
-            <a:pPr algn="ctr"/>
-          </a:p>
-        </p:txBody>
-      </p:sp>
-      <p:sp>
-        <p:nvSpPr>
-          <p:cNvPr id="131" name="P3 fill"/>
-          <p:cNvSpPr/>
-          <p:nvPr/>
-        </p:nvSpPr>
-        <p:spPr>
-          <a:xfrm>
-            <a:off x="2606040" y="8366760"/>
-            <a:ext cx="2821577" cy="292608"/>
-          </a:xfrm>
-          <a:prstGeom prst="rect">
-            <a:avLst/>
-          </a:prstGeom>
-          <a:solidFill>
-            <a:srgbClr val="1E2761"/>
-          </a:solidFill>
-          <a:ln>
-            <a:noFill/>
-          </a:ln>
-        </p:spPr>
-        <p:style>
-          <a:lnRef idx="1">
-            <a:schemeClr val="accent1"/>
-          </a:lnRef>
-          <a:fillRef idx="3">
-            <a:schemeClr val="accent1"/>
-          </a:fillRef>
-          <a:effectRef idx="2">
-            <a:schemeClr val="accent1"/>
-          </a:effectRef>
-          <a:fontRef idx="minor">
-            <a:schemeClr val="lt1"/>
-          </a:fontRef>
-        </p:style>
-        <p:txBody>
-          <a:bodyPr rtlCol="0" anchor="ctr"/>
-          <a:lstStyle/>
-          <a:p>
-            <a:pPr algn="ctr"/>
-          </a:p>
-        </p:txBody>
-      </p:sp>
-      <p:sp>
-        <p:nvSpPr>
-          <p:cNvPr id="132" name="P3 val"/>
-          <p:cNvSpPr txBox="1"/>
-          <p:nvPr/>
-        </p:nvSpPr>
-        <p:spPr>
-          <a:xfrm>
-            <a:off x="6035040" y="8275320"/>
-            <a:ext cx="822960" cy="502920"/>
-          </a:xfrm>
-          <a:prstGeom prst="rect">
-            <a:avLst/>
-          </a:prstGeom>
-          <a:noFill/>
-        </p:spPr>
-        <p:txBody>
-          <a:bodyPr wrap="square" anchor="ctr" lIns="45720" rIns="45720" tIns="18288" bIns="18288"/>
-          <a:lstStyle/>
-          <a:p>
-            <a:pPr algn="l"/>
-            <a:r>
-              <a:rPr sz="1300" b="1" i="0">
-                <a:solidFill>
-                  <a:srgbClr val="1E2761"/>
-                </a:solidFill>
-                <a:latin typeface="Calibri"/>
-              </a:rPr>
-              <a:t>60</a:t>
-            </a:r>
-          </a:p>
-        </p:txBody>
-      </p:sp>
-      <p:sp>
-        <p:nvSpPr>
-          <p:cNvPr id="133" name="P3 lbl"/>
-          <p:cNvSpPr txBox="1"/>
-          <p:nvPr/>
-        </p:nvSpPr>
-        <p:spPr>
-          <a:xfrm>
-            <a:off x="960120" y="9006840"/>
-            <a:ext cx="1554480" cy="502920"/>
-          </a:xfrm>
-          <a:prstGeom prst="rect">
-            <a:avLst/>
-          </a:prstGeom>
-          <a:noFill/>
-        </p:spPr>
-        <p:txBody>
-          <a:bodyPr wrap="square" anchor="ctr" lIns="45720" rIns="45720" tIns="18288" bIns="18288"/>
-          <a:lstStyle/>
-          <a:p>
-            <a:pPr algn="r"/>
-            <a:r>
-              <a:rPr sz="1300" b="0" i="0">
-                <a:solidFill>
-                  <a:srgbClr val="1E2761"/>
-                </a:solidFill>
-                <a:latin typeface="Calibri"/>
-              </a:rPr>
-              <a:t>Latest</a:t>
-            </a:r>
-          </a:p>
-        </p:txBody>
-      </p:sp>
-      <p:sp>
-        <p:nvSpPr>
-          <p:cNvPr id="134" name="P3 track"/>
-          <p:cNvSpPr/>
-          <p:nvPr/>
-        </p:nvSpPr>
-        <p:spPr>
-          <a:xfrm>
-            <a:off x="2606040" y="9098280"/>
-            <a:ext cx="3291840" cy="292608"/>
-          </a:xfrm>
-          <a:prstGeom prst="rect">
-            <a:avLst/>
-          </a:prstGeom>
-          <a:solidFill>
-            <a:srgbClr val="D5DBEA"/>
-          </a:solidFill>
-          <a:ln>
-            <a:noFill/>
-          </a:ln>
-        </p:spPr>
-        <p:style>
-          <a:lnRef idx="1">
-            <a:schemeClr val="accent1"/>
-          </a:lnRef>
-          <a:fillRef idx="3">
-            <a:schemeClr val="accent1"/>
-          </a:fillRef>
-          <a:effectRef idx="2">
-            <a:schemeClr val="accent1"/>
-          </a:effectRef>
-          <a:fontRef idx="minor">
-            <a:schemeClr val="lt1"/>
-          </a:fontRef>
-        </p:style>
-        <p:txBody>
-          <a:bodyPr rtlCol="0" anchor="ctr"/>
-          <a:lstStyle/>
-          <a:p>
-            <a:pPr algn="ctr"/>
-          </a:p>
-        </p:txBody>
-      </p:sp>
-      <p:sp>
-        <p:nvSpPr>
-          <p:cNvPr id="135" name="P3 fill"/>
-          <p:cNvSpPr/>
-          <p:nvPr/>
-        </p:nvSpPr>
-        <p:spPr>
-          <a:xfrm>
-            <a:off x="2606040" y="9098280"/>
-            <a:ext cx="2304288" cy="292608"/>
-          </a:xfrm>
-          <a:prstGeom prst="rect">
-            <a:avLst/>
-          </a:prstGeom>
-          <a:solidFill>
-            <a:srgbClr val="1E2761"/>
-          </a:solidFill>
-          <a:ln>
-            <a:noFill/>
-          </a:ln>
-        </p:spPr>
-        <p:style>
-          <a:lnRef idx="1">
-            <a:schemeClr val="accent1"/>
-          </a:lnRef>
-          <a:fillRef idx="3">
-            <a:schemeClr val="accent1"/>
-          </a:fillRef>
-          <a:effectRef idx="2">
-            <a:schemeClr val="accent1"/>
-          </a:effectRef>
-          <a:fontRef idx="minor">
-            <a:schemeClr val="lt1"/>
-          </a:fontRef>
-        </p:style>
-        <p:txBody>
-          <a:bodyPr rtlCol="0" anchor="ctr"/>
-          <a:lstStyle/>
-          <a:p>
-            <a:pPr algn="ctr"/>
-          </a:p>
-        </p:txBody>
-      </p:sp>
-      <p:sp>
-        <p:nvSpPr>
-          <p:cNvPr id="136" name="P3 val"/>
-          <p:cNvSpPr txBox="1"/>
-          <p:nvPr/>
-        </p:nvSpPr>
-        <p:spPr>
-          <a:xfrm>
-            <a:off x="6035040" y="9006840"/>
-            <a:ext cx="822960" cy="502920"/>
-          </a:xfrm>
-          <a:prstGeom prst="rect">
-            <a:avLst/>
-          </a:prstGeom>
-          <a:noFill/>
-        </p:spPr>
-        <p:txBody>
-          <a:bodyPr wrap="square" anchor="ctr" lIns="45720" rIns="45720" tIns="18288" bIns="18288"/>
-          <a:lstStyle/>
-          <a:p>
-            <a:pPr algn="l"/>
-            <a:r>
-              <a:rPr sz="1300" b="1" i="0">
-                <a:solidFill>
-                  <a:srgbClr val="1E2761"/>
-                </a:solidFill>
-                <a:latin typeface="Calibri"/>
-              </a:rPr>
-              <a:t>49</a:t>
+              <a:rPr sz="1100" b="0" i="0">
+                <a:solidFill>
+                  <a:srgbClr val="111111"/>
+                </a:solidFill>
+                <a:latin typeface="Calibri"/>
+              </a:rPr>
+              <a:t>Flow field on our station clip (DIS optical flow). Movers glow, stillness stays black.</a:t>
             </a:r>
           </a:p>
         </p:txBody>
@@ -8114,13 +7686,13 @@
           <a:p>
             <a:pPr algn="l"/>
             <a:r>
-              <a:rPr sz="1500" b="0" i="0">
+              <a:rPr sz="1400" b="0" i="0">
                 <a:solidFill>
                   <a:srgbClr val="111111"/>
                 </a:solidFill>
                 <a:latin typeface="Calibri"/>
               </a:rPr>
-              <a:t>Fixed gates are measured once. Other views use relative levels. No fake square metres.</a:t>
+              <a:t>Fixed gates are measured once. Kumbh ran 3-month camera surveys for its crowd alarm. Other views use relative levels.</a:t>
             </a:r>
           </a:p>
         </p:txBody>
@@ -8818,54 +8390,48 @@
                 </a:solidFill>
                 <a:latin typeface="Calibri"/>
               </a:rPr>
-              <a:t>Runs on site, not in the cloud</a:t>
-            </a:r>
-          </a:p>
-        </p:txBody>
-      </p:sp>
-      <p:sp>
-        <p:nvSpPr>
-          <p:cNvPr id="121" name="P4 siterow"/>
-          <p:cNvSpPr txBox="1"/>
-          <p:nvPr/>
-        </p:nvSpPr>
-        <p:spPr>
-          <a:xfrm>
-            <a:off x="9601200" y="7424927"/>
-            <a:ext cx="7680960" cy="548640"/>
+              <a:t>Pressure warned first</a:t>
+            </a:r>
+          </a:p>
+        </p:txBody>
+      </p:sp>
+      <p:pic>
+        <p:nvPicPr>
+          <p:cNvPr id="121" name="P4 pressure" descr="pressure_strip.png"/>
+          <p:cNvPicPr>
+            <a:picLocks noChangeAspect="1"/>
+          </p:cNvPicPr>
+          <p:nvPr/>
+        </p:nvPicPr>
+        <p:blipFill>
+          <a:blip r:embed="rId4"/>
+          <a:stretch>
+            <a:fillRect/>
+          </a:stretch>
+        </p:blipFill>
+        <p:spPr>
+          <a:xfrm>
+            <a:off x="9601200" y="7360920"/>
+            <a:ext cx="4480560" cy="1938528"/>
           </a:xfrm>
           <a:prstGeom prst="rect">
             <a:avLst/>
           </a:prstGeom>
-          <a:noFill/>
-        </p:spPr>
-        <p:txBody>
-          <a:bodyPr wrap="square" anchor="ctr" lIns="45720" rIns="45720" tIns="18288" bIns="18288"/>
-          <a:lstStyle/>
-          <a:p>
-            <a:pPr algn="l"/>
-            <a:r>
-              <a:rPr sz="1350" b="0" i="0">
-                <a:solidFill>
-                  <a:srgbClr val="111111"/>
-                </a:solidFill>
-                <a:latin typeface="Calibri"/>
-              </a:rPr>
-              <a:t>Edge box per 1 to 4 cameras (Jetson class)</a:t>
-            </a:r>
-          </a:p>
-        </p:txBody>
-      </p:sp>
-      <p:sp>
-        <p:nvSpPr>
-          <p:cNvPr id="122" name="P4 siterow"/>
+          <a:ln>
+            <a:noFill/>
+          </a:ln>
+        </p:spPr>
+      </p:pic>
+      <p:sp>
+        <p:nvSpPr>
+          <p:cNvPr id="122" name="P4 pressurec"/>
           <p:cNvSpPr txBox="1"/>
           <p:nvPr/>
         </p:nvSpPr>
         <p:spPr>
           <a:xfrm>
-            <a:off x="9601200" y="7991855"/>
-            <a:ext cx="7680960" cy="548640"/>
+            <a:off x="14264640" y="7360920"/>
+            <a:ext cx="3017520" cy="1938528"/>
           </a:xfrm>
           <a:prstGeom prst="rect">
             <a:avLst/>
@@ -8878,79 +8444,13 @@
           <a:p>
             <a:pPr algn="l"/>
             <a:r>
-              <a:rPr sz="1350" b="0" i="0">
+              <a:rPr sz="1200" b="0" i="0">
                 <a:solidFill>
                   <a:srgbClr val="111111"/>
                 </a:solidFill>
                 <a:latin typeface="Calibri"/>
               </a:rPr>
-              <a:t>Venue server fuses every feed into one map</a:t>
-            </a:r>
-          </a:p>
-        </p:txBody>
-      </p:sp>
-      <p:sp>
-        <p:nvSpPr>
-          <p:cNvPr id="123" name="P4 siterow"/>
-          <p:cNvSpPr txBox="1"/>
-          <p:nvPr/>
-        </p:nvSpPr>
-        <p:spPr>
-          <a:xfrm>
-            <a:off x="9601200" y="8558784"/>
-            <a:ext cx="7680960" cy="548640"/>
-          </a:xfrm>
-          <a:prstGeom prst="rect">
-            <a:avLst/>
-          </a:prstGeom>
-          <a:noFill/>
-        </p:spPr>
-        <p:txBody>
-          <a:bodyPr wrap="square" anchor="ctr" lIns="45720" rIns="45720" tIns="18288" bIns="18288"/>
-          <a:lstStyle/>
-          <a:p>
-            <a:pPr algn="l"/>
-            <a:r>
-              <a:rPr sz="1350" b="0" i="0">
-                <a:solidFill>
-                  <a:srgbClr val="111111"/>
-                </a:solidFill>
-                <a:latin typeface="Calibri"/>
-              </a:rPr>
-              <a:t>Guard handsets get the alert, human confirms</a:t>
-            </a:r>
-          </a:p>
-        </p:txBody>
-      </p:sp>
-      <p:sp>
-        <p:nvSpPr>
-          <p:cNvPr id="124" name="P4 sitef"/>
-          <p:cNvSpPr txBox="1"/>
-          <p:nvPr/>
-        </p:nvSpPr>
-        <p:spPr>
-          <a:xfrm>
-            <a:off x="9601200" y="9125712"/>
-            <a:ext cx="7680960" cy="365760"/>
-          </a:xfrm>
-          <a:prstGeom prst="rect">
-            <a:avLst/>
-          </a:prstGeom>
-          <a:noFill/>
-        </p:spPr>
-        <p:txBody>
-          <a:bodyPr wrap="square" anchor="ctr" lIns="45720" rIns="45720" tIns="18288" bIns="18288"/>
-          <a:lstStyle/>
-          <a:p>
-            <a:pPr algn="l"/>
-            <a:r>
-              <a:rPr sz="1050" b="0" i="0">
-                <a:solidFill>
-                  <a:srgbClr val="5A5A5A"/>
-                </a:solidFill>
-                <a:latin typeface="Calibri"/>
-              </a:rPr>
-              <a:t>Deployment scale numbers only, no laptop tests.</a:t>
+              <a:t>Pressure crossed the warning line before turbulence began. The accident came after. Hajj 2006 data (Johansson et al.).</a:t>
             </a:r>
           </a:p>
         </p:txBody>
@@ -9258,9 +8758,7 @@
           </a:effectLst>
         </p:spPr>
         <p:txBody>
-          <a:bodyPr wrap="square" lIns="320040" tIns="109728" rIns="320040" bIns="109728" anchor="ctr" rtlCol="0">
-            <a:noAutofit/>
-          </a:bodyPr>
+          <a:bodyPr wrap="square" lIns="45720" tIns="18288" rIns="45720" bIns="18288" anchor="ctr" rtlCol="0"/>
           <a:lstStyle/>
           <a:p>
             <a:pPr algn="l">
@@ -9272,37 +8770,25 @@
               </a:spcAft>
             </a:pPr>
             <a:r>
-              <a:rPr lang="en-US" sz="2200" b="1" i="0" dirty="0">
+              <a:rPr sz="2000" b="1" i="0">
                 <a:solidFill>
                   <a:srgbClr val="1E2761"/>
                 </a:solidFill>
                 <a:latin typeface="Calibri"/>
-                <a:cs typeface="Calibri"/>
               </a:rPr>
               <a:t>Organizers</a:t>
             </a:r>
           </a:p>
           <a:p>
-            <a:pPr algn="l">
-              <a:lnSpc>
-                <a:spcPct val="100000"/>
-              </a:lnSpc>
-              <a:spcBef>
-                <a:spcPts val="0"/>
-              </a:spcBef>
-              <a:spcAft>
-                <a:spcPts val="0"/>
-              </a:spcAft>
-            </a:pPr>
-            <a:r>
-              <a:rPr lang="en-US" sz="1800" b="0" i="0" dirty="0">
+            <a:pPr algn="l"/>
+            <a:r>
+              <a:rPr sz="1500" b="0" i="0">
                 <a:solidFill>
                   <a:srgbClr val="111111"/>
                 </a:solidFill>
                 <a:latin typeface="Calibri"/>
-                <a:cs typeface="Calibri"/>
-              </a:rPr>
-              <a:t>Spot a growing jam early, and tell guards which zone to clear.</a:t>
+              </a:rPr>
+              <a:t>Spot a growing jam early, and tell guards which zone to clear. Built for stations, mela grounds, stadiums.</a:t>
             </a:r>
           </a:p>
         </p:txBody>
@@ -10065,382 +9551,6 @@
       </p:sp>
       <p:sp>
         <p:nvSpPr>
-          <p:cNvPr id="102" name="Card 102"/>
-          <p:cNvSpPr/>
-          <p:nvPr/>
-        </p:nvSpPr>
-        <p:spPr>
-          <a:xfrm>
-            <a:off x="731520" y="3108960"/>
-            <a:ext cx="8229600" cy="1554480"/>
-          </a:xfrm>
-          <a:prstGeom prst="roundRect">
-            <a:avLst>
-              <a:gd name="adj" fmla="val 9000"/>
-            </a:avLst>
-          </a:prstGeom>
-          <a:solidFill>
-            <a:srgbClr val="EEF2FF"/>
-          </a:solidFill>
-          <a:ln>
-            <a:noFill/>
-          </a:ln>
-          <a:effectLst>
-            <a:outerShdw blurRad="127000" dist="38100" dir="5400000" algn="t" rotWithShape="0">
-              <a:srgbClr val="1E2761">
-                <a:alpha val="16000"/>
-              </a:srgbClr>
-            </a:outerShdw>
-          </a:effectLst>
-        </p:spPr>
-        <p:txBody>
-          <a:bodyPr wrap="square" lIns="45720" tIns="18288" rIns="45720" bIns="18288" anchor="ctr" rtlCol="0"/>
-          <a:lstStyle/>
-          <a:p>
-            <a:pPr algn="l">
-              <a:spcBef>
-                <a:spcPts val="0"/>
-              </a:spcBef>
-              <a:spcAft>
-                <a:spcPts val="400"/>
-              </a:spcAft>
-            </a:pPr>
-            <a:r>
-              <a:rPr sz="1800" b="1" i="0">
-                <a:solidFill>
-                  <a:srgbClr val="1E2761"/>
-                </a:solidFill>
-                <a:latin typeface="Calibri"/>
-              </a:rPr>
-              <a:t>Count the overlap</a:t>
-            </a:r>
-          </a:p>
-          <a:p>
-            <a:pPr algn="l"/>
-            <a:r>
-              <a:rPr sz="1300" b="0" i="0">
-                <a:solidFill>
-                  <a:srgbClr val="111111"/>
-                </a:solidFill>
-                <a:latin typeface="Calibri"/>
-              </a:rPr>
-              <a:t>CSRNet (CVPR 2018), Bayesian Loss (ICCV 2019), DM-Count (NeurIPS 2020).</a:t>
-            </a:r>
-          </a:p>
-          <a:p>
-            <a:pPr algn="l"/>
-            <a:r>
-              <a:rPr sz="1100" b="0" i="0">
-                <a:solidFill>
-                  <a:srgbClr val="5A5A5A"/>
-                </a:solidFill>
-                <a:latin typeface="Calibri"/>
-                <a:hlinkClick r:id="rId9"/>
-              </a:rPr>
-              <a:t>arXiv:1802.10062  </a:t>
-            </a:r>
-            <a:r>
-              <a:rPr sz="1100" b="0" i="0">
-                <a:solidFill>
-                  <a:srgbClr val="5A5A5A"/>
-                </a:solidFill>
-                <a:latin typeface="Calibri"/>
-                <a:hlinkClick r:id="rId10"/>
-              </a:rPr>
-              <a:t>arXiv:1908.03684  </a:t>
-            </a:r>
-            <a:r>
-              <a:rPr sz="1100" b="0" i="0">
-                <a:solidFill>
-                  <a:srgbClr val="5A5A5A"/>
-                </a:solidFill>
-                <a:latin typeface="Calibri"/>
-                <a:hlinkClick r:id="rId11"/>
-              </a:rPr>
-              <a:t>DM-Count</a:t>
-            </a:r>
-          </a:p>
-        </p:txBody>
-      </p:sp>
-      <p:sp>
-        <p:nvSpPr>
-          <p:cNvPr id="103" name="Card 103"/>
-          <p:cNvSpPr/>
-          <p:nvPr/>
-        </p:nvSpPr>
-        <p:spPr>
-          <a:xfrm>
-            <a:off x="9326880" y="3108960"/>
-            <a:ext cx="8229600" cy="1554480"/>
-          </a:xfrm>
-          <a:prstGeom prst="roundRect">
-            <a:avLst>
-              <a:gd name="adj" fmla="val 9000"/>
-            </a:avLst>
-          </a:prstGeom>
-          <a:solidFill>
-            <a:srgbClr val="EEF2FF"/>
-          </a:solidFill>
-          <a:ln>
-            <a:noFill/>
-          </a:ln>
-          <a:effectLst>
-            <a:outerShdw blurRad="127000" dist="38100" dir="5400000" algn="t" rotWithShape="0">
-              <a:srgbClr val="1E2761">
-                <a:alpha val="16000"/>
-              </a:srgbClr>
-            </a:outerShdw>
-          </a:effectLst>
-        </p:spPr>
-        <p:txBody>
-          <a:bodyPr wrap="square" lIns="45720" tIns="18288" rIns="45720" bIns="18288" anchor="ctr" rtlCol="0"/>
-          <a:lstStyle/>
-          <a:p>
-            <a:pPr algn="l">
-              <a:spcBef>
-                <a:spcPts val="0"/>
-              </a:spcBef>
-              <a:spcAft>
-                <a:spcPts val="400"/>
-              </a:spcAft>
-            </a:pPr>
-            <a:r>
-              <a:rPr sz="1800" b="1" i="0">
-                <a:solidFill>
-                  <a:srgbClr val="1E2761"/>
-                </a:solidFill>
-                <a:latin typeface="Calibri"/>
-              </a:rPr>
-              <a:t>Map pixels to ground</a:t>
-            </a:r>
-          </a:p>
-          <a:p>
-            <a:pPr algn="l"/>
-            <a:r>
-              <a:rPr sz="1300" b="0" i="0">
-                <a:solidFill>
-                  <a:srgbClr val="111111"/>
-                </a:solidFill>
-                <a:latin typeface="Calibri"/>
-              </a:rPr>
-              <a:t>Chan perspective maps (CVPR 2008), Zhang ground-plane fusion (CVPR 2019).</a:t>
-            </a:r>
-          </a:p>
-          <a:p>
-            <a:pPr algn="l"/>
-            <a:r>
-              <a:rPr sz="1100" b="0" i="0">
-                <a:solidFill>
-                  <a:srgbClr val="5A5A5A"/>
-                </a:solidFill>
-                <a:latin typeface="Calibri"/>
-                <a:hlinkClick r:id="rId12"/>
-              </a:rPr>
-              <a:t>people counting paper  </a:t>
-            </a:r>
-            <a:r>
-              <a:rPr sz="1100" b="0" i="0">
-                <a:solidFill>
-                  <a:srgbClr val="5A5A5A"/>
-                </a:solidFill>
-                <a:latin typeface="Calibri"/>
-                <a:hlinkClick r:id="rId13"/>
-              </a:rPr>
-              <a:t>ground-plane paper</a:t>
-            </a:r>
-          </a:p>
-        </p:txBody>
-      </p:sp>
-      <p:sp>
-        <p:nvSpPr>
-          <p:cNvPr id="104" name="Card 104"/>
-          <p:cNvSpPr/>
-          <p:nvPr/>
-        </p:nvSpPr>
-        <p:spPr>
-          <a:xfrm>
-            <a:off x="731520" y="4800600"/>
-            <a:ext cx="8229600" cy="1554480"/>
-          </a:xfrm>
-          <a:prstGeom prst="roundRect">
-            <a:avLst>
-              <a:gd name="adj" fmla="val 9000"/>
-            </a:avLst>
-          </a:prstGeom>
-          <a:solidFill>
-            <a:srgbClr val="EEF2FF"/>
-          </a:solidFill>
-          <a:ln>
-            <a:noFill/>
-          </a:ln>
-          <a:effectLst>
-            <a:outerShdw blurRad="127000" dist="38100" dir="5400000" algn="t" rotWithShape="0">
-              <a:srgbClr val="1E2761">
-                <a:alpha val="16000"/>
-              </a:srgbClr>
-            </a:outerShdw>
-          </a:effectLst>
-        </p:spPr>
-        <p:txBody>
-          <a:bodyPr wrap="square" lIns="45720" tIns="18288" rIns="45720" bIns="18288" anchor="ctr" rtlCol="0"/>
-          <a:lstStyle/>
-          <a:p>
-            <a:pPr algn="l">
-              <a:spcBef>
-                <a:spcPts val="0"/>
-              </a:spcBef>
-              <a:spcAft>
-                <a:spcPts val="400"/>
-              </a:spcAft>
-            </a:pPr>
-            <a:r>
-              <a:rPr sz="1800" b="1" i="0">
-                <a:solidFill>
-                  <a:srgbClr val="1E2761"/>
-                </a:solidFill>
-                <a:latin typeface="Calibri"/>
-              </a:rPr>
-              <a:t>Read the currents</a:t>
-            </a:r>
-          </a:p>
-          <a:p>
-            <a:pPr algn="l"/>
-            <a:r>
-              <a:rPr sz="1300" b="0" i="0">
-                <a:solidFill>
-                  <a:srgbClr val="111111"/>
-                </a:solidFill>
-                <a:latin typeface="Calibri"/>
-              </a:rPr>
-              <a:t>Mehran social force (CVPR 2009), streaklines (ECCV 2010).</a:t>
-            </a:r>
-          </a:p>
-          <a:p>
-            <a:pPr algn="l"/>
-            <a:r>
-              <a:rPr sz="1100" b="0" i="0">
-                <a:solidFill>
-                  <a:srgbClr val="5A5A5A"/>
-                </a:solidFill>
-                <a:latin typeface="Calibri"/>
-                <a:hlinkClick r:id="rId14"/>
-              </a:rPr>
-              <a:t>CVPR 2009 pdf  </a:t>
-            </a:r>
-            <a:r>
-              <a:rPr sz="1100" b="0" i="0">
-                <a:solidFill>
-                  <a:srgbClr val="5A5A5A"/>
-                </a:solidFill>
-                <a:latin typeface="Calibri"/>
-                <a:hlinkClick r:id="rId15"/>
-              </a:rPr>
-              <a:t>streakline project</a:t>
-            </a:r>
-          </a:p>
-        </p:txBody>
-      </p:sp>
-      <p:sp>
-        <p:nvSpPr>
-          <p:cNvPr id="105" name="Card 105"/>
-          <p:cNvSpPr/>
-          <p:nvPr/>
-        </p:nvSpPr>
-        <p:spPr>
-          <a:xfrm>
-            <a:off x="9326880" y="4800600"/>
-            <a:ext cx="8229600" cy="1554480"/>
-          </a:xfrm>
-          <a:prstGeom prst="roundRect">
-            <a:avLst>
-              <a:gd name="adj" fmla="val 9000"/>
-            </a:avLst>
-          </a:prstGeom>
-          <a:solidFill>
-            <a:srgbClr val="EEF2FF"/>
-          </a:solidFill>
-          <a:ln>
-            <a:noFill/>
-          </a:ln>
-          <a:effectLst>
-            <a:outerShdw blurRad="127000" dist="38100" dir="5400000" algn="t" rotWithShape="0">
-              <a:srgbClr val="1E2761">
-                <a:alpha val="16000"/>
-              </a:srgbClr>
-            </a:outerShdw>
-          </a:effectLst>
-        </p:spPr>
-        <p:txBody>
-          <a:bodyPr wrap="square" lIns="45720" tIns="18288" rIns="45720" bIns="18288" anchor="ctr" rtlCol="0"/>
-          <a:lstStyle/>
-          <a:p>
-            <a:pPr algn="l">
-              <a:spcBef>
-                <a:spcPts val="0"/>
-              </a:spcBef>
-              <a:spcAft>
-                <a:spcPts val="400"/>
-              </a:spcAft>
-            </a:pPr>
-            <a:r>
-              <a:rPr sz="1800" b="1" i="0">
-                <a:solidFill>
-                  <a:srgbClr val="1E2761"/>
-                </a:solidFill>
-                <a:latin typeface="Calibri"/>
-              </a:rPr>
-              <a:t>Warn on pressure</a:t>
-            </a:r>
-          </a:p>
-          <a:p>
-            <a:pPr algn="l"/>
-            <a:r>
-              <a:rPr sz="1300" b="0" i="0">
-                <a:solidFill>
-                  <a:srgbClr val="111111"/>
-                </a:solidFill>
-                <a:latin typeface="Calibri"/>
-              </a:rPr>
-              <a:t>Helbing social force (1995), crowd disasters (2007), Johansson pressure (2008).</a:t>
-            </a:r>
-          </a:p>
-          <a:p>
-            <a:pPr algn="l"/>
-            <a:r>
-              <a:rPr sz="1100" b="0" i="0">
-                <a:solidFill>
-                  <a:srgbClr val="5A5A5A"/>
-                </a:solidFill>
-                <a:latin typeface="Calibri"/>
-                <a:hlinkClick r:id="rId16"/>
-              </a:rPr>
-              <a:t>DOI:10.1103/PhysRevE.51.4282  </a:t>
-            </a:r>
-            <a:r>
-              <a:rPr sz="1100" b="0" i="0">
-                <a:solidFill>
-                  <a:srgbClr val="5A5A5A"/>
-                </a:solidFill>
-                <a:latin typeface="Calibri"/>
-                <a:hlinkClick r:id="rId17"/>
-              </a:rPr>
-              <a:t>arXiv:0708.3339  </a:t>
-            </a:r>
-            <a:r>
-              <a:rPr sz="1100" b="0" i="0">
-                <a:solidFill>
-                  <a:srgbClr val="5A5A5A"/>
-                </a:solidFill>
-                <a:latin typeface="Calibri"/>
-                <a:hlinkClick r:id="rId18"/>
-              </a:rPr>
-              <a:t>pressure analysis</a:t>
-            </a:r>
-          </a:p>
-        </p:txBody>
-      </p:sp>
-      <p:sp>
-        <p:nvSpPr>
           <p:cNvPr id="106" name="TextBox 106"/>
           <p:cNvSpPr txBox="1"/>
           <p:nvPr/>
@@ -10801,6 +9911,789 @@
                 <a:cs typeface="Calibri"/>
               </a:rPr>
               <a:t>Team Raksha  |  Team Leader: Shounak Joshi</a:t>
+            </a:r>
+          </a:p>
+        </p:txBody>
+      </p:sp>
+      <p:sp>
+        <p:nvSpPr>
+          <p:cNvPr id="112" name="R6 colh"/>
+          <p:cNvSpPr txBox="1"/>
+          <p:nvPr/>
+        </p:nvSpPr>
+        <p:spPr>
+          <a:xfrm>
+            <a:off x="731520" y="3017520"/>
+            <a:ext cx="5120640" cy="384048"/>
+          </a:xfrm>
+          <a:prstGeom prst="rect">
+            <a:avLst/>
+          </a:prstGeom>
+          <a:noFill/>
+        </p:spPr>
+        <p:txBody>
+          <a:bodyPr wrap="square" anchor="ctr" lIns="45720" rIns="45720" tIns="18288" bIns="18288"/>
+          <a:lstStyle/>
+          <a:p>
+            <a:pPr algn="l"/>
+            <a:r>
+              <a:rPr sz="1300" b="1" i="0">
+                <a:solidFill>
+                  <a:srgbClr val="1E2761"/>
+                </a:solidFill>
+                <a:latin typeface="Calibri"/>
+              </a:rPr>
+              <a:t>Count the overlap</a:t>
+            </a:r>
+          </a:p>
+        </p:txBody>
+      </p:sp>
+      <p:sp>
+        <p:nvSpPr>
+          <p:cNvPr id="113" name="R6 row"/>
+          <p:cNvSpPr txBox="1"/>
+          <p:nvPr/>
+        </p:nvSpPr>
+        <p:spPr>
+          <a:xfrm>
+            <a:off x="731520" y="3456432"/>
+            <a:ext cx="5120640" cy="384048"/>
+          </a:xfrm>
+          <a:prstGeom prst="rect">
+            <a:avLst/>
+          </a:prstGeom>
+          <a:noFill/>
+        </p:spPr>
+        <p:txBody>
+          <a:bodyPr wrap="square" anchor="ctr" lIns="45720" rIns="45720" tIns="18288" bIns="18288"/>
+          <a:lstStyle/>
+          <a:p>
+            <a:pPr algn="l"/>
+            <a:r>
+              <a:rPr sz="1050" b="0" i="0">
+                <a:solidFill>
+                  <a:srgbClr val="5A5A5A"/>
+                </a:solidFill>
+                <a:latin typeface="Calibri"/>
+                <a:hlinkClick r:id="rId9"/>
+              </a:rPr>
+              <a:t>CSRNet, CVPR 2018</a:t>
+            </a:r>
+          </a:p>
+        </p:txBody>
+      </p:sp>
+      <p:sp>
+        <p:nvSpPr>
+          <p:cNvPr id="114" name="R6 row"/>
+          <p:cNvSpPr txBox="1"/>
+          <p:nvPr/>
+        </p:nvSpPr>
+        <p:spPr>
+          <a:xfrm>
+            <a:off x="731520" y="3867911"/>
+            <a:ext cx="5120640" cy="384048"/>
+          </a:xfrm>
+          <a:prstGeom prst="rect">
+            <a:avLst/>
+          </a:prstGeom>
+          <a:noFill/>
+        </p:spPr>
+        <p:txBody>
+          <a:bodyPr wrap="square" anchor="ctr" lIns="45720" rIns="45720" tIns="18288" bIns="18288"/>
+          <a:lstStyle/>
+          <a:p>
+            <a:pPr algn="l"/>
+            <a:r>
+              <a:rPr sz="1050" b="0" i="0">
+                <a:solidFill>
+                  <a:srgbClr val="5A5A5A"/>
+                </a:solidFill>
+                <a:latin typeface="Calibri"/>
+                <a:hlinkClick r:id="rId10"/>
+              </a:rPr>
+              <a:t>Bayesian Loss, ICCV 2019</a:t>
+            </a:r>
+          </a:p>
+        </p:txBody>
+      </p:sp>
+      <p:sp>
+        <p:nvSpPr>
+          <p:cNvPr id="115" name="R6 row"/>
+          <p:cNvSpPr txBox="1"/>
+          <p:nvPr/>
+        </p:nvSpPr>
+        <p:spPr>
+          <a:xfrm>
+            <a:off x="731520" y="4279392"/>
+            <a:ext cx="5120640" cy="384048"/>
+          </a:xfrm>
+          <a:prstGeom prst="rect">
+            <a:avLst/>
+          </a:prstGeom>
+          <a:noFill/>
+        </p:spPr>
+        <p:txBody>
+          <a:bodyPr wrap="square" anchor="ctr" lIns="45720" rIns="45720" tIns="18288" bIns="18288"/>
+          <a:lstStyle/>
+          <a:p>
+            <a:pPr algn="l"/>
+            <a:r>
+              <a:rPr sz="1050" b="0" i="0">
+                <a:solidFill>
+                  <a:srgbClr val="5A5A5A"/>
+                </a:solidFill>
+                <a:latin typeface="Calibri"/>
+                <a:hlinkClick r:id="rId11"/>
+              </a:rPr>
+              <a:t>DM-Count, NeurIPS 2020</a:t>
+            </a:r>
+          </a:p>
+        </p:txBody>
+      </p:sp>
+      <p:sp>
+        <p:nvSpPr>
+          <p:cNvPr id="116" name="R6 row"/>
+          <p:cNvSpPr txBox="1"/>
+          <p:nvPr/>
+        </p:nvSpPr>
+        <p:spPr>
+          <a:xfrm>
+            <a:off x="731520" y="4690872"/>
+            <a:ext cx="5120640" cy="384048"/>
+          </a:xfrm>
+          <a:prstGeom prst="rect">
+            <a:avLst/>
+          </a:prstGeom>
+          <a:noFill/>
+        </p:spPr>
+        <p:txBody>
+          <a:bodyPr wrap="square" anchor="ctr" lIns="45720" rIns="45720" tIns="18288" bIns="18288"/>
+          <a:lstStyle/>
+          <a:p>
+            <a:pPr algn="l"/>
+            <a:r>
+              <a:rPr sz="1050" b="0" i="0">
+                <a:solidFill>
+                  <a:srgbClr val="5A5A5A"/>
+                </a:solidFill>
+                <a:latin typeface="Calibri"/>
+                <a:hlinkClick r:id="rId20"/>
+              </a:rPr>
+              <a:t>P2PNet, ICCV 2021</a:t>
+            </a:r>
+          </a:p>
+        </p:txBody>
+      </p:sp>
+      <p:sp>
+        <p:nvSpPr>
+          <p:cNvPr id="117" name="R6 row"/>
+          <p:cNvSpPr txBox="1"/>
+          <p:nvPr/>
+        </p:nvSpPr>
+        <p:spPr>
+          <a:xfrm>
+            <a:off x="731520" y="5102352"/>
+            <a:ext cx="5120640" cy="384048"/>
+          </a:xfrm>
+          <a:prstGeom prst="rect">
+            <a:avLst/>
+          </a:prstGeom>
+          <a:noFill/>
+        </p:spPr>
+        <p:txBody>
+          <a:bodyPr wrap="square" anchor="ctr" lIns="45720" rIns="45720" tIns="18288" bIns="18288"/>
+          <a:lstStyle/>
+          <a:p>
+            <a:pPr algn="l"/>
+            <a:r>
+              <a:rPr sz="1050" b="0" i="0">
+                <a:solidFill>
+                  <a:srgbClr val="5A5A5A"/>
+                </a:solidFill>
+                <a:latin typeface="Calibri"/>
+                <a:hlinkClick r:id="rId21"/>
+              </a:rPr>
+              <a:t>STEERER / APGCC, 2023-24</a:t>
+            </a:r>
+          </a:p>
+        </p:txBody>
+      </p:sp>
+      <p:sp>
+        <p:nvSpPr>
+          <p:cNvPr id="118" name="R6 row"/>
+          <p:cNvSpPr txBox="1"/>
+          <p:nvPr/>
+        </p:nvSpPr>
+        <p:spPr>
+          <a:xfrm>
+            <a:off x="731520" y="5513831"/>
+            <a:ext cx="5120640" cy="384048"/>
+          </a:xfrm>
+          <a:prstGeom prst="rect">
+            <a:avLst/>
+          </a:prstGeom>
+          <a:noFill/>
+        </p:spPr>
+        <p:txBody>
+          <a:bodyPr wrap="square" anchor="ctr" lIns="45720" rIns="45720" tIns="18288" bIns="18288"/>
+          <a:lstStyle/>
+          <a:p>
+            <a:pPr algn="l"/>
+            <a:r>
+              <a:rPr sz="1050" b="0" i="0">
+                <a:solidFill>
+                  <a:srgbClr val="5A5A5A"/>
+                </a:solidFill>
+                <a:latin typeface="Calibri"/>
+              </a:rPr>
+              <a:t>Tests: ShanghaiTech, QNRF, NWPU</a:t>
+            </a:r>
+          </a:p>
+        </p:txBody>
+      </p:sp>
+      <p:sp>
+        <p:nvSpPr>
+          <p:cNvPr id="119" name="R6 colh"/>
+          <p:cNvSpPr txBox="1"/>
+          <p:nvPr/>
+        </p:nvSpPr>
+        <p:spPr>
+          <a:xfrm>
+            <a:off x="6400800" y="3017520"/>
+            <a:ext cx="5120640" cy="384048"/>
+          </a:xfrm>
+          <a:prstGeom prst="rect">
+            <a:avLst/>
+          </a:prstGeom>
+          <a:noFill/>
+        </p:spPr>
+        <p:txBody>
+          <a:bodyPr wrap="square" anchor="ctr" lIns="45720" rIns="45720" tIns="18288" bIns="18288"/>
+          <a:lstStyle/>
+          <a:p>
+            <a:pPr algn="l"/>
+            <a:r>
+              <a:rPr sz="1300" b="1" i="0">
+                <a:solidFill>
+                  <a:srgbClr val="1E2761"/>
+                </a:solidFill>
+                <a:latin typeface="Calibri"/>
+              </a:rPr>
+              <a:t>Ground and currents</a:t>
+            </a:r>
+          </a:p>
+        </p:txBody>
+      </p:sp>
+      <p:sp>
+        <p:nvSpPr>
+          <p:cNvPr id="120" name="R6 row"/>
+          <p:cNvSpPr txBox="1"/>
+          <p:nvPr/>
+        </p:nvSpPr>
+        <p:spPr>
+          <a:xfrm>
+            <a:off x="6400800" y="3456432"/>
+            <a:ext cx="5120640" cy="384048"/>
+          </a:xfrm>
+          <a:prstGeom prst="rect">
+            <a:avLst/>
+          </a:prstGeom>
+          <a:noFill/>
+        </p:spPr>
+        <p:txBody>
+          <a:bodyPr wrap="square" anchor="ctr" lIns="45720" rIns="45720" tIns="18288" bIns="18288"/>
+          <a:lstStyle/>
+          <a:p>
+            <a:pPr algn="l"/>
+            <a:r>
+              <a:rPr sz="1050" b="0" i="0">
+                <a:solidFill>
+                  <a:srgbClr val="5A5A5A"/>
+                </a:solidFill>
+                <a:latin typeface="Calibri"/>
+                <a:hlinkClick r:id="rId12"/>
+              </a:rPr>
+              <a:t>Chan perspective maps, CVPR 2008</a:t>
+            </a:r>
+          </a:p>
+        </p:txBody>
+      </p:sp>
+      <p:sp>
+        <p:nvSpPr>
+          <p:cNvPr id="121" name="R6 row"/>
+          <p:cNvSpPr txBox="1"/>
+          <p:nvPr/>
+        </p:nvSpPr>
+        <p:spPr>
+          <a:xfrm>
+            <a:off x="6400800" y="3867911"/>
+            <a:ext cx="5120640" cy="384048"/>
+          </a:xfrm>
+          <a:prstGeom prst="rect">
+            <a:avLst/>
+          </a:prstGeom>
+          <a:noFill/>
+        </p:spPr>
+        <p:txBody>
+          <a:bodyPr wrap="square" anchor="ctr" lIns="45720" rIns="45720" tIns="18288" bIns="18288"/>
+          <a:lstStyle/>
+          <a:p>
+            <a:pPr algn="l"/>
+            <a:r>
+              <a:rPr sz="1050" b="0" i="0">
+                <a:solidFill>
+                  <a:srgbClr val="5A5A5A"/>
+                </a:solidFill>
+                <a:latin typeface="Calibri"/>
+                <a:hlinkClick r:id="rId13"/>
+              </a:rPr>
+              <a:t>Zhang ground-plane fusion, CVPR 2019</a:t>
+            </a:r>
+          </a:p>
+        </p:txBody>
+      </p:sp>
+      <p:sp>
+        <p:nvSpPr>
+          <p:cNvPr id="122" name="R6 row"/>
+          <p:cNvSpPr txBox="1"/>
+          <p:nvPr/>
+        </p:nvSpPr>
+        <p:spPr>
+          <a:xfrm>
+            <a:off x="6400800" y="4279392"/>
+            <a:ext cx="5120640" cy="384048"/>
+          </a:xfrm>
+          <a:prstGeom prst="rect">
+            <a:avLst/>
+          </a:prstGeom>
+          <a:noFill/>
+        </p:spPr>
+        <p:txBody>
+          <a:bodyPr wrap="square" anchor="ctr" lIns="45720" rIns="45720" tIns="18288" bIns="18288"/>
+          <a:lstStyle/>
+          <a:p>
+            <a:pPr algn="l"/>
+            <a:r>
+              <a:rPr sz="1050" b="0" i="0">
+                <a:solidFill>
+                  <a:srgbClr val="5A5A5A"/>
+                </a:solidFill>
+                <a:latin typeface="Calibri"/>
+                <a:hlinkClick r:id="rId22"/>
+              </a:rPr>
+              <a:t>PACNN perspective, CVPR 2019</a:t>
+            </a:r>
+          </a:p>
+        </p:txBody>
+      </p:sp>
+      <p:sp>
+        <p:nvSpPr>
+          <p:cNvPr id="123" name="R6 row"/>
+          <p:cNvSpPr txBox="1"/>
+          <p:nvPr/>
+        </p:nvSpPr>
+        <p:spPr>
+          <a:xfrm>
+            <a:off x="6400800" y="4690872"/>
+            <a:ext cx="5120640" cy="384048"/>
+          </a:xfrm>
+          <a:prstGeom prst="rect">
+            <a:avLst/>
+          </a:prstGeom>
+          <a:noFill/>
+        </p:spPr>
+        <p:txBody>
+          <a:bodyPr wrap="square" anchor="ctr" lIns="45720" rIns="45720" tIns="18288" bIns="18288"/>
+          <a:lstStyle/>
+          <a:p>
+            <a:pPr algn="l"/>
+            <a:r>
+              <a:rPr sz="1050" b="0" i="0">
+                <a:solidFill>
+                  <a:srgbClr val="5A5A5A"/>
+                </a:solidFill>
+                <a:latin typeface="Calibri"/>
+                <a:hlinkClick r:id="rId14"/>
+              </a:rPr>
+              <a:t>Mehran social force, CVPR 2009</a:t>
+            </a:r>
+          </a:p>
+        </p:txBody>
+      </p:sp>
+      <p:sp>
+        <p:nvSpPr>
+          <p:cNvPr id="124" name="R6 row"/>
+          <p:cNvSpPr txBox="1"/>
+          <p:nvPr/>
+        </p:nvSpPr>
+        <p:spPr>
+          <a:xfrm>
+            <a:off x="6400800" y="5102352"/>
+            <a:ext cx="5120640" cy="384048"/>
+          </a:xfrm>
+          <a:prstGeom prst="rect">
+            <a:avLst/>
+          </a:prstGeom>
+          <a:noFill/>
+        </p:spPr>
+        <p:txBody>
+          <a:bodyPr wrap="square" anchor="ctr" lIns="45720" rIns="45720" tIns="18288" bIns="18288"/>
+          <a:lstStyle/>
+          <a:p>
+            <a:pPr algn="l"/>
+            <a:r>
+              <a:rPr sz="1050" b="0" i="0">
+                <a:solidFill>
+                  <a:srgbClr val="5A5A5A"/>
+                </a:solidFill>
+                <a:latin typeface="Calibri"/>
+                <a:hlinkClick r:id="rId15"/>
+              </a:rPr>
+              <a:t>Mehran streaklines, ECCV 2010</a:t>
+            </a:r>
+          </a:p>
+        </p:txBody>
+      </p:sp>
+      <p:sp>
+        <p:nvSpPr>
+          <p:cNvPr id="125" name="R6 row"/>
+          <p:cNvSpPr txBox="1"/>
+          <p:nvPr/>
+        </p:nvSpPr>
+        <p:spPr>
+          <a:xfrm>
+            <a:off x="6400800" y="5513831"/>
+            <a:ext cx="5120640" cy="384048"/>
+          </a:xfrm>
+          <a:prstGeom prst="rect">
+            <a:avLst/>
+          </a:prstGeom>
+          <a:noFill/>
+        </p:spPr>
+        <p:txBody>
+          <a:bodyPr wrap="square" anchor="ctr" lIns="45720" rIns="45720" tIns="18288" bIns="18288"/>
+          <a:lstStyle/>
+          <a:p>
+            <a:pPr algn="l"/>
+            <a:r>
+              <a:rPr sz="1050" b="0" i="0">
+                <a:solidFill>
+                  <a:srgbClr val="5A5A5A"/>
+                </a:solidFill>
+                <a:latin typeface="Calibri"/>
+                <a:hlinkClick r:id="rId23"/>
+              </a:rPr>
+              <a:t>DIS optical flow (OpenCV)</a:t>
+            </a:r>
+          </a:p>
+        </p:txBody>
+      </p:sp>
+      <p:sp>
+        <p:nvSpPr>
+          <p:cNvPr id="126" name="R6 colh"/>
+          <p:cNvSpPr txBox="1"/>
+          <p:nvPr/>
+        </p:nvSpPr>
+        <p:spPr>
+          <a:xfrm>
+            <a:off x="12070080" y="3017520"/>
+            <a:ext cx="5120640" cy="384048"/>
+          </a:xfrm>
+          <a:prstGeom prst="rect">
+            <a:avLst/>
+          </a:prstGeom>
+          <a:noFill/>
+        </p:spPr>
+        <p:txBody>
+          <a:bodyPr wrap="square" anchor="ctr" lIns="45720" rIns="45720" tIns="18288" bIns="18288"/>
+          <a:lstStyle/>
+          <a:p>
+            <a:pPr algn="l"/>
+            <a:r>
+              <a:rPr sz="1300" b="1" i="0">
+                <a:solidFill>
+                  <a:srgbClr val="1E2761"/>
+                </a:solidFill>
+                <a:latin typeface="Calibri"/>
+              </a:rPr>
+              <a:t>Pressure and risk</a:t>
+            </a:r>
+          </a:p>
+        </p:txBody>
+      </p:sp>
+      <p:sp>
+        <p:nvSpPr>
+          <p:cNvPr id="127" name="R6 row"/>
+          <p:cNvSpPr txBox="1"/>
+          <p:nvPr/>
+        </p:nvSpPr>
+        <p:spPr>
+          <a:xfrm>
+            <a:off x="12070080" y="3456432"/>
+            <a:ext cx="5120640" cy="384048"/>
+          </a:xfrm>
+          <a:prstGeom prst="rect">
+            <a:avLst/>
+          </a:prstGeom>
+          <a:noFill/>
+        </p:spPr>
+        <p:txBody>
+          <a:bodyPr wrap="square" anchor="ctr" lIns="45720" rIns="45720" tIns="18288" bIns="18288"/>
+          <a:lstStyle/>
+          <a:p>
+            <a:pPr algn="l"/>
+            <a:r>
+              <a:rPr sz="1050" b="0" i="0">
+                <a:solidFill>
+                  <a:srgbClr val="5A5A5A"/>
+                </a:solidFill>
+                <a:latin typeface="Calibri"/>
+                <a:hlinkClick r:id="rId16"/>
+              </a:rPr>
+              <a:t>Helbing social force, 1995</a:t>
+            </a:r>
+          </a:p>
+        </p:txBody>
+      </p:sp>
+      <p:sp>
+        <p:nvSpPr>
+          <p:cNvPr id="128" name="R6 row"/>
+          <p:cNvSpPr txBox="1"/>
+          <p:nvPr/>
+        </p:nvSpPr>
+        <p:spPr>
+          <a:xfrm>
+            <a:off x="12070080" y="3867911"/>
+            <a:ext cx="5120640" cy="384048"/>
+          </a:xfrm>
+          <a:prstGeom prst="rect">
+            <a:avLst/>
+          </a:prstGeom>
+          <a:noFill/>
+        </p:spPr>
+        <p:txBody>
+          <a:bodyPr wrap="square" anchor="ctr" lIns="45720" rIns="45720" tIns="18288" bIns="18288"/>
+          <a:lstStyle/>
+          <a:p>
+            <a:pPr algn="l"/>
+            <a:r>
+              <a:rPr sz="1050" b="0" i="0">
+                <a:solidFill>
+                  <a:srgbClr val="5A5A5A"/>
+                </a:solidFill>
+                <a:latin typeface="Calibri"/>
+                <a:hlinkClick r:id="rId17"/>
+              </a:rPr>
+              <a:t>Helbing crowd disasters, 2007</a:t>
+            </a:r>
+          </a:p>
+        </p:txBody>
+      </p:sp>
+      <p:sp>
+        <p:nvSpPr>
+          <p:cNvPr id="129" name="R6 row"/>
+          <p:cNvSpPr txBox="1"/>
+          <p:nvPr/>
+        </p:nvSpPr>
+        <p:spPr>
+          <a:xfrm>
+            <a:off x="12070080" y="4279392"/>
+            <a:ext cx="5120640" cy="384048"/>
+          </a:xfrm>
+          <a:prstGeom prst="rect">
+            <a:avLst/>
+          </a:prstGeom>
+          <a:noFill/>
+        </p:spPr>
+        <p:txBody>
+          <a:bodyPr wrap="square" anchor="ctr" lIns="45720" rIns="45720" tIns="18288" bIns="18288"/>
+          <a:lstStyle/>
+          <a:p>
+            <a:pPr algn="l"/>
+            <a:r>
+              <a:rPr sz="1050" b="0" i="0">
+                <a:solidFill>
+                  <a:srgbClr val="5A5A5A"/>
+                </a:solidFill>
+                <a:latin typeface="Calibri"/>
+                <a:hlinkClick r:id="rId18"/>
+              </a:rPr>
+              <a:t>Johansson pressure, 2008</a:t>
+            </a:r>
+          </a:p>
+        </p:txBody>
+      </p:sp>
+      <p:sp>
+        <p:nvSpPr>
+          <p:cNvPr id="130" name="R6 row"/>
+          <p:cNvSpPr txBox="1"/>
+          <p:nvPr/>
+        </p:nvSpPr>
+        <p:spPr>
+          <a:xfrm>
+            <a:off x="12070080" y="4690872"/>
+            <a:ext cx="5120640" cy="384048"/>
+          </a:xfrm>
+          <a:prstGeom prst="rect">
+            <a:avLst/>
+          </a:prstGeom>
+          <a:noFill/>
+        </p:spPr>
+        <p:txBody>
+          <a:bodyPr wrap="square" anchor="ctr" lIns="45720" rIns="45720" tIns="18288" bIns="18288"/>
+          <a:lstStyle/>
+          <a:p>
+            <a:pPr algn="l"/>
+            <a:r>
+              <a:rPr sz="1050" b="0" i="0">
+                <a:solidFill>
+                  <a:srgbClr val="5A5A5A"/>
+                </a:solidFill>
+                <a:latin typeface="Calibri"/>
+                <a:hlinkClick r:id="rId24"/>
+              </a:rPr>
+              <a:t>Hughes continuum, 2002</a:t>
+            </a:r>
+          </a:p>
+        </p:txBody>
+      </p:sp>
+      <p:sp>
+        <p:nvSpPr>
+          <p:cNvPr id="131" name="R6 row"/>
+          <p:cNvSpPr txBox="1"/>
+          <p:nvPr/>
+        </p:nvSpPr>
+        <p:spPr>
+          <a:xfrm>
+            <a:off x="12070080" y="5102352"/>
+            <a:ext cx="5120640" cy="384048"/>
+          </a:xfrm>
+          <a:prstGeom prst="rect">
+            <a:avLst/>
+          </a:prstGeom>
+          <a:noFill/>
+        </p:spPr>
+        <p:txBody>
+          <a:bodyPr wrap="square" anchor="ctr" lIns="45720" rIns="45720" tIns="18288" bIns="18288"/>
+          <a:lstStyle/>
+          <a:p>
+            <a:pPr algn="l"/>
+            <a:r>
+              <a:rPr sz="1050" b="0" i="0">
+                <a:solidFill>
+                  <a:srgbClr val="5A5A5A"/>
+                </a:solidFill>
+                <a:latin typeface="Calibri"/>
+                <a:hlinkClick r:id="rId25"/>
+              </a:rPr>
+              <a:t>Nakayama divergence, BMVC 2025</a:t>
+            </a:r>
+          </a:p>
+        </p:txBody>
+      </p:sp>
+      <p:sp>
+        <p:nvSpPr>
+          <p:cNvPr id="132" name="R6 row"/>
+          <p:cNvSpPr txBox="1"/>
+          <p:nvPr/>
+        </p:nvSpPr>
+        <p:spPr>
+          <a:xfrm>
+            <a:off x="12070080" y="5513831"/>
+            <a:ext cx="5120640" cy="384048"/>
+          </a:xfrm>
+          <a:prstGeom prst="rect">
+            <a:avLst/>
+          </a:prstGeom>
+          <a:noFill/>
+        </p:spPr>
+        <p:txBody>
+          <a:bodyPr wrap="square" anchor="ctr" lIns="45720" rIns="45720" tIns="18288" bIns="18288"/>
+          <a:lstStyle/>
+          <a:p>
+            <a:pPr algn="l"/>
+            <a:r>
+              <a:rPr sz="1050" b="0" i="0">
+                <a:solidFill>
+                  <a:srgbClr val="5A5A5A"/>
+                </a:solidFill>
+                <a:latin typeface="Calibri"/>
+                <a:hlinkClick r:id="rId26"/>
+              </a:rPr>
+              <a:t>Harding early warning, PLoS ONE 2011</a:t>
+            </a:r>
+          </a:p>
+        </p:txBody>
+      </p:sp>
+      <p:sp>
+        <p:nvSpPr>
+          <p:cNvPr id="133" name="R6 build"/>
+          <p:cNvSpPr txBox="1"/>
+          <p:nvPr/>
+        </p:nvSpPr>
+        <p:spPr>
+          <a:xfrm>
+            <a:off x="731520" y="6053328"/>
+            <a:ext cx="16824960" cy="384048"/>
+          </a:xfrm>
+          <a:prstGeom prst="rect">
+            <a:avLst/>
+          </a:prstGeom>
+          <a:noFill/>
+        </p:spPr>
+        <p:txBody>
+          <a:bodyPr wrap="square" anchor="ctr" lIns="45720" rIns="45720" tIns="18288" bIns="18288"/>
+          <a:lstStyle/>
+          <a:p>
+            <a:pPr algn="l"/>
+            <a:r>
+              <a:rPr sz="1050" b="1" i="0">
+                <a:solidFill>
+                  <a:srgbClr val="1E2761"/>
+                </a:solidFill>
+                <a:latin typeface="Calibri"/>
+              </a:rPr>
+              <a:t>Build from:  </a:t>
+            </a:r>
+            <a:r>
+              <a:rPr sz="1050" b="0" i="0">
+                <a:solidFill>
+                  <a:srgbClr val="5A5A5A"/>
+                </a:solidFill>
+                <a:latin typeface="Calibri"/>
+                <a:hlinkClick r:id="rId11"/>
+              </a:rPr>
+              <a:t>DM-Count code (MIT)  </a:t>
+            </a:r>
+            <a:r>
+              <a:rPr sz="1050" b="0" i="0">
+                <a:solidFill>
+                  <a:srgbClr val="5A5A5A"/>
+                </a:solidFill>
+                <a:latin typeface="Calibri"/>
+                <a:hlinkClick r:id="rId27"/>
+              </a:rPr>
+              <a:t>CSRNet model  </a:t>
+            </a:r>
+            <a:r>
+              <a:rPr sz="1050" b="0" i="0">
+                <a:solidFill>
+                  <a:srgbClr val="5A5A5A"/>
+                </a:solidFill>
+                <a:latin typeface="Calibri"/>
+                <a:hlinkClick r:id="rId28"/>
+              </a:rPr>
+              <a:t>homography calibrator  </a:t>
+            </a:r>
+            <a:r>
+              <a:rPr sz="1050" b="0" i="0">
+                <a:solidFill>
+                  <a:srgbClr val="5A5A5A"/>
+                </a:solidFill>
+                <a:latin typeface="Calibri"/>
+                <a:hlinkClick r:id="rId29"/>
+              </a:rPr>
+              <a:t>DeepStream custom-model docs</a:t>
             </a:r>
           </a:p>
         </p:txBody>

--- a/deck/Raksha_Hackathon2026_Simplified.pptx
+++ b/deck/Raksha_Hackathon2026_Simplified.pptx
@@ -5447,11 +5447,10 @@
                 </a:solidFill>
                 <a:latin typeface="Calibri"/>
               </a:rPr>
-              <a:t>Kumbh 2025</a:t>
-            </a:r>
-          </a:p>
-          <a:p>
-            <a:pPr algn="l"/>
+              <a:t>Hathras 2024</a:t>
+            </a:r>
+          </a:p>
+          <a:p>
             <a:r>
               <a:rPr sz="1500" b="0" i="0">
                 <a:solidFill>
@@ -5459,7 +5458,7 @@
                 </a:solidFill>
                 <a:latin typeface="Calibri"/>
               </a:rPr>
-              <a:t>2,751 cameras and AI alerts were live. The crush still killed 30.</a:t>
+              <a:t>121 dead. 80k permit, 250k crowd. Exits blocked.</a:t>
             </a:r>
           </a:p>
         </p:txBody>
@@ -5513,11 +5512,10 @@
                 </a:solidFill>
                 <a:latin typeface="Calibri"/>
               </a:rPr>
-              <a:t>Itaewon 2022</a:t>
-            </a:r>
-          </a:p>
-          <a:p>
-            <a:pPr algn="l"/>
+              <a:t>Mumbai 2017</a:t>
+            </a:r>
+          </a:p>
+          <a:p>
             <a:r>
               <a:rPr sz="1500" b="0" i="0">
                 <a:solidFill>
@@ -5525,7 +5523,7 @@
                 </a:solidFill>
                 <a:latin typeface="Calibri"/>
               </a:rPr>
-              <a:t>159 dead in a 3.2 metre alley. 11 calls ignored. No machine spoke up.</a:t>
+              <a:t>23 dead on a station footbridge. Rain, rush hour, no metering.</a:t>
             </a:r>
           </a:p>
         </p:txBody>
@@ -5634,7 +5632,7 @@
                 </a:solidFill>
                 <a:latin typeface="Calibri"/>
               </a:rPr>
-              <a:t>Four hours of human warning. No machine ever paged anyone.</a:t>
+              <a:t>The system saw it coming. No gate opened.</a:t>
             </a:r>
           </a:p>
         </p:txBody>
@@ -5758,7 +5756,7 @@
                 </a:solidFill>
                 <a:latin typeface="Calibri"/>
               </a:rPr>
-              <a:t>Itaewon, 29 October 2022</a:t>
+              <a:t>Kumbh, 29 January 2025</a:t>
             </a:r>
           </a:p>
         </p:txBody>
@@ -5834,11 +5832,8 @@
                 </a:solidFill>
                 <a:latin typeface="Calibri"/>
               </a:rPr>
-              <a:t>18:34</a:t>
-            </a:r>
-          </a:p>
-          <a:p>
-            <a:pPr algn="l"/>
+              <a:t>Months before</a:t>
+            </a:r>
             <a:r>
               <a:rPr sz="1400" b="0" i="0">
                 <a:solidFill>
@@ -5846,7 +5841,8 @@
                 </a:solidFill>
                 <a:latin typeface="Calibri"/>
               </a:rPr>
-              <a:t>First distress calls from the packed alley.</a:t>
+              <a:t>
+2,751 cameras and AI alerts go live.</a:t>
             </a:r>
           </a:p>
         </p:txBody>
@@ -5922,11 +5918,8 @@
                 </a:solidFill>
                 <a:latin typeface="Calibri"/>
               </a:rPr>
-              <a:t>hours pass</a:t>
-            </a:r>
-          </a:p>
-          <a:p>
-            <a:pPr algn="l"/>
+              <a:t>01:00</a:t>
+            </a:r>
             <a:r>
               <a:rPr sz="1400" b="0" i="0">
                 <a:solidFill>
@@ -5934,7 +5927,8 @@
                 </a:solidFill>
                 <a:latin typeface="Calibri"/>
               </a:rPr>
-              <a:t>Calls keep coming. No machine raises an alarm.</a:t>
+              <a:t>
+Barricades jumped at the Sangam nose. Crores press forward.</a:t>
             </a:r>
           </a:p>
         </p:txBody>
@@ -6010,11 +6004,8 @@
                 </a:solidFill>
                 <a:latin typeface="Calibri"/>
               </a:rPr>
-              <a:t>22:15</a:t>
-            </a:r>
-          </a:p>
-          <a:p>
-            <a:pPr algn="l"/>
+              <a:t>After</a:t>
+            </a:r>
             <a:r>
               <a:rPr sz="1400" b="0" i="0">
                 <a:solidFill>
@@ -6022,7 +6013,8 @@
                 </a:solidFill>
                 <a:latin typeface="Calibri"/>
               </a:rPr>
-              <a:t>The alley locks. 159 dead, 196 injured.</a:t>
+              <a:t>
+30 dead officially. The alarm watched. Nobody acted.</a:t>
             </a:r>
           </a:p>
         </p:txBody>

--- a/deck/Raksha_Hackathon2026_Simplified.pptx
+++ b/deck/Raksha_Hackathon2026_Simplified.pptx
@@ -7103,7 +7103,7 @@
                 </a:solidFill>
                 <a:latin typeface="Calibri"/>
               </a:rPr>
-              <a:t>Side track, kept</a:t>
+              <a:t>Warns before stillness</a:t>
             </a:r>
           </a:p>
           <a:p>
@@ -7115,7 +7115,7 @@
                 </a:solidFill>
                 <a:latin typeface="Calibri"/>
               </a:rPr>
-              <a:t>Below 2 people per m2, box IDs still run and feed the dossier. Already built.</a:t>
+              <a:t>Stop-and-go waves and rising pressure fire the alert while feet still move. Stillness is the accident, never the trigger.</a:t>
             </a:r>
           </a:p>
         </p:txBody>
@@ -7612,13 +7612,13 @@
           <a:p>
             <a:pPr algn="l"/>
             <a:r>
-              <a:rPr sz="1500" b="0" i="0">
+              <a:rPr sz="1400" b="0" i="0">
                 <a:solidFill>
                   <a:srgbClr val="111111"/>
                 </a:solidFill>
                 <a:latin typeface="Calibri"/>
               </a:rPr>
-              <a:t>Each edge box sends small JSON numbers, never raw video. Footage is discarded at the camera.</a:t>
+              <a:t>Each edge box keeps a 10-minute rolling buffer and sends small JSON numbers, never raw video. Only a confirmed Red alert exports its clip, signed, to the evidence pack.</a:t>
             </a:r>
           </a:p>
         </p:txBody>
@@ -7684,7 +7684,7 @@
                 </a:solidFill>
                 <a:latin typeface="Calibri"/>
               </a:rPr>
-              <a:t>Fixed gates are measured once. Kumbh ran 3-month camera surveys for its crowd alarm. Other views use relative levels.</a:t>
+              <a:t>Fixed gates are measured once. Kumbh ran 3-month camera surveys for its crowd alarm. PTZ or moved cameras fall back to relative levels until re-measured.</a:t>
             </a:r>
           </a:p>
         </p:txBody>
@@ -8816,9 +8816,7 @@
           </a:effectLst>
         </p:spPr>
         <p:txBody>
-          <a:bodyPr wrap="square" lIns="320040" tIns="109728" rIns="320040" bIns="109728" anchor="ctr" rtlCol="0">
-            <a:noAutofit/>
-          </a:bodyPr>
+          <a:bodyPr wrap="square" lIns="45720" tIns="18288" rIns="45720" bIns="18288" anchor="ctr" rtlCol="0"/>
           <a:lstStyle/>
           <a:p>
             <a:pPr algn="l">
@@ -8830,37 +8828,25 @@
               </a:spcAft>
             </a:pPr>
             <a:r>
-              <a:rPr lang="en-US" sz="2200" b="1" i="0" dirty="0">
+              <a:rPr sz="2000" b="1" i="0">
                 <a:solidFill>
                   <a:srgbClr val="1E2761"/>
                 </a:solidFill>
                 <a:latin typeface="Calibri"/>
-                <a:cs typeface="Calibri"/>
               </a:rPr>
               <a:t>Police</a:t>
             </a:r>
           </a:p>
           <a:p>
-            <a:pPr algn="l">
-              <a:lnSpc>
-                <a:spcPct val="100000"/>
-              </a:lnSpc>
-              <a:spcBef>
-                <a:spcPts val="0"/>
-              </a:spcBef>
-              <a:spcAft>
-                <a:spcPts val="0"/>
-              </a:spcAft>
-            </a:pPr>
-            <a:r>
-              <a:rPr lang="en-US" sz="1800" b="0" i="0" dirty="0">
+            <a:pPr algn="l"/>
+            <a:r>
+              <a:rPr sz="1500" b="0" i="0">
                 <a:solidFill>
                   <a:srgbClr val="111111"/>
                 </a:solidFill>
                 <a:latin typeface="Calibri"/>
-                <a:cs typeface="Calibri"/>
-              </a:rPr>
-              <a:t>Every alert, zone and action exports as one evidence pack in a click.</a:t>
+              </a:rPr>
+              <a:t>Every alert, zone and action exports as one evidence pack in a click, with the signed 10-minute incident clip.</a:t>
             </a:r>
           </a:p>
         </p:txBody>

--- a/deck/Raksha_Hackathon2026_Simplified.pptx
+++ b/deck/Raksha_Hackathon2026_Simplified.pptx
@@ -6983,7 +6983,7 @@
                 </a:solidFill>
                 <a:latin typeface="Calibri"/>
               </a:rPr>
-              <a:t>At crush density a detector scores F1 0.07 against 0.71 point-based. Counting error fell from 68 to 49 MAE. (NWPU-Crowd, ShanghaiTech)</a:t>
+              <a:t>Box detectors collapse under overlap: F1 0.07 vs 0.71 point-based. Density maps cut counting error 265 to 105 MAE. (NWPU-Crowd)</a:t>
             </a:r>
           </a:p>
         </p:txBody>
@@ -7109,13 +7109,13 @@
           <a:p>
             <a:pPr algn="l"/>
             <a:r>
-              <a:rPr sz="1350" b="0" i="0">
+              <a:rPr sz="1300" b="0" i="0">
                 <a:solidFill>
                   <a:srgbClr val="111111"/>
                 </a:solidFill>
                 <a:latin typeface="Calibri"/>
               </a:rPr>
-              <a:t>Stop-and-go waves and rising pressure fire the alert while feet still move. Stillness is the accident, never the trigger.</a:t>
+              <a:t>Stop-and-go waves and rising pressure fire the alert while feet still move. Shown on Hajj 2006 footage; multi-site trials are the pilot's job.</a:t>
             </a:r>
           </a:p>
         </p:txBody>
@@ -7299,7 +7299,7 @@
                 </a:solidFill>
                 <a:latin typeface="Calibri"/>
               </a:rPr>
-              <a:t>Head-density surface from video (Johansson 2008).</a:t>
+              <a:t>Head-density surface: each peak is one head, the sum is the count. (Johansson 2008).</a:t>
             </a:r>
           </a:p>
         </p:txBody>
@@ -7684,7 +7684,7 @@
                 </a:solidFill>
                 <a:latin typeface="Calibri"/>
               </a:rPr>
-              <a:t>Fixed gates are measured once. Kumbh ran 3-month camera surveys for its crowd alarm. PTZ or moved cameras fall back to relative levels until re-measured.</a:t>
+              <a:t>Fixed gates are measured once; Kumbh ran 3-month surveys for its alarm. Open grounds and PTZ cameras run relative levels plus entry counts.</a:t>
             </a:r>
           </a:p>
         </p:txBody>
@@ -7744,13 +7744,13 @@
           <a:p>
             <a:pPr algn="l"/>
             <a:r>
-              <a:rPr sz="1500" b="0" i="0">
+              <a:rPr sz="1400" b="0" i="0">
                 <a:solidFill>
                   <a:srgbClr val="111111"/>
                 </a:solidFill>
                 <a:latin typeface="Calibri"/>
               </a:rPr>
-              <a:t>Heatmaps cannot show a face. Saved video is blurred, wiped after 7 days, zero identity in core.</a:t>
+              <a:t>Heatmaps cannot show a face. Saved video is blurred, wiped after 7 days, zero identity in core. Police clips are access-logged under DPDP Act 2023 rules.</a:t>
             </a:r>
           </a:p>
         </p:txBody>
@@ -8298,13 +8298,13 @@
           <a:p>
             <a:pPr algn="l"/>
             <a:r>
-              <a:rPr sz="1400" b="0" i="0">
+              <a:rPr sz="1300" b="0" i="0">
                 <a:solidFill>
                   <a:srgbClr val="5A5A5A"/>
                 </a:solidFill>
                 <a:latin typeface="Calibri"/>
               </a:rPr>
-              <a:t>Raw video never leaves the camera box.</a:t>
+              <a:t>One Jetson-class box (about $250, 15 watts) per 1 to 4 cameras. Reuses existing CCTV. Pilot covers night, rain, oblique angles.</a:t>
             </a:r>
           </a:p>
         </p:txBody>
@@ -8436,13 +8436,13 @@
           <a:p>
             <a:pPr algn="l"/>
             <a:r>
-              <a:rPr sz="1200" b="0" i="0">
+              <a:rPr sz="1150" b="0" i="0">
                 <a:solidFill>
                   <a:srgbClr val="111111"/>
                 </a:solidFill>
                 <a:latin typeface="Calibri"/>
               </a:rPr>
-              <a:t>Pressure crossed the warning line before turbulence began. The accident came after. Hajj 2006 data (Johansson et al.).</a:t>
+              <a:t>Pressure p = density x velocity variance. Hajj 2006: turbulence onset at 0.02 per s2, accident after. (Johansson et al.)</a:t>
             </a:r>
           </a:p>
         </p:txBody>
@@ -8714,7 +8714,7 @@
                 </a:solidFill>
                 <a:latin typeface="Calibri"/>
               </a:rPr>
-              <a:t>Pressure rising at Gate B opens overflow at Gate A upstream. Security acts before the jam, not after.</a:t>
+              <a:t>Pressure at Gate B opens overflow at Gate A upstream. Every red has an owner, a timer, and a log.</a:t>
             </a:r>
           </a:p>
         </p:txBody>
@@ -9091,7 +9091,7 @@
                 </a:solidFill>
                 <a:latin typeface="Calibri"/>
               </a:rPr>
-              <a:t>Guards watch the zone closely. Overflow gates get ready.</a:t>
+              <a:t>Auto-pages the zone guard with an ack timer. Overflow gates get ready.</a:t>
             </a:r>
           </a:p>
         </p:txBody>
@@ -9179,7 +9179,7 @@
                 </a:solidFill>
                 <a:latin typeface="Calibri"/>
               </a:rPr>
-              <a:t>Guards get steps on their handsets; a human confirms before any PA or door release.</a:t>
+              <a:t>Guards get steps on their handsets and confirm. Unanswered reds climb the chain automatically.</a:t>
             </a:r>
           </a:p>
         </p:txBody>
@@ -9343,7 +9343,7 @@
                 </a:solidFill>
                 <a:latin typeface="Calibri"/>
               </a:rPr>
-              <a:t>Pilot targets: warn before critical, page guards in seconds, log every step.</a:t>
+              <a:t>Pilot targets: warn before critical, page guards in seconds, publish the false-alarm rate, log every step.</a:t>
             </a:r>
           </a:p>
         </p:txBody>
@@ -10631,7 +10631,7 @@
                 </a:solidFill>
                 <a:latin typeface="Calibri"/>
               </a:rPr>
-              <a:t>Build from:  </a:t>
+              <a:t>Status: idea stage, side-track demo built. Build from:  </a:t>
             </a:r>
             <a:r>
               <a:rPr sz="1050" b="0" i="0">

--- a/deck/Raksha_Hackathon2026_Simplified.pptx
+++ b/deck/Raksha_Hackathon2026_Simplified.pptx
@@ -6983,7 +6983,7 @@
                 </a:solidFill>
                 <a:latin typeface="Calibri"/>
               </a:rPr>
-              <a:t>Box detectors collapse under overlap: F1 0.07 vs 0.71 point-based. Density maps cut counting error 265 to 105 MAE. (NWPU-Crowd)</a:t>
+              <a:t>Published research shows box detectors collapse under overlap: F1 0.07 vs 0.71 point-based. Density maps cut counting error 265 to 105 MAE. (NWPU-Crowd)</a:t>
             </a:r>
           </a:p>
         </p:txBody>
@@ -8442,7 +8442,7 @@
                 </a:solidFill>
                 <a:latin typeface="Calibri"/>
               </a:rPr>
-              <a:t>Pressure p = density x velocity variance. Hajj 2006: turbulence onset at 0.02 per s2, accident after. (Johansson et al.)</a:t>
+              <a:t>Pressure (density x movement variance) crossed its warning line before turbulence began. The accident came after. Hajj 2006 data (Johansson et al.).</a:t>
             </a:r>
           </a:p>
         </p:txBody>
@@ -8708,13 +8708,13 @@
           <a:p>
             <a:pPr algn="l"/>
             <a:r>
-              <a:rPr sz="1600" b="1" i="0">
+              <a:rPr sz="1500" b="1" i="0">
                 <a:solidFill>
                   <a:srgbClr val="FFFFFF"/>
                 </a:solidFill>
                 <a:latin typeface="Calibri"/>
               </a:rPr>
-              <a:t>Pressure at Gate B opens overflow at Gate A upstream. Every red has an owner, a timer, and a log.</a:t>
+              <a:t>Pressure at Gate B opens overflow at Gate A upstream. Kumbh's system watched without forcing an answer. Ours requires one.</a:t>
             </a:r>
           </a:p>
         </p:txBody>
@@ -9091,7 +9091,7 @@
                 </a:solidFill>
                 <a:latin typeface="Calibri"/>
               </a:rPr>
-              <a:t>Auto-pages the zone guard with an ack timer. Overflow gates get ready.</a:t>
+              <a:t>Auto-pages the zone guard with a 2-minute ack timer. Overflow gates get ready.</a:t>
             </a:r>
           </a:p>
         </p:txBody>
@@ -9179,7 +9179,7 @@
                 </a:solidFill>
                 <a:latin typeface="Calibri"/>
               </a:rPr>
-              <a:t>Guards get steps on their handsets and confirm. Unanswered reds climb the chain automatically.</a:t>
+              <a:t>Guards confirm on handsets; unanswered reds climb to venue command, then city control.</a:t>
             </a:r>
           </a:p>
         </p:txBody>
@@ -9337,13 +9337,13 @@
           <a:p>
             <a:pPr algn="l"/>
             <a:r>
-              <a:rPr sz="1500" b="1" i="0">
+              <a:rPr sz="1400" b="1" i="0">
                 <a:solidFill>
                   <a:srgbClr val="1E2761"/>
                 </a:solidFill>
                 <a:latin typeface="Calibri"/>
               </a:rPr>
-              <a:t>Pilot targets: warn before critical, page guards in seconds, publish the false-alarm rate, log every step.</a:t>
+              <a:t>Pilot targets: warn before critical, page guards in seconds, publish the false-alarm rate, log every step. Still to prove: thresholds across venue types, calibration without surveys.</a:t>
             </a:r>
           </a:p>
         </p:txBody>
@@ -10611,8 +10611,8 @@
         </p:nvSpPr>
         <p:spPr>
           <a:xfrm>
-            <a:off x="731520" y="6053328"/>
-            <a:ext cx="16824960" cy="384048"/>
+            <a:off x="731520" y="5989320"/>
+            <a:ext cx="16824960" cy="566928"/>
           </a:xfrm>
           <a:prstGeom prst="rect">
             <a:avLst/>
@@ -10631,10 +10631,22 @@
                 </a:solidFill>
                 <a:latin typeface="Calibri"/>
               </a:rPr>
-              <a:t>Status: idea stage, side-track demo built. Build from:  </a:t>
-            </a:r>
-            <a:r>
-              <a:rPr sz="1050" b="0" i="0">
+              <a:t>Status: idea stage. Numbers above are published research we build on, not our measurements.</a:t>
+            </a:r>
+          </a:p>
+          <a:p>
+            <a:pPr algn="l"/>
+            <a:r>
+              <a:rPr sz="1000" b="0" i="0">
+                <a:solidFill>
+                  <a:srgbClr val="1E2761"/>
+                </a:solidFill>
+                <a:latin typeface="Calibri"/>
+              </a:rPr>
+              <a:t>Build from:  </a:t>
+            </a:r>
+            <a:r>
+              <a:rPr sz="1000" b="0" i="0">
                 <a:solidFill>
                   <a:srgbClr val="5A5A5A"/>
                 </a:solidFill>
@@ -10644,7 +10656,7 @@
               <a:t>DM-Count code (MIT)  </a:t>
             </a:r>
             <a:r>
-              <a:rPr sz="1050" b="0" i="0">
+              <a:rPr sz="1000" b="0" i="0">
                 <a:solidFill>
                   <a:srgbClr val="5A5A5A"/>
                 </a:solidFill>
@@ -10654,7 +10666,7 @@
               <a:t>CSRNet model  </a:t>
             </a:r>
             <a:r>
-              <a:rPr sz="1050" b="0" i="0">
+              <a:rPr sz="1000" b="0" i="0">
                 <a:solidFill>
                   <a:srgbClr val="5A5A5A"/>
                 </a:solidFill>
@@ -10664,14 +10676,14 @@
               <a:t>homography calibrator  </a:t>
             </a:r>
             <a:r>
-              <a:rPr sz="1050" b="0" i="0">
+              <a:rPr sz="1000" b="0" i="0">
                 <a:solidFill>
                   <a:srgbClr val="5A5A5A"/>
                 </a:solidFill>
                 <a:latin typeface="Calibri"/>
                 <a:hlinkClick r:id="rId29"/>
               </a:rPr>
-              <a:t>DeepStream custom-model docs</a:t>
+              <a:t>DeepStream docs</a:t>
             </a:r>
           </a:p>
         </p:txBody>

--- a/deck/Raksha_Hackathon2026_Simplified.pptx
+++ b/deck/Raksha_Hackathon2026_Simplified.pptx
@@ -5632,7 +5632,7 @@
                 </a:solidFill>
                 <a:latin typeface="Calibri"/>
               </a:rPr>
-              <a:t>The system saw it coming. No gate opened.</a:t>
+              <a:t>Alerts existed. Action did not follow in time.</a:t>
             </a:r>
           </a:p>
         </p:txBody>
@@ -5998,7 +5998,7 @@
           <a:p>
             <a:pPr algn="l"/>
             <a:r>
-              <a:rPr sz="1600" b="1" i="0">
+              <a:rPr sz="1600" b="1">
                 <a:solidFill>
                   <a:srgbClr val="1E2761"/>
                 </a:solidFill>
@@ -6007,14 +6007,14 @@
               <a:t>After</a:t>
             </a:r>
             <a:r>
-              <a:rPr sz="1400" b="0" i="0">
+              <a:rPr sz="1400" b="0">
                 <a:solidFill>
                   <a:srgbClr val="111111"/>
                 </a:solidFill>
                 <a:latin typeface="Calibri"/>
               </a:rPr>
               <a:t>
-30 dead officially. The alarm watched. Nobody acted.</a:t>
+30 dead officially, despite live AI alerts. No action followed in time.</a:t>
             </a:r>
           </a:p>
         </p:txBody>
@@ -8706,7 +8706,6 @@
             </a:r>
           </a:p>
           <a:p>
-            <a:pPr algn="l"/>
             <a:r>
               <a:rPr sz="1500" b="1" i="0">
                 <a:solidFill>
@@ -8714,7 +8713,7 @@
                 </a:solidFill>
                 <a:latin typeface="Calibri"/>
               </a:rPr>
-              <a:t>Pressure at Gate B opens overflow at Gate A upstream. Kumbh's system watched without forcing an answer. Ours requires one.</a:t>
+              <a:t>Pressure at Gate B opens overflow at Gate A upstream. Kumbh's alarms reportedly went unactioned; ours forces an answer: owner, timer, log.</a:t>
             </a:r>
           </a:p>
         </p:txBody>

--- a/deck/Raksha_Hackathon2026_Simplified.pptx
+++ b/deck/Raksha_Hackathon2026_Simplified.pptx
@@ -7750,7 +7750,7 @@
                 </a:solidFill>
                 <a:latin typeface="Calibri"/>
               </a:rPr>
-              <a:t>Heatmaps cannot show a face. Saved video is blurred, wiped after 7 days, zero identity in core. Police clips are access-logged under DPDP Act 2023 rules.</a:t>
+              <a:t>Heatmaps cannot show a face. Saved video is blurred, wiped after 7 days, zero identity in core. Police clips are access-logged, designed to align with DPDP Act 2023 principles.</a:t>
             </a:r>
           </a:p>
         </p:txBody>
@@ -8304,7 +8304,7 @@
                 </a:solidFill>
                 <a:latin typeface="Calibri"/>
               </a:rPr>
-              <a:t>One Jetson-class box (about $250, 15 watts) per 1 to 4 cameras. Reuses existing CCTV. Pilot covers night, rain, oblique angles.</a:t>
+              <a:t>One Jetson-class box (about $250, 15 watts) per 1 to 4 cameras. Reuses existing CCTV. Pilot will test night, rain, oblique angles.</a:t>
             </a:r>
           </a:p>
         </p:txBody>
@@ -9342,7 +9342,7 @@
                 </a:solidFill>
                 <a:latin typeface="Calibri"/>
               </a:rPr>
-              <a:t>Pilot targets: warn before critical, page guards in seconds, publish the false-alarm rate, log every step. Still to prove: thresholds across venue types, calibration without surveys.</a:t>
+              <a:t>Pilot targets: warn before critical, alerts reach guards in seconds, publish the false-alarm rate, log every step. Still to prove: thresholds across venue types, calibration without surveys.</a:t>
             </a:r>
           </a:p>
         </p:txBody>
@@ -9697,6 +9697,18 @@
                 <a:latin typeface="Calibri"/>
               </a:rPr>
               <a:t>30 dead, Jan 2025, with AI live. 121 dead, Jul 2024, 80k permit vs 250k crowd.</a:t>
+            </a:r>
+          </a:p>
+          <a:p>
+            <a:pPr algn="l"/>
+            <a:r>
+              <a:rPr sz="1050">
+                <a:solidFill>
+                  <a:srgbClr val="FFFFFF"/>
+                </a:solidFill>
+                <a:latin typeface="Calibri"/>
+              </a:rPr>
+              <a:t>Sources: Indian Express (Kumbh tech), AP (Hathras).</a:t>
             </a:r>
           </a:p>
         </p:txBody>

--- a/deck/Raksha_Hackathon2026_Simplified.pptx
+++ b/deck/Raksha_Hackathon2026_Simplified.pptx
@@ -5826,7 +5826,7 @@
           <a:p>
             <a:pPr algn="l"/>
             <a:r>
-              <a:rPr sz="1600" b="1" i="0">
+              <a:rPr sz="1600" b="1">
                 <a:solidFill>
                   <a:srgbClr val="1E2761"/>
                 </a:solidFill>
@@ -5835,14 +5835,14 @@
               <a:t>Months before</a:t>
             </a:r>
             <a:r>
-              <a:rPr sz="1400" b="0" i="0">
+              <a:rPr sz="1400" b="0">
                 <a:solidFill>
                   <a:srgbClr val="111111"/>
                 </a:solidFill>
                 <a:latin typeface="Calibri"/>
               </a:rPr>
               <a:t>
-2,751 cameras and AI alerts go live.</a:t>
+2,751 cameras and AI alerts go live (TOI).</a:t>
             </a:r>
           </a:p>
         </p:txBody>
@@ -6688,13 +6688,13 @@
               </a:spcAft>
             </a:pPr>
             <a:r>
-              <a:rPr sz="1500" b="0" i="0">
+              <a:rPr sz="1350" b="0" i="0">
                 <a:solidFill>
                   <a:srgbClr val="5A5A5A"/>
                 </a:solidFill>
                 <a:latin typeface="Calibri"/>
               </a:rPr>
-              <a:t>density times movement</a:t>
+              <a:t>density x movement variance</a:t>
             </a:r>
           </a:p>
         </p:txBody>
@@ -7049,7 +7049,7 @@
                 </a:solidFill>
                 <a:latin typeface="Calibri"/>
               </a:rPr>
-              <a:t>Pressure is density times uneven movement. Density or speed alone cannot warn. (Johansson 2008)</a:t>
+              <a:t>Pressure is density times movement variance. Density or speed alone cannot warn. (Johansson 2008)</a:t>
             </a:r>
           </a:p>
         </p:txBody>
@@ -7612,13 +7612,13 @@
           <a:p>
             <a:pPr algn="l"/>
             <a:r>
-              <a:rPr sz="1400" b="0" i="0">
+              <a:rPr sz="1350" b="0" i="0">
                 <a:solidFill>
                   <a:srgbClr val="111111"/>
                 </a:solidFill>
                 <a:latin typeface="Calibri"/>
               </a:rPr>
-              <a:t>Each edge box keeps a 10-minute rolling buffer and sends small JSON numbers, never raw video. Only a confirmed Red alert exports its clip, signed, to the evidence pack.</a:t>
+              <a:t>Each edge box keeps a 10-minute rolling buffer and sends JSON numbers over site LAN or 4G failover. Only a confirmed Red alert exports its clip, signed.</a:t>
             </a:r>
           </a:p>
         </p:txBody>
@@ -8077,7 +8077,7 @@
                 </a:solidFill>
                 <a:latin typeface="Calibri"/>
               </a:rPr>
-              <a:t>Sends JSON numbers only, never video</a:t>
+              <a:t>Sends JSON numbers, not continuous video</a:t>
             </a:r>
           </a:p>
         </p:txBody>
@@ -8168,13 +8168,13 @@
           <a:p>
             <a:pPr algn="ctr"/>
             <a:r>
-              <a:rPr sz="1500" b="1" i="0">
+              <a:rPr sz="1400" b="1" i="0">
                 <a:solidFill>
                   <a:srgbClr val="FFFFFF"/>
                 </a:solidFill>
                 <a:latin typeface="Calibri"/>
               </a:rPr>
-              <a:t>Venue server: fuses every camera into one map</a:t>
+              <a:t>Venue servers (paired): fuse every camera into one map</a:t>
             </a:r>
           </a:p>
         </p:txBody>
@@ -8284,8 +8284,8 @@
         </p:nvSpPr>
         <p:spPr>
           <a:xfrm>
-            <a:off x="1005840" y="8641080"/>
-            <a:ext cx="7680960" cy="731520"/>
+            <a:off x="1005840" y="8595360"/>
+            <a:ext cx="7680960" cy="868680"/>
           </a:xfrm>
           <a:prstGeom prst="rect">
             <a:avLst/>
@@ -8298,13 +8298,13 @@
           <a:p>
             <a:pPr algn="l"/>
             <a:r>
-              <a:rPr sz="1300" b="0" i="0">
+              <a:rPr sz="1250" b="0" i="0">
                 <a:solidFill>
                   <a:srgbClr val="5A5A5A"/>
                 </a:solidFill>
                 <a:latin typeface="Calibri"/>
               </a:rPr>
-              <a:t>One Jetson-class box (about $250, 15 watts) per 1 to 4 cameras. Reuses existing CCTV. Pilot will test night, rain, oblique angles.</a:t>
+              <a:t>Compute target: 5 to 10 FPS per camera at reduced resolution; pressure moves over seconds, not frames. About $250 and 15 watts per edge box (1 to 4 cameras); server, handsets, network extra. Reuses existing CCTV.</a:t>
             </a:r>
           </a:p>
         </p:txBody>
@@ -9178,7 +9178,7 @@
                 </a:solidFill>
                 <a:latin typeface="Calibri"/>
               </a:rPr>
-              <a:t>Guards confirm on handsets; unanswered reds climb to venue command, then city control.</a:t>
+              <a:t>Guards confirm on handsets; unanswered reds climb to venue command, then city control (planned link).</a:t>
             </a:r>
           </a:p>
         </p:txBody>
@@ -9322,8 +9322,8 @@
         </p:nvSpPr>
         <p:spPr>
           <a:xfrm>
-            <a:off x="1005840" y="8732519"/>
-            <a:ext cx="7132320" cy="502919"/>
+            <a:off x="1005840" y="8485632"/>
+            <a:ext cx="7132320" cy="1115568"/>
           </a:xfrm>
           <a:prstGeom prst="rect">
             <a:avLst/>
@@ -9336,13 +9336,13 @@
           <a:p>
             <a:pPr algn="l"/>
             <a:r>
-              <a:rPr sz="1400" b="1" i="0">
+              <a:rPr sz="1250" b="1">
                 <a:solidFill>
                   <a:srgbClr val="1E2761"/>
                 </a:solidFill>
                 <a:latin typeface="Calibri"/>
               </a:rPr>
-              <a:t>Pilot targets: warn before critical, alerts reach guards in seconds, publish the false-alarm rate, log every step. Still to prove: thresholds across venue types, calibration without surveys.</a:t>
+              <a:t>Pilot targets: warn before critical, alerts reach guards in seconds, publish the false-alarm rate. Still to prove: thresholds, survey-free calibration, night/rain/angle tests.</a:t>
             </a:r>
           </a:p>
         </p:txBody>
@@ -9684,31 +9684,31 @@
                 </a:solidFill>
                 <a:latin typeface="Calibri"/>
               </a:rPr>
-              <a:t>Kumbh and Hathras</a:t>
+              <a:t>Three Indian disasters</a:t>
             </a:r>
           </a:p>
           <a:p>
             <a:pPr algn="l"/>
             <a:r>
-              <a:rPr sz="1300" b="0" i="0">
+              <a:rPr sz="1250" b="0" i="0">
                 <a:solidFill>
                   <a:srgbClr val="FFFFFF"/>
                 </a:solidFill>
                 <a:latin typeface="Calibri"/>
               </a:rPr>
-              <a:t>30 dead, Jan 2025, with AI live. 121 dead, Jul 2024, 80k permit vs 250k crowd.</a:t>
+              <a:t>Kumbh, Jan 2025: 30 dead, AI live. Hathras, Jul 2024: 121 dead, 80k vs 250k. Mumbai, Sep 2017: 23 dead, station footbridge.</a:t>
             </a:r>
           </a:p>
           <a:p>
             <a:pPr algn="l"/>
             <a:r>
-              <a:rPr sz="1050">
+              <a:rPr sz="1000" b="0" i="0">
                 <a:solidFill>
                   <a:srgbClr val="FFFFFF"/>
                 </a:solidFill>
                 <a:latin typeface="Calibri"/>
               </a:rPr>
-              <a:t>Sources: Indian Express (Kumbh tech), AP (Hathras).</a:t>
+              <a:t>Sources: Indian Express, Feb 2025; AP, Jul 2024; BBC, Sep 2017.</a:t>
             </a:r>
           </a:p>
         </p:txBody>
